--- a/docs/IC_Kaohsiung_Game_Staff_Bilingual.pptx
+++ b/docs/IC_Kaohsiung_Game_Staff_Bilingual.pptx
@@ -4,6 +4,9 @@
   <p:sldMasterIdLst>
     <p:sldMasterId id="2147483648" r:id="rId1"/>
   </p:sldMasterIdLst>
+  <p:notesMasterIdLst>
+    <p:notesMasterId r:id="rId22"/>
+  </p:notesMasterIdLst>
   <p:sldIdLst>
     <p:sldId id="256" r:id="rId2"/>
     <p:sldId id="257" r:id="rId3"/>
@@ -26,9 +29,6 @@
     <p:sldId id="274" r:id="rId20"/>
     <p:sldId id="275" r:id="rId21"/>
   </p:sldIdLst>
-  <p:notesMasterIdLst>
-    <p:notesMasterId r:id="rId22"/>
-  </p:notesMasterIdLst>
   <p:sldSz cx="12192000" cy="6858000"/>
   <p:notesSz cx="6858000" cy="12192000"/>
   <p:defaultTextStyle>
@@ -123,6 +123,11 @@
       </a:defRPr>
     </a:lvl9pPr>
   </p:defaultTextStyle>
+  <p:extLst>
+    <p:ext uri="{EFAFB233-063F-42B5-8137-9DF3F51BA10A}">
+      <p15:sldGuideLst xmlns:p15="http://schemas.microsoft.com/office/powerpoint/2012/main"/>
+    </p:ext>
+  </p:extLst>
 </p:presentation>
 </file>
 
@@ -148,234 +153,10 @@
           <a:chExt cx="0" cy="0"/>
         </a:xfrm>
       </p:grpSpPr>
-      <p:sp>
-        <p:nvSpPr>
-          <p:cNvPr id="2" name="Header Placeholder 1"/>
-          <p:cNvSpPr>
-            <a:spLocks noGrp="1"/>
-          </p:cNvSpPr>
-          <p:nvPr>
-            <p:ph type="hdr" sz="quarter"/>
-          </p:nvPr>
-        </p:nvSpPr>
-        <p:spPr>
-          <a:xfrm>
-            <a:off x="0" y="0"/>
-            <a:ext cx="2971800" cy="458788"/>
-          </a:xfrm>
-          <a:prstGeom prst="rect">
-            <a:avLst/>
-          </a:prstGeom>
-        </p:spPr>
-        <p:txBody>
-          <a:bodyPr vert="horz" lIns="91440" tIns="45720" rIns="91440" bIns="45720" rtlCol="0"/>
-          <a:lstStyle>
-            <a:lvl1pPr algn="l">
-              <a:defRPr sz="1200"/>
-            </a:lvl1pPr>
-          </a:lstStyle>
-          <a:p>
-            <a:endParaRPr lang="en-US"/>
-          </a:p>
-        </p:txBody>
-      </p:sp>
-      <p:sp>
-        <p:nvSpPr>
-          <p:cNvPr id="3" name="Date Placeholder 2"/>
-          <p:cNvSpPr>
-            <a:spLocks noGrp="1"/>
-          </p:cNvSpPr>
-          <p:nvPr>
-            <p:ph type="dt" idx="1"/>
-          </p:nvPr>
-        </p:nvSpPr>
-        <p:spPr>
-          <a:xfrm>
-            <a:off x="3884613" y="0"/>
-            <a:ext cx="2971800" cy="458788"/>
-          </a:xfrm>
-          <a:prstGeom prst="rect">
-            <a:avLst/>
-          </a:prstGeom>
-        </p:spPr>
-        <p:txBody>
-          <a:bodyPr vert="horz" lIns="91440" tIns="45720" rIns="91440" bIns="45720" rtlCol="0"/>
-          <a:lstStyle>
-            <a:lvl1pPr algn="r">
-              <a:defRPr sz="1200"/>
-            </a:lvl1pPr>
-          </a:lstStyle>
-          <a:p>
-            <a:fld id="{5282F153-3F37-0F45-9E97-73ACFA13230C}" type="datetimeFigureOut">
-              <a:rPr lang="en-US"/>
-              <a:t>7/23/19</a:t>
-            </a:fld>
-            <a:endParaRPr lang="en-US"/>
-          </a:p>
-        </p:txBody>
-      </p:sp>
-      <p:sp>
-        <p:nvSpPr>
-          <p:cNvPr id="4" name="Slide Image Placeholder 3"/>
-          <p:cNvSpPr>
-            <a:spLocks noGrp="1" noRot="1" noChangeAspect="1"/>
-          </p:cNvSpPr>
-          <p:nvPr>
-            <p:ph type="sldImg" idx="2"/>
-          </p:nvPr>
-        </p:nvSpPr>
-        <p:spPr>
-          <a:xfrm>
-            <a:off x="685800" y="1143000"/>
-            <a:ext cx="5486400" cy="3086100"/>
-          </a:xfrm>
-          <a:prstGeom prst="rect">
-            <a:avLst/>
-          </a:prstGeom>
-          <a:noFill/>
-          <a:ln w="12700">
-            <a:solidFill>
-              <a:prstClr val="black"/>
-            </a:solidFill>
-          </a:ln>
-        </p:spPr>
-        <p:txBody>
-          <a:bodyPr vert="horz" lIns="91440" tIns="45720" rIns="91440" bIns="45720" rtlCol="0" anchor="ctr"/>
-          <a:lstStyle/>
-          <a:p>
-            <a:endParaRPr lang="en-US"/>
-          </a:p>
-        </p:txBody>
-      </p:sp>
-      <p:sp>
-        <p:nvSpPr>
-          <p:cNvPr id="5" name="Notes Placeholder 4"/>
-          <p:cNvSpPr>
-            <a:spLocks noGrp="1"/>
-          </p:cNvSpPr>
-          <p:nvPr>
-            <p:ph type="body" sz="quarter" idx="3"/>
-          </p:nvPr>
-        </p:nvSpPr>
-        <p:spPr>
-          <a:xfrm>
-            <a:off x="685800" y="4400550"/>
-            <a:ext cx="5486400" cy="3600450"/>
-          </a:xfrm>
-          <a:prstGeom prst="rect">
-            <a:avLst/>
-          </a:prstGeom>
-        </p:spPr>
-        <p:txBody>
-          <a:bodyPr vert="horz" lIns="91440" tIns="45720" rIns="91440" bIns="45720" rtlCol="0"/>
-          <a:lstStyle/>
-          <a:p>
-            <a:pPr lvl="0"/>
-            <a:r>
-              <a:rPr lang="en-US"/>
-              <a:t>Click to edit Master text styles</a:t>
-            </a:r>
-          </a:p>
-          <a:p>
-            <a:pPr lvl="1"/>
-            <a:r>
-              <a:rPr lang="en-US"/>
-              <a:t>Second level</a:t>
-            </a:r>
-          </a:p>
-          <a:p>
-            <a:pPr lvl="2"/>
-            <a:r>
-              <a:rPr lang="en-US"/>
-              <a:t>Third level</a:t>
-            </a:r>
-          </a:p>
-          <a:p>
-            <a:pPr lvl="3"/>
-            <a:r>
-              <a:rPr lang="en-US"/>
-              <a:t>Fourth level</a:t>
-            </a:r>
-          </a:p>
-          <a:p>
-            <a:pPr lvl="4"/>
-            <a:r>
-              <a:rPr lang="en-US"/>
-              <a:t>Fifth level</a:t>
-            </a:r>
-          </a:p>
-        </p:txBody>
-      </p:sp>
-      <p:sp>
-        <p:nvSpPr>
-          <p:cNvPr id="6" name="Footer Placeholder 5"/>
-          <p:cNvSpPr>
-            <a:spLocks noGrp="1"/>
-          </p:cNvSpPr>
-          <p:nvPr>
-            <p:ph type="ftr" sz="quarter" idx="4"/>
-          </p:nvPr>
-        </p:nvSpPr>
-        <p:spPr>
-          <a:xfrm>
-            <a:off x="0" y="8685213"/>
-            <a:ext cx="2971800" cy="458787"/>
-          </a:xfrm>
-          <a:prstGeom prst="rect">
-            <a:avLst/>
-          </a:prstGeom>
-        </p:spPr>
-        <p:txBody>
-          <a:bodyPr vert="horz" lIns="91440" tIns="45720" rIns="91440" bIns="45720" rtlCol="0" anchor="b"/>
-          <a:lstStyle>
-            <a:lvl1pPr algn="l">
-              <a:defRPr sz="1200"/>
-            </a:lvl1pPr>
-          </a:lstStyle>
-          <a:p>
-            <a:endParaRPr lang="en-US"/>
-          </a:p>
-        </p:txBody>
-      </p:sp>
-      <p:sp>
-        <p:nvSpPr>
-          <p:cNvPr id="7" name="Slide Number Placeholder 6"/>
-          <p:cNvSpPr>
-            <a:spLocks noGrp="1"/>
-          </p:cNvSpPr>
-          <p:nvPr>
-            <p:ph type="sldNum" sz="quarter" idx="5"/>
-          </p:nvPr>
-        </p:nvSpPr>
-        <p:spPr>
-          <a:xfrm>
-            <a:off x="3884613" y="8685213"/>
-            <a:ext cx="2971800" cy="458787"/>
-          </a:xfrm>
-          <a:prstGeom prst="rect">
-            <a:avLst/>
-          </a:prstGeom>
-        </p:spPr>
-        <p:txBody>
-          <a:bodyPr vert="horz" lIns="91440" tIns="45720" rIns="91440" bIns="45720" rtlCol="0" anchor="b"/>
-          <a:lstStyle>
-            <a:lvl1pPr algn="r">
-              <a:defRPr sz="1200"/>
-            </a:lvl1pPr>
-          </a:lstStyle>
-          <a:p>
-            <a:fld id="{CE5E9CC1-C706-0F49-92D6-E571CC5EEA8F}" type="slidenum">
-              <a:rPr lang="en-US"/>
-              <a:t>‹#›</a:t>
-            </a:fld>
-            <a:endParaRPr lang="en-US"/>
-          </a:p>
-        </p:txBody>
-      </p:sp>
     </p:spTree>
     <p:extLst>
       <p:ext uri="{BB962C8B-B14F-4D97-AF65-F5344CB8AC3E}">
-        <p14:creationId xmlns:p14="http://schemas.microsoft.com/office/powerpoint/2010/main" val="1024086991"/>
+        <p14:creationId xmlns:p14="http://schemas.microsoft.com/office/powerpoint/2010/main" val="404513436"/>
       </p:ext>
     </p:extLst>
   </p:cSld>
@@ -519,10 +300,6 @@
           <a:bodyPr/>
           <a:lstStyle/>
           <a:p>
-            <a:r>
-              <a:rPr lang="en-US" dirty="0"/>
-              <a:t/>
-            </a:r>
             <a:endParaRPr lang="en-US" dirty="0"/>
           </a:p>
         </p:txBody>
@@ -607,10 +384,6 @@
           <a:bodyPr/>
           <a:lstStyle/>
           <a:p>
-            <a:r>
-              <a:rPr lang="en-US" dirty="0"/>
-              <a:t/>
-            </a:r>
             <a:endParaRPr lang="en-US" dirty="0"/>
           </a:p>
         </p:txBody>
@@ -695,10 +468,6 @@
           <a:bodyPr/>
           <a:lstStyle/>
           <a:p>
-            <a:r>
-              <a:rPr lang="en-US" dirty="0"/>
-              <a:t/>
-            </a:r>
             <a:endParaRPr lang="en-US" dirty="0"/>
           </a:p>
         </p:txBody>
@@ -783,10 +552,6 @@
           <a:bodyPr/>
           <a:lstStyle/>
           <a:p>
-            <a:r>
-              <a:rPr lang="en-US" dirty="0"/>
-              <a:t/>
-            </a:r>
             <a:endParaRPr lang="en-US" dirty="0"/>
           </a:p>
         </p:txBody>
@@ -871,10 +636,6 @@
           <a:bodyPr/>
           <a:lstStyle/>
           <a:p>
-            <a:r>
-              <a:rPr lang="en-US" dirty="0"/>
-              <a:t/>
-            </a:r>
             <a:endParaRPr lang="en-US" dirty="0"/>
           </a:p>
         </p:txBody>
@@ -959,10 +720,6 @@
           <a:bodyPr/>
           <a:lstStyle/>
           <a:p>
-            <a:r>
-              <a:rPr lang="en-US" dirty="0"/>
-              <a:t/>
-            </a:r>
             <a:endParaRPr lang="en-US" dirty="0"/>
           </a:p>
         </p:txBody>
@@ -1047,10 +804,6 @@
           <a:bodyPr/>
           <a:lstStyle/>
           <a:p>
-            <a:r>
-              <a:rPr lang="en-US" dirty="0"/>
-              <a:t/>
-            </a:r>
             <a:endParaRPr lang="en-US" dirty="0"/>
           </a:p>
         </p:txBody>
@@ -1135,10 +888,6 @@
           <a:bodyPr/>
           <a:lstStyle/>
           <a:p>
-            <a:r>
-              <a:rPr lang="en-US" dirty="0"/>
-              <a:t/>
-            </a:r>
             <a:endParaRPr lang="en-US" dirty="0"/>
           </a:p>
         </p:txBody>
@@ -1223,10 +972,6 @@
           <a:bodyPr/>
           <a:lstStyle/>
           <a:p>
-            <a:r>
-              <a:rPr lang="en-US" dirty="0"/>
-              <a:t/>
-            </a:r>
             <a:endParaRPr lang="en-US" dirty="0"/>
           </a:p>
         </p:txBody>
@@ -1311,10 +1056,6 @@
           <a:bodyPr/>
           <a:lstStyle/>
           <a:p>
-            <a:r>
-              <a:rPr lang="en-US" dirty="0"/>
-              <a:t/>
-            </a:r>
             <a:endParaRPr lang="en-US" dirty="0"/>
           </a:p>
         </p:txBody>
@@ -1399,10 +1140,6 @@
           <a:bodyPr/>
           <a:lstStyle/>
           <a:p>
-            <a:r>
-              <a:rPr lang="en-US" dirty="0"/>
-              <a:t/>
-            </a:r>
             <a:endParaRPr lang="en-US" dirty="0"/>
           </a:p>
         </p:txBody>
@@ -1487,10 +1224,6 @@
           <a:bodyPr/>
           <a:lstStyle/>
           <a:p>
-            <a:r>
-              <a:rPr lang="en-US" dirty="0"/>
-              <a:t/>
-            </a:r>
             <a:endParaRPr lang="en-US" dirty="0"/>
           </a:p>
         </p:txBody>
@@ -1575,10 +1308,6 @@
           <a:bodyPr/>
           <a:lstStyle/>
           <a:p>
-            <a:r>
-              <a:rPr lang="en-US" dirty="0"/>
-              <a:t/>
-            </a:r>
             <a:endParaRPr lang="en-US" dirty="0"/>
           </a:p>
         </p:txBody>
@@ -1663,10 +1392,6 @@
           <a:bodyPr/>
           <a:lstStyle/>
           <a:p>
-            <a:r>
-              <a:rPr lang="en-US" dirty="0"/>
-              <a:t/>
-            </a:r>
             <a:endParaRPr lang="en-US" dirty="0"/>
           </a:p>
         </p:txBody>
@@ -1751,10 +1476,6 @@
           <a:bodyPr/>
           <a:lstStyle/>
           <a:p>
-            <a:r>
-              <a:rPr lang="en-US" dirty="0"/>
-              <a:t/>
-            </a:r>
             <a:endParaRPr lang="en-US" dirty="0"/>
           </a:p>
         </p:txBody>
@@ -1839,10 +1560,6 @@
           <a:bodyPr/>
           <a:lstStyle/>
           <a:p>
-            <a:r>
-              <a:rPr lang="en-US" dirty="0"/>
-              <a:t/>
-            </a:r>
             <a:endParaRPr lang="en-US" dirty="0"/>
           </a:p>
         </p:txBody>
@@ -1927,10 +1644,6 @@
           <a:bodyPr/>
           <a:lstStyle/>
           <a:p>
-            <a:r>
-              <a:rPr lang="en-US" dirty="0"/>
-              <a:t/>
-            </a:r>
             <a:endParaRPr lang="en-US" dirty="0"/>
           </a:p>
         </p:txBody>
@@ -2015,10 +1728,6 @@
           <a:bodyPr/>
           <a:lstStyle/>
           <a:p>
-            <a:r>
-              <a:rPr lang="en-US" dirty="0"/>
-              <a:t/>
-            </a:r>
             <a:endParaRPr lang="en-US" dirty="0"/>
           </a:p>
         </p:txBody>
@@ -2103,10 +1812,6 @@
           <a:bodyPr/>
           <a:lstStyle/>
           <a:p>
-            <a:r>
-              <a:rPr lang="en-US" dirty="0"/>
-              <a:t/>
-            </a:r>
             <a:endParaRPr lang="en-US" dirty="0"/>
           </a:p>
         </p:txBody>
@@ -2191,10 +1896,6 @@
           <a:bodyPr/>
           <a:lstStyle/>
           <a:p>
-            <a:r>
-              <a:rPr lang="en-US" dirty="0"/>
-              <a:t/>
-            </a:r>
             <a:endParaRPr lang="en-US" dirty="0"/>
           </a:p>
         </p:txBody>
@@ -2268,6 +1969,11 @@
 <file path=ppt/slideMasters/slideMaster1.xml><?xml version="1.0" encoding="utf-8"?>
 <p:sldMaster xmlns:a="http://schemas.openxmlformats.org/drawingml/2006/main" xmlns:r="http://schemas.openxmlformats.org/officeDocument/2006/relationships" xmlns:p="http://schemas.openxmlformats.org/presentationml/2006/main">
   <p:cSld>
+    <p:bg>
+      <p:bgRef idx="1001">
+        <a:schemeClr val="bg1"/>
+      </p:bgRef>
+    </p:bg>
     <p:spTree>
       <p:nvGrpSpPr>
         <p:cNvPr id="1" name=""/>
@@ -2550,6 +2256,7 @@
         <a:solidFill>
           <a:srgbClr val="3D3935"/>
         </a:solidFill>
+        <a:effectLst/>
       </p:bgPr>
     </p:bg>
     <p:spTree>
@@ -2568,14 +2275,14 @@
       </p:grpSpPr>
       <p:pic>
         <p:nvPicPr>
-          <p:cNvPr id="2" name="Image 0" descr="preencoded.png">    </p:cNvPr>
+          <p:cNvPr id="2" name="Image 0" descr="preencoded.png"/>
           <p:cNvPicPr>
             <a:picLocks noChangeAspect="1"/>
           </p:cNvPicPr>
           <p:nvPr/>
         </p:nvPicPr>
         <p:blipFill>
-          <a:blip r:embed="rId1"/>
+          <a:blip r:embed="rId3"/>
           <a:stretch>
             <a:fillRect/>
           </a:stretch>
@@ -2611,11 +2318,11 @@
           <a:bodyPr wrap="square" lIns="0" tIns="0" rIns="0" bIns="0" rtlCol="0" anchor="ctr"/>
           <a:lstStyle/>
           <a:p>
-            <a:pPr indent="0" marL="0">
-              <a:buNone/>
-            </a:pPr>
-            <a:r>
-              <a:rPr lang="en-US" sz="1400" i="1" spc="300" kern="0" dirty="0">
+            <a:pPr marL="0" indent="0">
+              <a:buNone/>
+            </a:pPr>
+            <a:r>
+              <a:rPr lang="en-US" sz="1400" i="1" kern="0" spc="300" dirty="0">
                 <a:solidFill>
                   <a:srgbClr val="CEB4A9"/>
                 </a:solidFill>
@@ -2650,11 +2357,11 @@
           <a:bodyPr wrap="square" lIns="0" tIns="0" rIns="0" bIns="0" rtlCol="0" anchor="ctr"/>
           <a:lstStyle/>
           <a:p>
-            <a:pPr indent="0" marL="0">
-              <a:buNone/>
-            </a:pPr>
-            <a:r>
-              <a:rPr lang="en-US" sz="1100" spc="200" kern="0" dirty="0">
+            <a:pPr marL="0" indent="0">
+              <a:buNone/>
+            </a:pPr>
+            <a:r>
+              <a:rPr lang="en-US" sz="1100" kern="0" spc="200" dirty="0">
                 <a:solidFill>
                   <a:srgbClr val="DAD9D6"/>
                 </a:solidFill>
@@ -2711,7 +2418,7 @@
           <a:bodyPr wrap="square" lIns="0" tIns="0" rIns="0" bIns="0" rtlCol="0" anchor="ctr"/>
           <a:lstStyle/>
           <a:p>
-            <a:pPr indent="0" marL="0">
+            <a:pPr marL="0" indent="0">
               <a:buNone/>
             </a:pPr>
             <a:r>
@@ -2750,11 +2457,11 @@
           <a:bodyPr wrap="square" lIns="0" tIns="0" rIns="0" bIns="0" rtlCol="0" anchor="ctr"/>
           <a:lstStyle/>
           <a:p>
-            <a:pPr indent="0" marL="0">
-              <a:buNone/>
-            </a:pPr>
-            <a:r>
-              <a:rPr lang="en-US" sz="2400" i="1" spc="200" kern="0" dirty="0">
+            <a:pPr marL="0" indent="0">
+              <a:buNone/>
+            </a:pPr>
+            <a:r>
+              <a:rPr lang="en-US" sz="2400" i="1" kern="0" spc="200" dirty="0">
                 <a:solidFill>
                   <a:srgbClr val="CEB4A9"/>
                 </a:solidFill>
@@ -2789,7 +2496,7 @@
           <a:bodyPr wrap="square" lIns="0" tIns="0" rIns="0" bIns="0" rtlCol="0" anchor="ctr"/>
           <a:lstStyle/>
           <a:p>
-            <a:pPr indent="0" marL="0">
+            <a:pPr marL="0" indent="0">
               <a:buNone/>
             </a:pPr>
             <a:r>
@@ -2825,7 +2532,7 @@
           <a:bodyPr wrap="square" lIns="0" tIns="0" rIns="0" bIns="0" rtlCol="0" anchor="ctr"/>
           <a:lstStyle/>
           <a:p>
-            <a:pPr indent="0" marL="0">
+            <a:pPr marL="0" indent="0">
               <a:buNone/>
             </a:pPr>
             <a:r>
@@ -2886,7 +2593,7 @@
           <a:bodyPr wrap="square" lIns="0" tIns="0" rIns="0" bIns="0" rtlCol="0" anchor="ctr"/>
           <a:lstStyle/>
           <a:p>
-            <a:pPr indent="0" marL="0">
+            <a:pPr marL="0" indent="0">
               <a:buNone/>
             </a:pPr>
             <a:r>
@@ -2922,7 +2629,7 @@
           <a:bodyPr wrap="square" lIns="0" tIns="0" rIns="0" bIns="0" rtlCol="0" anchor="ctr"/>
           <a:lstStyle/>
           <a:p>
-            <a:pPr indent="0" marL="0">
+            <a:pPr marL="0" indent="0">
               <a:buNone/>
             </a:pPr>
             <a:r>
@@ -2953,6 +2660,7 @@
         <a:solidFill>
           <a:srgbClr val="FFFFFF"/>
         </a:solidFill>
+        <a:effectLst/>
       </p:bgPr>
     </p:bg>
     <p:spTree>
@@ -2990,7 +2698,7 @@
           <a:bodyPr wrap="square" lIns="0" tIns="0" rIns="0" bIns="0" rtlCol="0" anchor="ctr"/>
           <a:lstStyle/>
           <a:p>
-            <a:pPr indent="0" marL="0">
+            <a:pPr marL="0" indent="0">
               <a:buNone/>
             </a:pPr>
             <a:r>
@@ -3029,11 +2737,11 @@
           <a:bodyPr wrap="square" lIns="0" tIns="0" rIns="0" bIns="0" rtlCol="0" anchor="ctr"/>
           <a:lstStyle/>
           <a:p>
-            <a:pPr indent="0" marL="0">
-              <a:buNone/>
-            </a:pPr>
-            <a:r>
-              <a:rPr lang="en-US" sz="1300" i="1" spc="200" kern="0" dirty="0">
+            <a:pPr marL="0" indent="0">
+              <a:buNone/>
+            </a:pPr>
+            <a:r>
+              <a:rPr lang="en-US" sz="1300" i="1" kern="0" spc="200" dirty="0">
                 <a:solidFill>
                   <a:srgbClr val="686869"/>
                 </a:solidFill>
@@ -3090,7 +2798,7 @@
           <a:bodyPr wrap="square" lIns="0" tIns="0" rIns="0" bIns="0" rtlCol="0" anchor="ctr"/>
           <a:lstStyle/>
           <a:p>
-            <a:pPr indent="0" marL="0">
+            <a:pPr marL="0" indent="0">
               <a:buNone/>
             </a:pPr>
             <a:r>
@@ -3126,7 +2834,7 @@
           <a:bodyPr wrap="square" lIns="0" tIns="0" rIns="0" bIns="0" rtlCol="0" anchor="ctr"/>
           <a:lstStyle/>
           <a:p>
-            <a:pPr indent="0" marL="0">
+            <a:pPr marL="0" indent="0">
               <a:buNone/>
             </a:pPr>
             <a:r>
@@ -3165,7 +2873,7 @@
             <a:prstDash val="solid"/>
           </a:ln>
           <a:effectLst>
-            <a:outerShdw sx="100000" sy="100000" kx="0" ky="0" algn="bl" rotWithShape="0" blurRad="101600" dist="25400" dir="5400000">
+            <a:outerShdw blurRad="101600" dist="25400" dir="5400000" algn="bl" rotWithShape="0">
               <a:srgbClr val="000000">
                 <a:alpha val="6000"/>
               </a:srgbClr>
@@ -3214,7 +2922,7 @@
           <a:bodyPr wrap="square" lIns="0" tIns="0" rIns="0" bIns="0" rtlCol="0" anchor="ctr"/>
           <a:lstStyle/>
           <a:p>
-            <a:pPr algn="ctr" indent="0" marL="0">
+            <a:pPr marL="0" indent="0" algn="ctr">
               <a:buNone/>
             </a:pPr>
             <a:r>
@@ -3234,14 +2942,14 @@
       </p:sp>
       <p:pic>
         <p:nvPicPr>
-          <p:cNvPr id="10" name="Image 0" descr="preencoded.png">    </p:cNvPr>
+          <p:cNvPr id="10" name="Image 0" descr="preencoded.png"/>
           <p:cNvPicPr>
             <a:picLocks noChangeAspect="1"/>
           </p:cNvPicPr>
           <p:nvPr/>
         </p:nvPicPr>
         <p:blipFill>
-          <a:blip r:embed="rId1"/>
+          <a:blip r:embed="rId3"/>
           <a:stretch>
             <a:fillRect/>
           </a:stretch>
@@ -3277,7 +2985,7 @@
           <a:bodyPr wrap="square" lIns="0" tIns="0" rIns="0" bIns="0" rtlCol="0" anchor="ctr"/>
           <a:lstStyle/>
           <a:p>
-            <a:pPr algn="ctr" indent="0" marL="0">
+            <a:pPr marL="0" indent="0" algn="ctr">
               <a:buNone/>
             </a:pPr>
             <a:r>
@@ -3313,7 +3021,7 @@
           <a:bodyPr wrap="square" lIns="0" tIns="0" rIns="0" bIns="0" rtlCol="0" anchor="ctr"/>
           <a:lstStyle/>
           <a:p>
-            <a:pPr algn="ctr" indent="0" marL="0">
+            <a:pPr marL="0" indent="0" algn="ctr">
               <a:buNone/>
             </a:pPr>
             <a:r>
@@ -3374,7 +3082,7 @@
           <a:bodyPr wrap="square" lIns="0" tIns="0" rIns="0" bIns="0" rtlCol="0" anchor="ctr"/>
           <a:lstStyle/>
           <a:p>
-            <a:pPr algn="ctr" indent="0" marL="0">
+            <a:pPr marL="0" indent="0" algn="ctr">
               <a:buNone/>
             </a:pPr>
             <a:r>
@@ -3413,7 +3121,7 @@
           <a:bodyPr wrap="square" lIns="0" tIns="0" rIns="0" bIns="0" rtlCol="0" anchor="ctr"/>
           <a:lstStyle/>
           <a:p>
-            <a:pPr algn="ctr" indent="0" marL="0">
+            <a:pPr marL="0" indent="0" algn="ctr">
               <a:buNone/>
             </a:pPr>
             <a:r>
@@ -3449,7 +3157,7 @@
           <a:bodyPr wrap="square" lIns="0" tIns="0" rIns="0" bIns="0" rtlCol="0" anchor="ctr"/>
           <a:lstStyle/>
           <a:p>
-            <a:pPr algn="ctr" indent="0" marL="0">
+            <a:pPr marL="0" indent="0" algn="ctr">
               <a:buNone/>
             </a:pPr>
             <a:r>
@@ -3488,7 +3196,7 @@
             <a:prstDash val="solid"/>
           </a:ln>
           <a:effectLst>
-            <a:outerShdw sx="100000" sy="100000" kx="0" ky="0" algn="bl" rotWithShape="0" blurRad="101600" dist="25400" dir="5400000">
+            <a:outerShdw blurRad="101600" dist="25400" dir="5400000" algn="bl" rotWithShape="0">
               <a:srgbClr val="000000">
                 <a:alpha val="6000"/>
               </a:srgbClr>
@@ -3537,7 +3245,7 @@
           <a:bodyPr wrap="square" lIns="0" tIns="0" rIns="0" bIns="0" rtlCol="0" anchor="ctr"/>
           <a:lstStyle/>
           <a:p>
-            <a:pPr algn="ctr" indent="0" marL="0">
+            <a:pPr marL="0" indent="0" algn="ctr">
               <a:buNone/>
             </a:pPr>
             <a:r>
@@ -3557,14 +3265,14 @@
       </p:sp>
       <p:pic>
         <p:nvPicPr>
-          <p:cNvPr id="20" name="Image 1" descr="preencoded.png">    </p:cNvPr>
+          <p:cNvPr id="20" name="Image 1" descr="preencoded.png"/>
           <p:cNvPicPr>
             <a:picLocks noChangeAspect="1"/>
           </p:cNvPicPr>
           <p:nvPr/>
         </p:nvPicPr>
         <p:blipFill>
-          <a:blip r:embed="rId2"/>
+          <a:blip r:embed="rId4"/>
           <a:stretch>
             <a:fillRect/>
           </a:stretch>
@@ -3600,7 +3308,7 @@
           <a:bodyPr wrap="square" lIns="0" tIns="0" rIns="0" bIns="0" rtlCol="0" anchor="ctr"/>
           <a:lstStyle/>
           <a:p>
-            <a:pPr algn="ctr" indent="0" marL="0">
+            <a:pPr marL="0" indent="0" algn="ctr">
               <a:buNone/>
             </a:pPr>
             <a:r>
@@ -3636,7 +3344,7 @@
           <a:bodyPr wrap="square" lIns="0" tIns="0" rIns="0" bIns="0" rtlCol="0" anchor="ctr"/>
           <a:lstStyle/>
           <a:p>
-            <a:pPr algn="ctr" indent="0" marL="0">
+            <a:pPr marL="0" indent="0" algn="ctr">
               <a:buNone/>
             </a:pPr>
             <a:r>
@@ -3697,7 +3405,7 @@
           <a:bodyPr wrap="square" lIns="0" tIns="0" rIns="0" bIns="0" rtlCol="0" anchor="ctr"/>
           <a:lstStyle/>
           <a:p>
-            <a:pPr algn="ctr" indent="0" marL="0">
+            <a:pPr marL="0" indent="0" algn="ctr">
               <a:buNone/>
             </a:pPr>
             <a:r>
@@ -3736,7 +3444,7 @@
           <a:bodyPr wrap="square" lIns="0" tIns="0" rIns="0" bIns="0" rtlCol="0" anchor="ctr"/>
           <a:lstStyle/>
           <a:p>
-            <a:pPr algn="ctr" indent="0" marL="0">
+            <a:pPr marL="0" indent="0" algn="ctr">
               <a:buNone/>
             </a:pPr>
             <a:r>
@@ -3772,7 +3480,7 @@
           <a:bodyPr wrap="square" lIns="0" tIns="0" rIns="0" bIns="0" rtlCol="0" anchor="ctr"/>
           <a:lstStyle/>
           <a:p>
-            <a:pPr algn="ctr" indent="0" marL="0">
+            <a:pPr marL="0" indent="0" algn="ctr">
               <a:buNone/>
             </a:pPr>
             <a:r>
@@ -3811,7 +3519,7 @@
             <a:prstDash val="solid"/>
           </a:ln>
           <a:effectLst>
-            <a:outerShdw sx="100000" sy="100000" kx="0" ky="0" algn="bl" rotWithShape="0" blurRad="101600" dist="25400" dir="5400000">
+            <a:outerShdw blurRad="101600" dist="25400" dir="5400000" algn="bl" rotWithShape="0">
               <a:srgbClr val="000000">
                 <a:alpha val="6000"/>
               </a:srgbClr>
@@ -3860,7 +3568,7 @@
           <a:bodyPr wrap="square" lIns="0" tIns="0" rIns="0" bIns="0" rtlCol="0" anchor="ctr"/>
           <a:lstStyle/>
           <a:p>
-            <a:pPr algn="ctr" indent="0" marL="0">
+            <a:pPr marL="0" indent="0" algn="ctr">
               <a:buNone/>
             </a:pPr>
             <a:r>
@@ -3880,14 +3588,14 @@
       </p:sp>
       <p:pic>
         <p:nvPicPr>
-          <p:cNvPr id="30" name="Image 2" descr="preencoded.png">    </p:cNvPr>
+          <p:cNvPr id="30" name="Image 2" descr="preencoded.png"/>
           <p:cNvPicPr>
             <a:picLocks noChangeAspect="1"/>
           </p:cNvPicPr>
           <p:nvPr/>
         </p:nvPicPr>
         <p:blipFill>
-          <a:blip r:embed="rId3"/>
+          <a:blip r:embed="rId5"/>
           <a:stretch>
             <a:fillRect/>
           </a:stretch>
@@ -3923,7 +3631,7 @@
           <a:bodyPr wrap="square" lIns="0" tIns="0" rIns="0" bIns="0" rtlCol="0" anchor="ctr"/>
           <a:lstStyle/>
           <a:p>
-            <a:pPr algn="ctr" indent="0" marL="0">
+            <a:pPr marL="0" indent="0" algn="ctr">
               <a:buNone/>
             </a:pPr>
             <a:r>
@@ -3959,7 +3667,7 @@
           <a:bodyPr wrap="square" lIns="0" tIns="0" rIns="0" bIns="0" rtlCol="0" anchor="ctr"/>
           <a:lstStyle/>
           <a:p>
-            <a:pPr algn="ctr" indent="0" marL="0">
+            <a:pPr marL="0" indent="0" algn="ctr">
               <a:buNone/>
             </a:pPr>
             <a:r>
@@ -4020,7 +3728,7 @@
           <a:bodyPr wrap="square" lIns="0" tIns="0" rIns="0" bIns="0" rtlCol="0" anchor="ctr"/>
           <a:lstStyle/>
           <a:p>
-            <a:pPr algn="ctr" indent="0" marL="0">
+            <a:pPr marL="0" indent="0" algn="ctr">
               <a:buNone/>
             </a:pPr>
             <a:r>
@@ -4059,7 +3767,7 @@
           <a:bodyPr wrap="square" lIns="0" tIns="0" rIns="0" bIns="0" rtlCol="0" anchor="ctr"/>
           <a:lstStyle/>
           <a:p>
-            <a:pPr algn="ctr" indent="0" marL="0">
+            <a:pPr marL="0" indent="0" algn="ctr">
               <a:buNone/>
             </a:pPr>
             <a:r>
@@ -4095,7 +3803,7 @@
           <a:bodyPr wrap="square" lIns="0" tIns="0" rIns="0" bIns="0" rtlCol="0" anchor="ctr"/>
           <a:lstStyle/>
           <a:p>
-            <a:pPr algn="ctr" indent="0" marL="0">
+            <a:pPr marL="0" indent="0" algn="ctr">
               <a:buNone/>
             </a:pPr>
             <a:r>
@@ -4134,7 +3842,7 @@
             <a:prstDash val="solid"/>
           </a:ln>
           <a:effectLst>
-            <a:outerShdw sx="100000" sy="100000" kx="0" ky="0" algn="bl" rotWithShape="0" blurRad="101600" dist="25400" dir="5400000">
+            <a:outerShdw blurRad="101600" dist="25400" dir="5400000" algn="bl" rotWithShape="0">
               <a:srgbClr val="000000">
                 <a:alpha val="6000"/>
               </a:srgbClr>
@@ -4183,7 +3891,7 @@
           <a:bodyPr wrap="square" lIns="0" tIns="0" rIns="0" bIns="0" rtlCol="0" anchor="ctr"/>
           <a:lstStyle/>
           <a:p>
-            <a:pPr algn="ctr" indent="0" marL="0">
+            <a:pPr marL="0" indent="0" algn="ctr">
               <a:buNone/>
             </a:pPr>
             <a:r>
@@ -4203,14 +3911,14 @@
       </p:sp>
       <p:pic>
         <p:nvPicPr>
-          <p:cNvPr id="40" name="Image 3" descr="preencoded.png">    </p:cNvPr>
+          <p:cNvPr id="40" name="Image 3" descr="preencoded.png"/>
           <p:cNvPicPr>
             <a:picLocks noChangeAspect="1"/>
           </p:cNvPicPr>
           <p:nvPr/>
         </p:nvPicPr>
         <p:blipFill>
-          <a:blip r:embed="rId4"/>
+          <a:blip r:embed="rId6"/>
           <a:stretch>
             <a:fillRect/>
           </a:stretch>
@@ -4246,7 +3954,7 @@
           <a:bodyPr wrap="square" lIns="0" tIns="0" rIns="0" bIns="0" rtlCol="0" anchor="ctr"/>
           <a:lstStyle/>
           <a:p>
-            <a:pPr algn="ctr" indent="0" marL="0">
+            <a:pPr marL="0" indent="0" algn="ctr">
               <a:buNone/>
             </a:pPr>
             <a:r>
@@ -4282,7 +3990,7 @@
           <a:bodyPr wrap="square" lIns="0" tIns="0" rIns="0" bIns="0" rtlCol="0" anchor="ctr"/>
           <a:lstStyle/>
           <a:p>
-            <a:pPr algn="ctr" indent="0" marL="0">
+            <a:pPr marL="0" indent="0" algn="ctr">
               <a:buNone/>
             </a:pPr>
             <a:r>
@@ -4343,7 +4051,7 @@
           <a:bodyPr wrap="square" lIns="0" tIns="0" rIns="0" bIns="0" rtlCol="0" anchor="ctr"/>
           <a:lstStyle/>
           <a:p>
-            <a:pPr algn="ctr" indent="0" marL="0">
+            <a:pPr marL="0" indent="0" algn="ctr">
               <a:buNone/>
             </a:pPr>
             <a:r>
@@ -4382,7 +4090,7 @@
           <a:bodyPr wrap="square" lIns="0" tIns="0" rIns="0" bIns="0" rtlCol="0" anchor="ctr"/>
           <a:lstStyle/>
           <a:p>
-            <a:pPr algn="ctr" indent="0" marL="0">
+            <a:pPr marL="0" indent="0" algn="ctr">
               <a:buNone/>
             </a:pPr>
             <a:r>
@@ -4418,7 +4126,7 @@
           <a:bodyPr wrap="square" lIns="0" tIns="0" rIns="0" bIns="0" rtlCol="0" anchor="ctr"/>
           <a:lstStyle/>
           <a:p>
-            <a:pPr algn="ctr" indent="0" marL="0">
+            <a:pPr marL="0" indent="0" algn="ctr">
               <a:buNone/>
             </a:pPr>
             <a:r>
@@ -4457,7 +4165,7 @@
             <a:prstDash val="solid"/>
           </a:ln>
           <a:effectLst>
-            <a:outerShdw sx="100000" sy="100000" kx="0" ky="0" algn="bl" rotWithShape="0" blurRad="101600" dist="25400" dir="5400000">
+            <a:outerShdw blurRad="101600" dist="25400" dir="5400000" algn="bl" rotWithShape="0">
               <a:srgbClr val="000000">
                 <a:alpha val="6000"/>
               </a:srgbClr>
@@ -4506,7 +4214,7 @@
           <a:bodyPr wrap="square" lIns="0" tIns="0" rIns="0" bIns="0" rtlCol="0" anchor="ctr"/>
           <a:lstStyle/>
           <a:p>
-            <a:pPr algn="ctr" indent="0" marL="0">
+            <a:pPr marL="0" indent="0" algn="ctr">
               <a:buNone/>
             </a:pPr>
             <a:r>
@@ -4526,14 +4234,14 @@
       </p:sp>
       <p:pic>
         <p:nvPicPr>
-          <p:cNvPr id="50" name="Image 4" descr="preencoded.png">    </p:cNvPr>
+          <p:cNvPr id="50" name="Image 4" descr="preencoded.png"/>
           <p:cNvPicPr>
             <a:picLocks noChangeAspect="1"/>
           </p:cNvPicPr>
           <p:nvPr/>
         </p:nvPicPr>
         <p:blipFill>
-          <a:blip r:embed="rId5"/>
+          <a:blip r:embed="rId7"/>
           <a:stretch>
             <a:fillRect/>
           </a:stretch>
@@ -4569,7 +4277,7 @@
           <a:bodyPr wrap="square" lIns="0" tIns="0" rIns="0" bIns="0" rtlCol="0" anchor="ctr"/>
           <a:lstStyle/>
           <a:p>
-            <a:pPr algn="ctr" indent="0" marL="0">
+            <a:pPr marL="0" indent="0" algn="ctr">
               <a:buNone/>
             </a:pPr>
             <a:r>
@@ -4605,7 +4313,7 @@
           <a:bodyPr wrap="square" lIns="0" tIns="0" rIns="0" bIns="0" rtlCol="0" anchor="ctr"/>
           <a:lstStyle/>
           <a:p>
-            <a:pPr algn="ctr" indent="0" marL="0">
+            <a:pPr marL="0" indent="0" algn="ctr">
               <a:buNone/>
             </a:pPr>
             <a:r>
@@ -4666,7 +4374,7 @@
           <a:bodyPr wrap="square" lIns="0" tIns="0" rIns="0" bIns="0" rtlCol="0" anchor="ctr"/>
           <a:lstStyle/>
           <a:p>
-            <a:pPr algn="ctr" indent="0" marL="0">
+            <a:pPr marL="0" indent="0" algn="ctr">
               <a:buNone/>
             </a:pPr>
             <a:r>
@@ -4705,7 +4413,7 @@
           <a:bodyPr wrap="square" lIns="0" tIns="0" rIns="0" bIns="0" rtlCol="0" anchor="ctr"/>
           <a:lstStyle/>
           <a:p>
-            <a:pPr algn="ctr" indent="0" marL="0">
+            <a:pPr marL="0" indent="0" algn="ctr">
               <a:buNone/>
             </a:pPr>
             <a:r>
@@ -4741,7 +4449,7 @@
           <a:bodyPr wrap="square" lIns="0" tIns="0" rIns="0" bIns="0" rtlCol="0" anchor="ctr"/>
           <a:lstStyle/>
           <a:p>
-            <a:pPr algn="ctr" indent="0" marL="0">
+            <a:pPr marL="0" indent="0" algn="ctr">
               <a:buNone/>
             </a:pPr>
             <a:r>
@@ -4777,7 +4485,7 @@
           <a:bodyPr wrap="square" lIns="0" tIns="0" rIns="0" bIns="0" rtlCol="0" anchor="ctr"/>
           <a:lstStyle/>
           <a:p>
-            <a:pPr algn="r" indent="0" marL="0">
+            <a:pPr marL="0" indent="0" algn="r">
               <a:buNone/>
             </a:pPr>
             <a:r>
@@ -4816,7 +4524,7 @@
           <a:bodyPr wrap="square" lIns="0" tIns="0" rIns="0" bIns="0" rtlCol="0" anchor="ctr"/>
           <a:lstStyle/>
           <a:p>
-            <a:pPr indent="0" marL="0">
+            <a:pPr marL="0" indent="0">
               <a:buNone/>
             </a:pPr>
             <a:r>
@@ -4847,6 +4555,7 @@
         <a:solidFill>
           <a:srgbClr val="FFFFFF"/>
         </a:solidFill>
+        <a:effectLst/>
       </p:bgPr>
     </p:bg>
     <p:spTree>
@@ -4885,14 +4594,14 @@
       </p:sp>
       <p:pic>
         <p:nvPicPr>
-          <p:cNvPr id="3" name="Image 0" descr="preencoded.png">    </p:cNvPr>
+          <p:cNvPr id="3" name="Image 0" descr="preencoded.png"/>
           <p:cNvPicPr>
             <a:picLocks noChangeAspect="1"/>
           </p:cNvPicPr>
           <p:nvPr/>
         </p:nvPicPr>
         <p:blipFill>
-          <a:blip r:embed="rId1"/>
+          <a:blip r:embed="rId3"/>
           <a:stretch>
             <a:fillRect/>
           </a:stretch>
@@ -4928,7 +4637,7 @@
           <a:bodyPr wrap="square" lIns="0" tIns="0" rIns="0" bIns="0" rtlCol="0" anchor="ctr"/>
           <a:lstStyle/>
           <a:p>
-            <a:pPr indent="0" marL="0">
+            <a:pPr marL="0" indent="0">
               <a:buNone/>
             </a:pPr>
             <a:r>
@@ -4967,7 +4676,7 @@
           <a:bodyPr wrap="square" lIns="0" tIns="0" rIns="0" bIns="0" rtlCol="0" anchor="ctr"/>
           <a:lstStyle/>
           <a:p>
-            <a:pPr indent="0" marL="0">
+            <a:pPr marL="0" indent="0">
               <a:buNone/>
             </a:pPr>
             <a:r>
@@ -5003,7 +4712,7 @@
           <a:bodyPr wrap="square" lIns="0" tIns="0" rIns="0" bIns="0" rtlCol="0" anchor="ctr"/>
           <a:lstStyle/>
           <a:p>
-            <a:pPr indent="0" marL="0">
+            <a:pPr marL="0" indent="0">
               <a:buNone/>
             </a:pPr>
             <a:r>
@@ -5039,7 +4748,7 @@
           <a:bodyPr wrap="square" lIns="0" tIns="0" rIns="0" bIns="0" rtlCol="0" anchor="ctr"/>
           <a:lstStyle/>
           <a:p>
-            <a:pPr algn="r" indent="0" marL="0">
+            <a:pPr marL="0" indent="0" algn="r">
               <a:buNone/>
             </a:pPr>
             <a:r>
@@ -5081,7 +4790,7 @@
             <a:prstDash val="solid"/>
           </a:ln>
           <a:effectLst>
-            <a:outerShdw sx="100000" sy="100000" kx="0" ky="0" algn="bl" rotWithShape="0" blurRad="101600" dist="25400" dir="5400000">
+            <a:outerShdw blurRad="101600" dist="25400" dir="5400000" algn="bl" rotWithShape="0">
               <a:srgbClr val="000000">
                 <a:alpha val="6000"/>
               </a:srgbClr>
@@ -5091,202 +4800,7 @@
       </p:sp>
       <p:pic>
         <p:nvPicPr>
-          <p:cNvPr id="9" name="Image 1" descr="preencoded.png">    </p:cNvPr>
-          <p:cNvPicPr>
-            <a:picLocks noChangeAspect="1"/>
-          </p:cNvPicPr>
-          <p:nvPr/>
-        </p:nvPicPr>
-        <p:blipFill>
-          <a:blip r:embed="rId2"/>
-          <a:stretch>
-            <a:fillRect/>
-          </a:stretch>
-        </p:blipFill>
-        <p:spPr>
-          <a:xfrm>
-            <a:off x="777240" y="1965960"/>
-            <a:ext cx="365760" cy="365760"/>
-          </a:xfrm>
-          <a:prstGeom prst="rect">
-            <a:avLst/>
-          </a:prstGeom>
-        </p:spPr>
-      </p:pic>
-      <p:sp>
-        <p:nvSpPr>
-          <p:cNvPr id="10" name="Text 6"/>
-          <p:cNvSpPr/>
-          <p:nvPr/>
-        </p:nvSpPr>
-        <p:spPr>
-          <a:xfrm>
-            <a:off x="1234440" y="1965960"/>
-            <a:ext cx="5943600" cy="274320"/>
-          </a:xfrm>
-          <a:prstGeom prst="rect">
-            <a:avLst/>
-          </a:prstGeom>
-          <a:noFill/>
-          <a:ln/>
-        </p:spPr>
-        <p:txBody>
-          <a:bodyPr wrap="square" lIns="0" tIns="0" rIns="0" bIns="0" rtlCol="0" anchor="ctr"/>
-          <a:lstStyle/>
-          <a:p>
-            <a:pPr indent="0" marL="0">
-              <a:buNone/>
-            </a:pPr>
-            <a:r>
-              <a:rPr lang="en-US" sz="1000" spc="200" kern="0" dirty="0">
-                <a:solidFill>
-                  <a:srgbClr val="CEB4A9"/>
-                </a:solidFill>
-              </a:rPr>
-              <a:t>位址 · Address</a:t>
-            </a:r>
-            <a:endParaRPr lang="en-US" sz="1000" dirty="0"/>
-          </a:p>
-        </p:txBody>
-      </p:sp>
-      <p:sp>
-        <p:nvSpPr>
-          <p:cNvPr id="11" name="Text 7"/>
-          <p:cNvSpPr/>
-          <p:nvPr/>
-        </p:nvSpPr>
-        <p:spPr>
-          <a:xfrm>
-            <a:off x="1234440" y="2240280"/>
-            <a:ext cx="5943600" cy="365760"/>
-          </a:xfrm>
-          <a:prstGeom prst="rect">
-            <a:avLst/>
-          </a:prstGeom>
-          <a:noFill/>
-          <a:ln/>
-        </p:spPr>
-        <p:txBody>
-          <a:bodyPr wrap="square" lIns="0" tIns="0" rIns="0" bIns="0" rtlCol="0" anchor="ctr"/>
-          <a:lstStyle/>
-          <a:p>
-            <a:pPr indent="0" marL="0">
-              <a:buNone/>
-            </a:pPr>
-            <a:r>
-              <a:rPr lang="en-US" sz="1200" dirty="0">
-                <a:solidFill>
-                  <a:srgbClr val="3D3935"/>
-                </a:solidFill>
-              </a:rPr>
-              <a:t>高雄市前鎮區新光路 33 號 2F  ·  No. 33 Xinguang Rd, 2F</a:t>
-            </a:r>
-            <a:endParaRPr lang="en-US" sz="1200" dirty="0"/>
-          </a:p>
-        </p:txBody>
-      </p:sp>
-      <p:pic>
-        <p:nvPicPr>
-          <p:cNvPr id="12" name="Image 2" descr="preencoded.png">    </p:cNvPr>
-          <p:cNvPicPr>
-            <a:picLocks noChangeAspect="1"/>
-          </p:cNvPicPr>
-          <p:nvPr/>
-        </p:nvPicPr>
-        <p:blipFill>
-          <a:blip r:embed="rId3"/>
-          <a:stretch>
-            <a:fillRect/>
-          </a:stretch>
-        </p:blipFill>
-        <p:spPr>
-          <a:xfrm>
-            <a:off x="777240" y="2743200"/>
-            <a:ext cx="365760" cy="365760"/>
-          </a:xfrm>
-          <a:prstGeom prst="rect">
-            <a:avLst/>
-          </a:prstGeom>
-        </p:spPr>
-      </p:pic>
-      <p:sp>
-        <p:nvSpPr>
-          <p:cNvPr id="13" name="Text 8"/>
-          <p:cNvSpPr/>
-          <p:nvPr/>
-        </p:nvSpPr>
-        <p:spPr>
-          <a:xfrm>
-            <a:off x="1234440" y="2743200"/>
-            <a:ext cx="5943600" cy="274320"/>
-          </a:xfrm>
-          <a:prstGeom prst="rect">
-            <a:avLst/>
-          </a:prstGeom>
-          <a:noFill/>
-          <a:ln/>
-        </p:spPr>
-        <p:txBody>
-          <a:bodyPr wrap="square" lIns="0" tIns="0" rIns="0" bIns="0" rtlCol="0" anchor="ctr"/>
-          <a:lstStyle/>
-          <a:p>
-            <a:pPr indent="0" marL="0">
-              <a:buNone/>
-            </a:pPr>
-            <a:r>
-              <a:rPr lang="en-US" sz="1000" spc="200" kern="0" dirty="0">
-                <a:solidFill>
-                  <a:srgbClr val="CEB4A9"/>
-                </a:solidFill>
-              </a:rPr>
-              <a:t>電話 · Phone</a:t>
-            </a:r>
-            <a:endParaRPr lang="en-US" sz="1000" dirty="0"/>
-          </a:p>
-        </p:txBody>
-      </p:sp>
-      <p:sp>
-        <p:nvSpPr>
-          <p:cNvPr id="14" name="Text 9"/>
-          <p:cNvSpPr/>
-          <p:nvPr/>
-        </p:nvSpPr>
-        <p:spPr>
-          <a:xfrm>
-            <a:off x="1234440" y="3017520"/>
-            <a:ext cx="5943600" cy="365760"/>
-          </a:xfrm>
-          <a:prstGeom prst="rect">
-            <a:avLst/>
-          </a:prstGeom>
-          <a:noFill/>
-          <a:ln/>
-        </p:spPr>
-        <p:txBody>
-          <a:bodyPr wrap="square" lIns="0" tIns="0" rIns="0" bIns="0" rtlCol="0" anchor="ctr"/>
-          <a:lstStyle/>
-          <a:p>
-            <a:pPr indent="0" marL="0">
-              <a:buNone/>
-            </a:pPr>
-            <a:r>
-              <a:rPr lang="en-US" sz="1400" b="1" dirty="0">
-                <a:solidFill>
-                  <a:srgbClr val="3D3935"/>
-                </a:solidFill>
-                <a:latin typeface="Consolas" pitchFamily="34" charset="0"/>
-                <a:ea typeface="Consolas" pitchFamily="34" charset="-122"/>
-                <a:cs typeface="Consolas" pitchFamily="34" charset="-120"/>
-              </a:rPr>
-              <a:t>+886-7-3391888</a:t>
-            </a:r>
-            <a:endParaRPr lang="en-US" sz="1400" dirty="0"/>
-          </a:p>
-        </p:txBody>
-      </p:sp>
-      <p:pic>
-        <p:nvPicPr>
-          <p:cNvPr id="15" name="Image 3" descr="preencoded.png">    </p:cNvPr>
+          <p:cNvPr id="9" name="Image 1" descr="preencoded.png"/>
           <p:cNvPicPr>
             <a:picLocks noChangeAspect="1"/>
           </p:cNvPicPr>
@@ -5300,6 +4814,201 @@
         </p:blipFill>
         <p:spPr>
           <a:xfrm>
+            <a:off x="777240" y="1965960"/>
+            <a:ext cx="365760" cy="365760"/>
+          </a:xfrm>
+          <a:prstGeom prst="rect">
+            <a:avLst/>
+          </a:prstGeom>
+        </p:spPr>
+      </p:pic>
+      <p:sp>
+        <p:nvSpPr>
+          <p:cNvPr id="10" name="Text 6"/>
+          <p:cNvSpPr/>
+          <p:nvPr/>
+        </p:nvSpPr>
+        <p:spPr>
+          <a:xfrm>
+            <a:off x="1234440" y="1965960"/>
+            <a:ext cx="5943600" cy="274320"/>
+          </a:xfrm>
+          <a:prstGeom prst="rect">
+            <a:avLst/>
+          </a:prstGeom>
+          <a:noFill/>
+          <a:ln/>
+        </p:spPr>
+        <p:txBody>
+          <a:bodyPr wrap="square" lIns="0" tIns="0" rIns="0" bIns="0" rtlCol="0" anchor="ctr"/>
+          <a:lstStyle/>
+          <a:p>
+            <a:pPr marL="0" indent="0">
+              <a:buNone/>
+            </a:pPr>
+            <a:r>
+              <a:rPr lang="en-US" sz="1000" kern="0" spc="200" dirty="0">
+                <a:solidFill>
+                  <a:srgbClr val="CEB4A9"/>
+                </a:solidFill>
+              </a:rPr>
+              <a:t>位址 · Address</a:t>
+            </a:r>
+            <a:endParaRPr lang="en-US" sz="1000" dirty="0"/>
+          </a:p>
+        </p:txBody>
+      </p:sp>
+      <p:sp>
+        <p:nvSpPr>
+          <p:cNvPr id="11" name="Text 7"/>
+          <p:cNvSpPr/>
+          <p:nvPr/>
+        </p:nvSpPr>
+        <p:spPr>
+          <a:xfrm>
+            <a:off x="1234440" y="2240280"/>
+            <a:ext cx="5943600" cy="365760"/>
+          </a:xfrm>
+          <a:prstGeom prst="rect">
+            <a:avLst/>
+          </a:prstGeom>
+          <a:noFill/>
+          <a:ln/>
+        </p:spPr>
+        <p:txBody>
+          <a:bodyPr wrap="square" lIns="0" tIns="0" rIns="0" bIns="0" rtlCol="0" anchor="ctr"/>
+          <a:lstStyle/>
+          <a:p>
+            <a:pPr marL="0" indent="0">
+              <a:buNone/>
+            </a:pPr>
+            <a:r>
+              <a:rPr lang="en-US" sz="1200" dirty="0">
+                <a:solidFill>
+                  <a:srgbClr val="3D3935"/>
+                </a:solidFill>
+              </a:rPr>
+              <a:t>高雄市前鎮區新光路 33 號 2F  ·  No. 33 Xinguang Rd, 2F</a:t>
+            </a:r>
+            <a:endParaRPr lang="en-US" sz="1200" dirty="0"/>
+          </a:p>
+        </p:txBody>
+      </p:sp>
+      <p:pic>
+        <p:nvPicPr>
+          <p:cNvPr id="12" name="Image 2" descr="preencoded.png"/>
+          <p:cNvPicPr>
+            <a:picLocks noChangeAspect="1"/>
+          </p:cNvPicPr>
+          <p:nvPr/>
+        </p:nvPicPr>
+        <p:blipFill>
+          <a:blip r:embed="rId5"/>
+          <a:stretch>
+            <a:fillRect/>
+          </a:stretch>
+        </p:blipFill>
+        <p:spPr>
+          <a:xfrm>
+            <a:off x="777240" y="2743200"/>
+            <a:ext cx="365760" cy="365760"/>
+          </a:xfrm>
+          <a:prstGeom prst="rect">
+            <a:avLst/>
+          </a:prstGeom>
+        </p:spPr>
+      </p:pic>
+      <p:sp>
+        <p:nvSpPr>
+          <p:cNvPr id="13" name="Text 8"/>
+          <p:cNvSpPr/>
+          <p:nvPr/>
+        </p:nvSpPr>
+        <p:spPr>
+          <a:xfrm>
+            <a:off x="1234440" y="2743200"/>
+            <a:ext cx="5943600" cy="274320"/>
+          </a:xfrm>
+          <a:prstGeom prst="rect">
+            <a:avLst/>
+          </a:prstGeom>
+          <a:noFill/>
+          <a:ln/>
+        </p:spPr>
+        <p:txBody>
+          <a:bodyPr wrap="square" lIns="0" tIns="0" rIns="0" bIns="0" rtlCol="0" anchor="ctr"/>
+          <a:lstStyle/>
+          <a:p>
+            <a:pPr marL="0" indent="0">
+              <a:buNone/>
+            </a:pPr>
+            <a:r>
+              <a:rPr lang="en-US" sz="1000" kern="0" spc="200" dirty="0">
+                <a:solidFill>
+                  <a:srgbClr val="CEB4A9"/>
+                </a:solidFill>
+              </a:rPr>
+              <a:t>電話 · Phone</a:t>
+            </a:r>
+            <a:endParaRPr lang="en-US" sz="1000" dirty="0"/>
+          </a:p>
+        </p:txBody>
+      </p:sp>
+      <p:sp>
+        <p:nvSpPr>
+          <p:cNvPr id="14" name="Text 9"/>
+          <p:cNvSpPr/>
+          <p:nvPr/>
+        </p:nvSpPr>
+        <p:spPr>
+          <a:xfrm>
+            <a:off x="1234440" y="3017520"/>
+            <a:ext cx="5943600" cy="365760"/>
+          </a:xfrm>
+          <a:prstGeom prst="rect">
+            <a:avLst/>
+          </a:prstGeom>
+          <a:noFill/>
+          <a:ln/>
+        </p:spPr>
+        <p:txBody>
+          <a:bodyPr wrap="square" lIns="0" tIns="0" rIns="0" bIns="0" rtlCol="0" anchor="ctr"/>
+          <a:lstStyle/>
+          <a:p>
+            <a:pPr marL="0" indent="0">
+              <a:buNone/>
+            </a:pPr>
+            <a:r>
+              <a:rPr lang="en-US" sz="1400" b="1" dirty="0">
+                <a:solidFill>
+                  <a:srgbClr val="3D3935"/>
+                </a:solidFill>
+                <a:latin typeface="Consolas" pitchFamily="34" charset="0"/>
+                <a:ea typeface="Consolas" pitchFamily="34" charset="-122"/>
+                <a:cs typeface="Consolas" pitchFamily="34" charset="-120"/>
+              </a:rPr>
+              <a:t>+886-7-3391888</a:t>
+            </a:r>
+            <a:endParaRPr lang="en-US" sz="1400" dirty="0"/>
+          </a:p>
+        </p:txBody>
+      </p:sp>
+      <p:pic>
+        <p:nvPicPr>
+          <p:cNvPr id="15" name="Image 3" descr="preencoded.png"/>
+          <p:cNvPicPr>
+            <a:picLocks noChangeAspect="1"/>
+          </p:cNvPicPr>
+          <p:nvPr/>
+        </p:nvPicPr>
+        <p:blipFill>
+          <a:blip r:embed="rId6"/>
+          <a:stretch>
+            <a:fillRect/>
+          </a:stretch>
+        </p:blipFill>
+        <p:spPr>
+          <a:xfrm>
             <a:off x="777240" y="3520440"/>
             <a:ext cx="365760" cy="365760"/>
           </a:xfrm>
@@ -5329,11 +5038,11 @@
           <a:bodyPr wrap="square" lIns="0" tIns="0" rIns="0" bIns="0" rtlCol="0" anchor="ctr"/>
           <a:lstStyle/>
           <a:p>
-            <a:pPr indent="0" marL="0">
-              <a:buNone/>
-            </a:pPr>
-            <a:r>
-              <a:rPr lang="en-US" sz="1000" spc="200" kern="0" dirty="0">
+            <a:pPr marL="0" indent="0">
+              <a:buNone/>
+            </a:pPr>
+            <a:r>
+              <a:rPr lang="en-US" sz="1000" kern="0" spc="200" dirty="0">
                 <a:solidFill>
                   <a:srgbClr val="CEB4A9"/>
                 </a:solidFill>
@@ -5365,7 +5074,7 @@
           <a:bodyPr wrap="square" lIns="0" tIns="0" rIns="0" bIns="0" rtlCol="0" anchor="ctr"/>
           <a:lstStyle/>
           <a:p>
-            <a:pPr indent="0" marL="0">
+            <a:pPr marL="0" indent="0">
               <a:buNone/>
             </a:pPr>
             <a:r>
@@ -5401,7 +5110,7 @@
           <a:bodyPr wrap="square" lIns="0" tIns="0" rIns="0" bIns="0" rtlCol="0" anchor="ctr"/>
           <a:lstStyle/>
           <a:p>
-            <a:pPr indent="0" marL="0">
+            <a:pPr marL="0" indent="0">
               <a:buNone/>
             </a:pPr>
             <a:r>
@@ -5462,11 +5171,11 @@
           <a:bodyPr wrap="square" lIns="0" tIns="0" rIns="0" bIns="0" rtlCol="0" anchor="ctr"/>
           <a:lstStyle/>
           <a:p>
-            <a:pPr indent="0" marL="0">
-              <a:buNone/>
-            </a:pPr>
-            <a:r>
-              <a:rPr lang="en-US" sz="1100" b="1" spc="200" kern="0" dirty="0">
+            <a:pPr marL="0" indent="0">
+              <a:buNone/>
+            </a:pPr>
+            <a:r>
+              <a:rPr lang="en-US" sz="1100" b="1" kern="0" spc="200" dirty="0">
                 <a:solidFill>
                   <a:srgbClr val="CEB4A9"/>
                 </a:solidFill>
@@ -5498,7 +5207,7 @@
           <a:bodyPr wrap="square" lIns="0" tIns="0" rIns="0" bIns="0" rtlCol="0" anchor="ctr"/>
           <a:lstStyle/>
           <a:p>
-            <a:pPr indent="0" marL="0">
+            <a:pPr marL="0" indent="0">
               <a:buNone/>
             </a:pPr>
             <a:r>
@@ -5534,7 +5243,7 @@
           <a:bodyPr wrap="square" lIns="0" tIns="0" rIns="0" bIns="0" rtlCol="0" anchor="ctr"/>
           <a:lstStyle/>
           <a:p>
-            <a:pPr indent="0" marL="0">
+            <a:pPr marL="0" indent="0">
               <a:buNone/>
             </a:pPr>
             <a:r>
@@ -5570,7 +5279,7 @@
           <a:bodyPr wrap="square" lIns="0" tIns="0" rIns="0" bIns="0" rtlCol="0" anchor="ctr"/>
           <a:lstStyle/>
           <a:p>
-            <a:pPr indent="0" marL="0">
+            <a:pPr marL="0" indent="0">
               <a:buNone/>
             </a:pPr>
             <a:r>
@@ -5606,7 +5315,7 @@
           <a:bodyPr wrap="square" lIns="0" tIns="0" rIns="0" bIns="0" rtlCol="0" anchor="ctr"/>
           <a:lstStyle/>
           <a:p>
-            <a:pPr indent="0" marL="0">
+            <a:pPr marL="0" indent="0">
               <a:buNone/>
             </a:pPr>
             <a:r>
@@ -5642,7 +5351,7 @@
           <a:bodyPr wrap="square" lIns="0" tIns="0" rIns="0" bIns="0" rtlCol="0" anchor="ctr"/>
           <a:lstStyle/>
           <a:p>
-            <a:pPr indent="0" marL="0">
+            <a:pPr marL="0" indent="0">
               <a:buNone/>
             </a:pPr>
             <a:r>
@@ -5678,7 +5387,7 @@
           <a:bodyPr wrap="square" lIns="0" tIns="0" rIns="0" bIns="0" rtlCol="0" anchor="ctr"/>
           <a:lstStyle/>
           <a:p>
-            <a:pPr indent="0" marL="0">
+            <a:pPr marL="0" indent="0">
               <a:buNone/>
             </a:pPr>
             <a:r>
@@ -5714,7 +5423,7 @@
           <a:bodyPr wrap="square" lIns="0" tIns="0" rIns="0" bIns="0" rtlCol="0" anchor="ctr"/>
           <a:lstStyle/>
           <a:p>
-            <a:pPr indent="0" marL="0">
+            <a:pPr marL="0" indent="0">
               <a:buNone/>
             </a:pPr>
             <a:r>
@@ -5750,7 +5459,7 @@
           <a:bodyPr wrap="square" lIns="0" tIns="0" rIns="0" bIns="0" rtlCol="0" anchor="ctr"/>
           <a:lstStyle/>
           <a:p>
-            <a:pPr indent="0" marL="0">
+            <a:pPr marL="0" indent="0">
               <a:buNone/>
             </a:pPr>
             <a:r>
@@ -5786,7 +5495,7 @@
           <a:bodyPr wrap="square" lIns="0" tIns="0" rIns="0" bIns="0" rtlCol="0" anchor="ctr"/>
           <a:lstStyle/>
           <a:p>
-            <a:pPr indent="0" marL="0">
+            <a:pPr marL="0" indent="0">
               <a:buNone/>
             </a:pPr>
             <a:r>
@@ -5825,7 +5534,7 @@
             <a:prstDash val="solid"/>
           </a:ln>
           <a:effectLst>
-            <a:outerShdw sx="100000" sy="100000" kx="0" ky="0" algn="bl" rotWithShape="0" blurRad="101600" dist="25400" dir="5400000">
+            <a:outerShdw blurRad="101600" dist="25400" dir="5400000" algn="bl" rotWithShape="0">
               <a:srgbClr val="000000">
                 <a:alpha val="6000"/>
               </a:srgbClr>
@@ -5874,11 +5583,11 @@
           <a:bodyPr wrap="square" lIns="0" tIns="0" rIns="0" bIns="0" rtlCol="0" anchor="ctr"/>
           <a:lstStyle/>
           <a:p>
-            <a:pPr algn="ctr" indent="0" marL="0">
-              <a:buNone/>
-            </a:pPr>
-            <a:r>
-              <a:rPr lang="en-US" sz="1100" b="1" spc="200" kern="0" dirty="0">
+            <a:pPr marL="0" indent="0" algn="ctr">
+              <a:buNone/>
+            </a:pPr>
+            <a:r>
+              <a:rPr lang="en-US" sz="1100" b="1" kern="0" spc="200" dirty="0">
                 <a:solidFill>
                   <a:srgbClr val="CEB4A9"/>
                 </a:solidFill>
@@ -5891,14 +5600,14 @@
       </p:sp>
       <p:pic>
         <p:nvPicPr>
-          <p:cNvPr id="33" name="Image 4" descr="preencoded.png">    </p:cNvPr>
+          <p:cNvPr id="33" name="Image 4" descr="preencoded.png"/>
           <p:cNvPicPr>
             <a:picLocks noChangeAspect="1"/>
           </p:cNvPicPr>
           <p:nvPr/>
         </p:nvPicPr>
         <p:blipFill>
-          <a:blip r:embed="rId5"/>
+          <a:blip r:embed="rId7"/>
           <a:stretch>
             <a:fillRect/>
           </a:stretch>
@@ -5959,11 +5668,11 @@
           <a:bodyPr wrap="square" lIns="0" tIns="0" rIns="0" bIns="0" rtlCol="0" anchor="ctr"/>
           <a:lstStyle/>
           <a:p>
-            <a:pPr algn="ctr" indent="0" marL="0">
-              <a:buNone/>
-            </a:pPr>
-            <a:r>
-              <a:rPr lang="en-US" sz="900" spc="200" kern="0" dirty="0">
+            <a:pPr marL="0" indent="0" algn="ctr">
+              <a:buNone/>
+            </a:pPr>
+            <a:r>
+              <a:rPr lang="en-US" sz="900" kern="0" spc="200" dirty="0">
                 <a:solidFill>
                   <a:srgbClr val="CEB4A9"/>
                 </a:solidFill>
@@ -5995,7 +5704,7 @@
           <a:bodyPr wrap="square" lIns="0" tIns="0" rIns="0" bIns="0" rtlCol="0" anchor="ctr"/>
           <a:lstStyle/>
           <a:p>
-            <a:pPr algn="ctr" indent="0" marL="0">
+            <a:pPr marL="0" indent="0" algn="ctr">
               <a:buNone/>
             </a:pPr>
             <a:r>
@@ -6031,7 +5740,7 @@
           <a:bodyPr wrap="square" lIns="0" tIns="0" rIns="0" bIns="0" rtlCol="0" anchor="ctr"/>
           <a:lstStyle/>
           <a:p>
-            <a:pPr algn="r" indent="0" marL="0">
+            <a:pPr marL="0" indent="0" algn="r">
               <a:buNone/>
             </a:pPr>
             <a:r>
@@ -6070,7 +5779,7 @@
           <a:bodyPr wrap="square" lIns="0" tIns="0" rIns="0" bIns="0" rtlCol="0" anchor="ctr"/>
           <a:lstStyle/>
           <a:p>
-            <a:pPr indent="0" marL="0">
+            <a:pPr marL="0" indent="0">
               <a:buNone/>
             </a:pPr>
             <a:r>
@@ -6101,6 +5810,7 @@
         <a:solidFill>
           <a:srgbClr val="FFFFFF"/>
         </a:solidFill>
+        <a:effectLst/>
       </p:bgPr>
     </p:bg>
     <p:spTree>
@@ -6139,14 +5849,14 @@
       </p:sp>
       <p:pic>
         <p:nvPicPr>
-          <p:cNvPr id="3" name="Image 0" descr="preencoded.png">    </p:cNvPr>
+          <p:cNvPr id="3" name="Image 0" descr="preencoded.png"/>
           <p:cNvPicPr>
             <a:picLocks noChangeAspect="1"/>
           </p:cNvPicPr>
           <p:nvPr/>
         </p:nvPicPr>
         <p:blipFill>
-          <a:blip r:embed="rId1"/>
+          <a:blip r:embed="rId3"/>
           <a:stretch>
             <a:fillRect/>
           </a:stretch>
@@ -6182,7 +5892,7 @@
           <a:bodyPr wrap="square" lIns="0" tIns="0" rIns="0" bIns="0" rtlCol="0" anchor="ctr"/>
           <a:lstStyle/>
           <a:p>
-            <a:pPr indent="0" marL="0">
+            <a:pPr marL="0" indent="0">
               <a:buNone/>
             </a:pPr>
             <a:r>
@@ -6221,7 +5931,7 @@
           <a:bodyPr wrap="square" lIns="0" tIns="0" rIns="0" bIns="0" rtlCol="0" anchor="ctr"/>
           <a:lstStyle/>
           <a:p>
-            <a:pPr indent="0" marL="0">
+            <a:pPr marL="0" indent="0">
               <a:buNone/>
             </a:pPr>
             <a:r>
@@ -6257,7 +5967,7 @@
           <a:bodyPr wrap="square" lIns="0" tIns="0" rIns="0" bIns="0" rtlCol="0" anchor="ctr"/>
           <a:lstStyle/>
           <a:p>
-            <a:pPr indent="0" marL="0">
+            <a:pPr marL="0" indent="0">
               <a:buNone/>
             </a:pPr>
             <a:r>
@@ -6293,7 +6003,7 @@
           <a:bodyPr wrap="square" lIns="0" tIns="0" rIns="0" bIns="0" rtlCol="0" anchor="ctr"/>
           <a:lstStyle/>
           <a:p>
-            <a:pPr algn="r" indent="0" marL="0">
+            <a:pPr marL="0" indent="0" algn="r">
               <a:buNone/>
             </a:pPr>
             <a:r>
@@ -6335,7 +6045,7 @@
             <a:prstDash val="solid"/>
           </a:ln>
           <a:effectLst>
-            <a:outerShdw sx="100000" sy="100000" kx="0" ky="0" algn="bl" rotWithShape="0" blurRad="101600" dist="25400" dir="5400000">
+            <a:outerShdw blurRad="101600" dist="25400" dir="5400000" algn="bl" rotWithShape="0">
               <a:srgbClr val="000000">
                 <a:alpha val="6000"/>
               </a:srgbClr>
@@ -6345,202 +6055,7 @@
       </p:sp>
       <p:pic>
         <p:nvPicPr>
-          <p:cNvPr id="9" name="Image 1" descr="preencoded.png">    </p:cNvPr>
-          <p:cNvPicPr>
-            <a:picLocks noChangeAspect="1"/>
-          </p:cNvPicPr>
-          <p:nvPr/>
-        </p:nvPicPr>
-        <p:blipFill>
-          <a:blip r:embed="rId2"/>
-          <a:stretch>
-            <a:fillRect/>
-          </a:stretch>
-        </p:blipFill>
-        <p:spPr>
-          <a:xfrm>
-            <a:off x="777240" y="1965960"/>
-            <a:ext cx="365760" cy="365760"/>
-          </a:xfrm>
-          <a:prstGeom prst="rect">
-            <a:avLst/>
-          </a:prstGeom>
-        </p:spPr>
-      </p:pic>
-      <p:sp>
-        <p:nvSpPr>
-          <p:cNvPr id="10" name="Text 6"/>
-          <p:cNvSpPr/>
-          <p:nvPr/>
-        </p:nvSpPr>
-        <p:spPr>
-          <a:xfrm>
-            <a:off x="1234440" y="1965960"/>
-            <a:ext cx="5943600" cy="274320"/>
-          </a:xfrm>
-          <a:prstGeom prst="rect">
-            <a:avLst/>
-          </a:prstGeom>
-          <a:noFill/>
-          <a:ln/>
-        </p:spPr>
-        <p:txBody>
-          <a:bodyPr wrap="square" lIns="0" tIns="0" rIns="0" bIns="0" rtlCol="0" anchor="ctr"/>
-          <a:lstStyle/>
-          <a:p>
-            <a:pPr indent="0" marL="0">
-              <a:buNone/>
-            </a:pPr>
-            <a:r>
-              <a:rPr lang="en-US" sz="1000" spc="200" kern="0" dirty="0">
-                <a:solidFill>
-                  <a:srgbClr val="CEB4A9"/>
-                </a:solidFill>
-              </a:rPr>
-              <a:t>位址 · Address</a:t>
-            </a:r>
-            <a:endParaRPr lang="en-US" sz="1000" dirty="0"/>
-          </a:p>
-        </p:txBody>
-      </p:sp>
-      <p:sp>
-        <p:nvSpPr>
-          <p:cNvPr id="11" name="Text 7"/>
-          <p:cNvSpPr/>
-          <p:nvPr/>
-        </p:nvSpPr>
-        <p:spPr>
-          <a:xfrm>
-            <a:off x="1234440" y="2240280"/>
-            <a:ext cx="5943600" cy="365760"/>
-          </a:xfrm>
-          <a:prstGeom prst="rect">
-            <a:avLst/>
-          </a:prstGeom>
-          <a:noFill/>
-          <a:ln/>
-        </p:spPr>
-        <p:txBody>
-          <a:bodyPr wrap="square" lIns="0" tIns="0" rIns="0" bIns="0" rtlCol="0" anchor="ctr"/>
-          <a:lstStyle/>
-          <a:p>
-            <a:pPr indent="0" marL="0">
-              <a:buNone/>
-            </a:pPr>
-            <a:r>
-              <a:rPr lang="en-US" sz="1200" dirty="0">
-                <a:solidFill>
-                  <a:srgbClr val="3D3935"/>
-                </a:solidFill>
-              </a:rPr>
-              <a:t>高雄市前鎮區新光路 33 號 2F  ·  No. 33 Xinguang Rd, 2F</a:t>
-            </a:r>
-            <a:endParaRPr lang="en-US" sz="1200" dirty="0"/>
-          </a:p>
-        </p:txBody>
-      </p:sp>
-      <p:pic>
-        <p:nvPicPr>
-          <p:cNvPr id="12" name="Image 2" descr="preencoded.png">    </p:cNvPr>
-          <p:cNvPicPr>
-            <a:picLocks noChangeAspect="1"/>
-          </p:cNvPicPr>
-          <p:nvPr/>
-        </p:nvPicPr>
-        <p:blipFill>
-          <a:blip r:embed="rId3"/>
-          <a:stretch>
-            <a:fillRect/>
-          </a:stretch>
-        </p:blipFill>
-        <p:spPr>
-          <a:xfrm>
-            <a:off x="777240" y="2743200"/>
-            <a:ext cx="365760" cy="365760"/>
-          </a:xfrm>
-          <a:prstGeom prst="rect">
-            <a:avLst/>
-          </a:prstGeom>
-        </p:spPr>
-      </p:pic>
-      <p:sp>
-        <p:nvSpPr>
-          <p:cNvPr id="13" name="Text 8"/>
-          <p:cNvSpPr/>
-          <p:nvPr/>
-        </p:nvSpPr>
-        <p:spPr>
-          <a:xfrm>
-            <a:off x="1234440" y="2743200"/>
-            <a:ext cx="5943600" cy="274320"/>
-          </a:xfrm>
-          <a:prstGeom prst="rect">
-            <a:avLst/>
-          </a:prstGeom>
-          <a:noFill/>
-          <a:ln/>
-        </p:spPr>
-        <p:txBody>
-          <a:bodyPr wrap="square" lIns="0" tIns="0" rIns="0" bIns="0" rtlCol="0" anchor="ctr"/>
-          <a:lstStyle/>
-          <a:p>
-            <a:pPr indent="0" marL="0">
-              <a:buNone/>
-            </a:pPr>
-            <a:r>
-              <a:rPr lang="en-US" sz="1000" spc="200" kern="0" dirty="0">
-                <a:solidFill>
-                  <a:srgbClr val="CEB4A9"/>
-                </a:solidFill>
-              </a:rPr>
-              <a:t>電話 · Phone</a:t>
-            </a:r>
-            <a:endParaRPr lang="en-US" sz="1000" dirty="0"/>
-          </a:p>
-        </p:txBody>
-      </p:sp>
-      <p:sp>
-        <p:nvSpPr>
-          <p:cNvPr id="14" name="Text 9"/>
-          <p:cNvSpPr/>
-          <p:nvPr/>
-        </p:nvSpPr>
-        <p:spPr>
-          <a:xfrm>
-            <a:off x="1234440" y="3017520"/>
-            <a:ext cx="5943600" cy="365760"/>
-          </a:xfrm>
-          <a:prstGeom prst="rect">
-            <a:avLst/>
-          </a:prstGeom>
-          <a:noFill/>
-          <a:ln/>
-        </p:spPr>
-        <p:txBody>
-          <a:bodyPr wrap="square" lIns="0" tIns="0" rIns="0" bIns="0" rtlCol="0" anchor="ctr"/>
-          <a:lstStyle/>
-          <a:p>
-            <a:pPr indent="0" marL="0">
-              <a:buNone/>
-            </a:pPr>
-            <a:r>
-              <a:rPr lang="en-US" sz="1400" b="1" dirty="0">
-                <a:solidFill>
-                  <a:srgbClr val="3D3935"/>
-                </a:solidFill>
-                <a:latin typeface="Consolas" pitchFamily="34" charset="0"/>
-                <a:ea typeface="Consolas" pitchFamily="34" charset="-122"/>
-                <a:cs typeface="Consolas" pitchFamily="34" charset="-120"/>
-              </a:rPr>
-              <a:t>+886-7-3391888</a:t>
-            </a:r>
-            <a:endParaRPr lang="en-US" sz="1400" dirty="0"/>
-          </a:p>
-        </p:txBody>
-      </p:sp>
-      <p:pic>
-        <p:nvPicPr>
-          <p:cNvPr id="15" name="Image 3" descr="preencoded.png">    </p:cNvPr>
+          <p:cNvPr id="9" name="Image 1" descr="preencoded.png"/>
           <p:cNvPicPr>
             <a:picLocks noChangeAspect="1"/>
           </p:cNvPicPr>
@@ -6554,6 +6069,201 @@
         </p:blipFill>
         <p:spPr>
           <a:xfrm>
+            <a:off x="777240" y="1965960"/>
+            <a:ext cx="365760" cy="365760"/>
+          </a:xfrm>
+          <a:prstGeom prst="rect">
+            <a:avLst/>
+          </a:prstGeom>
+        </p:spPr>
+      </p:pic>
+      <p:sp>
+        <p:nvSpPr>
+          <p:cNvPr id="10" name="Text 6"/>
+          <p:cNvSpPr/>
+          <p:nvPr/>
+        </p:nvSpPr>
+        <p:spPr>
+          <a:xfrm>
+            <a:off x="1234440" y="1965960"/>
+            <a:ext cx="5943600" cy="274320"/>
+          </a:xfrm>
+          <a:prstGeom prst="rect">
+            <a:avLst/>
+          </a:prstGeom>
+          <a:noFill/>
+          <a:ln/>
+        </p:spPr>
+        <p:txBody>
+          <a:bodyPr wrap="square" lIns="0" tIns="0" rIns="0" bIns="0" rtlCol="0" anchor="ctr"/>
+          <a:lstStyle/>
+          <a:p>
+            <a:pPr marL="0" indent="0">
+              <a:buNone/>
+            </a:pPr>
+            <a:r>
+              <a:rPr lang="en-US" sz="1000" kern="0" spc="200" dirty="0">
+                <a:solidFill>
+                  <a:srgbClr val="CEB4A9"/>
+                </a:solidFill>
+              </a:rPr>
+              <a:t>位址 · Address</a:t>
+            </a:r>
+            <a:endParaRPr lang="en-US" sz="1000" dirty="0"/>
+          </a:p>
+        </p:txBody>
+      </p:sp>
+      <p:sp>
+        <p:nvSpPr>
+          <p:cNvPr id="11" name="Text 7"/>
+          <p:cNvSpPr/>
+          <p:nvPr/>
+        </p:nvSpPr>
+        <p:spPr>
+          <a:xfrm>
+            <a:off x="1234440" y="2240280"/>
+            <a:ext cx="5943600" cy="365760"/>
+          </a:xfrm>
+          <a:prstGeom prst="rect">
+            <a:avLst/>
+          </a:prstGeom>
+          <a:noFill/>
+          <a:ln/>
+        </p:spPr>
+        <p:txBody>
+          <a:bodyPr wrap="square" lIns="0" tIns="0" rIns="0" bIns="0" rtlCol="0" anchor="ctr"/>
+          <a:lstStyle/>
+          <a:p>
+            <a:pPr marL="0" indent="0">
+              <a:buNone/>
+            </a:pPr>
+            <a:r>
+              <a:rPr lang="en-US" sz="1200" dirty="0">
+                <a:solidFill>
+                  <a:srgbClr val="3D3935"/>
+                </a:solidFill>
+              </a:rPr>
+              <a:t>高雄市前鎮區新光路 33 號 2F  ·  No. 33 Xinguang Rd, 2F</a:t>
+            </a:r>
+            <a:endParaRPr lang="en-US" sz="1200" dirty="0"/>
+          </a:p>
+        </p:txBody>
+      </p:sp>
+      <p:pic>
+        <p:nvPicPr>
+          <p:cNvPr id="12" name="Image 2" descr="preencoded.png"/>
+          <p:cNvPicPr>
+            <a:picLocks noChangeAspect="1"/>
+          </p:cNvPicPr>
+          <p:nvPr/>
+        </p:nvPicPr>
+        <p:blipFill>
+          <a:blip r:embed="rId5"/>
+          <a:stretch>
+            <a:fillRect/>
+          </a:stretch>
+        </p:blipFill>
+        <p:spPr>
+          <a:xfrm>
+            <a:off x="777240" y="2743200"/>
+            <a:ext cx="365760" cy="365760"/>
+          </a:xfrm>
+          <a:prstGeom prst="rect">
+            <a:avLst/>
+          </a:prstGeom>
+        </p:spPr>
+      </p:pic>
+      <p:sp>
+        <p:nvSpPr>
+          <p:cNvPr id="13" name="Text 8"/>
+          <p:cNvSpPr/>
+          <p:nvPr/>
+        </p:nvSpPr>
+        <p:spPr>
+          <a:xfrm>
+            <a:off x="1234440" y="2743200"/>
+            <a:ext cx="5943600" cy="274320"/>
+          </a:xfrm>
+          <a:prstGeom prst="rect">
+            <a:avLst/>
+          </a:prstGeom>
+          <a:noFill/>
+          <a:ln/>
+        </p:spPr>
+        <p:txBody>
+          <a:bodyPr wrap="square" lIns="0" tIns="0" rIns="0" bIns="0" rtlCol="0" anchor="ctr"/>
+          <a:lstStyle/>
+          <a:p>
+            <a:pPr marL="0" indent="0">
+              <a:buNone/>
+            </a:pPr>
+            <a:r>
+              <a:rPr lang="en-US" sz="1000" kern="0" spc="200" dirty="0">
+                <a:solidFill>
+                  <a:srgbClr val="CEB4A9"/>
+                </a:solidFill>
+              </a:rPr>
+              <a:t>電話 · Phone</a:t>
+            </a:r>
+            <a:endParaRPr lang="en-US" sz="1000" dirty="0"/>
+          </a:p>
+        </p:txBody>
+      </p:sp>
+      <p:sp>
+        <p:nvSpPr>
+          <p:cNvPr id="14" name="Text 9"/>
+          <p:cNvSpPr/>
+          <p:nvPr/>
+        </p:nvSpPr>
+        <p:spPr>
+          <a:xfrm>
+            <a:off x="1234440" y="3017520"/>
+            <a:ext cx="5943600" cy="365760"/>
+          </a:xfrm>
+          <a:prstGeom prst="rect">
+            <a:avLst/>
+          </a:prstGeom>
+          <a:noFill/>
+          <a:ln/>
+        </p:spPr>
+        <p:txBody>
+          <a:bodyPr wrap="square" lIns="0" tIns="0" rIns="0" bIns="0" rtlCol="0" anchor="ctr"/>
+          <a:lstStyle/>
+          <a:p>
+            <a:pPr marL="0" indent="0">
+              <a:buNone/>
+            </a:pPr>
+            <a:r>
+              <a:rPr lang="en-US" sz="1400" b="1" dirty="0">
+                <a:solidFill>
+                  <a:srgbClr val="3D3935"/>
+                </a:solidFill>
+                <a:latin typeface="Consolas" pitchFamily="34" charset="0"/>
+                <a:ea typeface="Consolas" pitchFamily="34" charset="-122"/>
+                <a:cs typeface="Consolas" pitchFamily="34" charset="-120"/>
+              </a:rPr>
+              <a:t>+886-7-3391888</a:t>
+            </a:r>
+            <a:endParaRPr lang="en-US" sz="1400" dirty="0"/>
+          </a:p>
+        </p:txBody>
+      </p:sp>
+      <p:pic>
+        <p:nvPicPr>
+          <p:cNvPr id="15" name="Image 3" descr="preencoded.png"/>
+          <p:cNvPicPr>
+            <a:picLocks noChangeAspect="1"/>
+          </p:cNvPicPr>
+          <p:nvPr/>
+        </p:nvPicPr>
+        <p:blipFill>
+          <a:blip r:embed="rId6"/>
+          <a:stretch>
+            <a:fillRect/>
+          </a:stretch>
+        </p:blipFill>
+        <p:spPr>
+          <a:xfrm>
             <a:off x="777240" y="3520440"/>
             <a:ext cx="365760" cy="365760"/>
           </a:xfrm>
@@ -6583,11 +6293,11 @@
           <a:bodyPr wrap="square" lIns="0" tIns="0" rIns="0" bIns="0" rtlCol="0" anchor="ctr"/>
           <a:lstStyle/>
           <a:p>
-            <a:pPr indent="0" marL="0">
-              <a:buNone/>
-            </a:pPr>
-            <a:r>
-              <a:rPr lang="en-US" sz="1000" spc="200" kern="0" dirty="0">
+            <a:pPr marL="0" indent="0">
+              <a:buNone/>
+            </a:pPr>
+            <a:r>
+              <a:rPr lang="en-US" sz="1000" kern="0" spc="200" dirty="0">
                 <a:solidFill>
                   <a:srgbClr val="CEB4A9"/>
                 </a:solidFill>
@@ -6619,7 +6329,7 @@
           <a:bodyPr wrap="square" lIns="0" tIns="0" rIns="0" bIns="0" rtlCol="0" anchor="ctr"/>
           <a:lstStyle/>
           <a:p>
-            <a:pPr indent="0" marL="0">
+            <a:pPr marL="0" indent="0">
               <a:buNone/>
             </a:pPr>
             <a:r>
@@ -6655,7 +6365,7 @@
           <a:bodyPr wrap="square" lIns="0" tIns="0" rIns="0" bIns="0" rtlCol="0" anchor="ctr"/>
           <a:lstStyle/>
           <a:p>
-            <a:pPr indent="0" marL="0">
+            <a:pPr marL="0" indent="0">
               <a:buNone/>
             </a:pPr>
             <a:r>
@@ -6716,11 +6426,11 @@
           <a:bodyPr wrap="square" lIns="0" tIns="0" rIns="0" bIns="0" rtlCol="0" anchor="ctr"/>
           <a:lstStyle/>
           <a:p>
-            <a:pPr indent="0" marL="0">
-              <a:buNone/>
-            </a:pPr>
-            <a:r>
-              <a:rPr lang="en-US" sz="1100" b="1" spc="200" kern="0" dirty="0">
+            <a:pPr marL="0" indent="0">
+              <a:buNone/>
+            </a:pPr>
+            <a:r>
+              <a:rPr lang="en-US" sz="1100" b="1" kern="0" spc="200" dirty="0">
                 <a:solidFill>
                   <a:srgbClr val="CEB4A9"/>
                 </a:solidFill>
@@ -6752,7 +6462,7 @@
           <a:bodyPr wrap="square" lIns="0" tIns="0" rIns="0" bIns="0" rtlCol="0" anchor="ctr"/>
           <a:lstStyle/>
           <a:p>
-            <a:pPr indent="0" marL="0">
+            <a:pPr marL="0" indent="0">
               <a:buNone/>
             </a:pPr>
             <a:r>
@@ -6788,7 +6498,7 @@
           <a:bodyPr wrap="square" lIns="0" tIns="0" rIns="0" bIns="0" rtlCol="0" anchor="ctr"/>
           <a:lstStyle/>
           <a:p>
-            <a:pPr indent="0" marL="0">
+            <a:pPr marL="0" indent="0">
               <a:buNone/>
             </a:pPr>
             <a:r>
@@ -6824,7 +6534,7 @@
           <a:bodyPr wrap="square" lIns="0" tIns="0" rIns="0" bIns="0" rtlCol="0" anchor="ctr"/>
           <a:lstStyle/>
           <a:p>
-            <a:pPr indent="0" marL="0">
+            <a:pPr marL="0" indent="0">
               <a:buNone/>
             </a:pPr>
             <a:r>
@@ -6860,7 +6570,7 @@
           <a:bodyPr wrap="square" lIns="0" tIns="0" rIns="0" bIns="0" rtlCol="0" anchor="ctr"/>
           <a:lstStyle/>
           <a:p>
-            <a:pPr indent="0" marL="0">
+            <a:pPr marL="0" indent="0">
               <a:buNone/>
             </a:pPr>
             <a:r>
@@ -6896,7 +6606,7 @@
           <a:bodyPr wrap="square" lIns="0" tIns="0" rIns="0" bIns="0" rtlCol="0" anchor="ctr"/>
           <a:lstStyle/>
           <a:p>
-            <a:pPr indent="0" marL="0">
+            <a:pPr marL="0" indent="0">
               <a:buNone/>
             </a:pPr>
             <a:r>
@@ -6932,7 +6642,7 @@
           <a:bodyPr wrap="square" lIns="0" tIns="0" rIns="0" bIns="0" rtlCol="0" anchor="ctr"/>
           <a:lstStyle/>
           <a:p>
-            <a:pPr indent="0" marL="0">
+            <a:pPr marL="0" indent="0">
               <a:buNone/>
             </a:pPr>
             <a:r>
@@ -6968,7 +6678,7 @@
           <a:bodyPr wrap="square" lIns="0" tIns="0" rIns="0" bIns="0" rtlCol="0" anchor="ctr"/>
           <a:lstStyle/>
           <a:p>
-            <a:pPr indent="0" marL="0">
+            <a:pPr marL="0" indent="0">
               <a:buNone/>
             </a:pPr>
             <a:r>
@@ -7004,7 +6714,7 @@
           <a:bodyPr wrap="square" lIns="0" tIns="0" rIns="0" bIns="0" rtlCol="0" anchor="ctr"/>
           <a:lstStyle/>
           <a:p>
-            <a:pPr indent="0" marL="0">
+            <a:pPr marL="0" indent="0">
               <a:buNone/>
             </a:pPr>
             <a:r>
@@ -7040,7 +6750,7 @@
           <a:bodyPr wrap="square" lIns="0" tIns="0" rIns="0" bIns="0" rtlCol="0" anchor="ctr"/>
           <a:lstStyle/>
           <a:p>
-            <a:pPr indent="0" marL="0">
+            <a:pPr marL="0" indent="0">
               <a:buNone/>
             </a:pPr>
             <a:r>
@@ -7079,7 +6789,7 @@
             <a:prstDash val="solid"/>
           </a:ln>
           <a:effectLst>
-            <a:outerShdw sx="100000" sy="100000" kx="0" ky="0" algn="bl" rotWithShape="0" blurRad="101600" dist="25400" dir="5400000">
+            <a:outerShdw blurRad="101600" dist="25400" dir="5400000" algn="bl" rotWithShape="0">
               <a:srgbClr val="000000">
                 <a:alpha val="6000"/>
               </a:srgbClr>
@@ -7128,11 +6838,11 @@
           <a:bodyPr wrap="square" lIns="0" tIns="0" rIns="0" bIns="0" rtlCol="0" anchor="ctr"/>
           <a:lstStyle/>
           <a:p>
-            <a:pPr algn="ctr" indent="0" marL="0">
-              <a:buNone/>
-            </a:pPr>
-            <a:r>
-              <a:rPr lang="en-US" sz="1100" b="1" spc="200" kern="0" dirty="0">
+            <a:pPr marL="0" indent="0" algn="ctr">
+              <a:buNone/>
+            </a:pPr>
+            <a:r>
+              <a:rPr lang="en-US" sz="1100" b="1" kern="0" spc="200" dirty="0">
                 <a:solidFill>
                   <a:srgbClr val="CEB4A9"/>
                 </a:solidFill>
@@ -7145,14 +6855,14 @@
       </p:sp>
       <p:pic>
         <p:nvPicPr>
-          <p:cNvPr id="33" name="Image 4" descr="preencoded.png">    </p:cNvPr>
+          <p:cNvPr id="33" name="Image 4" descr="preencoded.png"/>
           <p:cNvPicPr>
             <a:picLocks noChangeAspect="1"/>
           </p:cNvPicPr>
           <p:nvPr/>
         </p:nvPicPr>
         <p:blipFill>
-          <a:blip r:embed="rId5"/>
+          <a:blip r:embed="rId7"/>
           <a:stretch>
             <a:fillRect/>
           </a:stretch>
@@ -7213,11 +6923,11 @@
           <a:bodyPr wrap="square" lIns="0" tIns="0" rIns="0" bIns="0" rtlCol="0" anchor="ctr"/>
           <a:lstStyle/>
           <a:p>
-            <a:pPr algn="ctr" indent="0" marL="0">
-              <a:buNone/>
-            </a:pPr>
-            <a:r>
-              <a:rPr lang="en-US" sz="900" spc="200" kern="0" dirty="0">
+            <a:pPr marL="0" indent="0" algn="ctr">
+              <a:buNone/>
+            </a:pPr>
+            <a:r>
+              <a:rPr lang="en-US" sz="900" kern="0" spc="200" dirty="0">
                 <a:solidFill>
                   <a:srgbClr val="CEB4A9"/>
                 </a:solidFill>
@@ -7249,7 +6959,7 @@
           <a:bodyPr wrap="square" lIns="0" tIns="0" rIns="0" bIns="0" rtlCol="0" anchor="ctr"/>
           <a:lstStyle/>
           <a:p>
-            <a:pPr algn="ctr" indent="0" marL="0">
+            <a:pPr marL="0" indent="0" algn="ctr">
               <a:buNone/>
             </a:pPr>
             <a:r>
@@ -7285,7 +6995,7 @@
           <a:bodyPr wrap="square" lIns="0" tIns="0" rIns="0" bIns="0" rtlCol="0" anchor="ctr"/>
           <a:lstStyle/>
           <a:p>
-            <a:pPr algn="r" indent="0" marL="0">
+            <a:pPr marL="0" indent="0" algn="r">
               <a:buNone/>
             </a:pPr>
             <a:r>
@@ -7324,7 +7034,7 @@
           <a:bodyPr wrap="square" lIns="0" tIns="0" rIns="0" bIns="0" rtlCol="0" anchor="ctr"/>
           <a:lstStyle/>
           <a:p>
-            <a:pPr indent="0" marL="0">
+            <a:pPr marL="0" indent="0">
               <a:buNone/>
             </a:pPr>
             <a:r>
@@ -7355,6 +7065,7 @@
         <a:solidFill>
           <a:srgbClr val="FFFFFF"/>
         </a:solidFill>
+        <a:effectLst/>
       </p:bgPr>
     </p:bg>
     <p:spTree>
@@ -7393,14 +7104,14 @@
       </p:sp>
       <p:pic>
         <p:nvPicPr>
-          <p:cNvPr id="3" name="Image 0" descr="preencoded.png">    </p:cNvPr>
+          <p:cNvPr id="3" name="Image 0" descr="preencoded.png"/>
           <p:cNvPicPr>
             <a:picLocks noChangeAspect="1"/>
           </p:cNvPicPr>
           <p:nvPr/>
         </p:nvPicPr>
         <p:blipFill>
-          <a:blip r:embed="rId1"/>
+          <a:blip r:embed="rId3"/>
           <a:stretch>
             <a:fillRect/>
           </a:stretch>
@@ -7436,7 +7147,7 @@
           <a:bodyPr wrap="square" lIns="0" tIns="0" rIns="0" bIns="0" rtlCol="0" anchor="ctr"/>
           <a:lstStyle/>
           <a:p>
-            <a:pPr indent="0" marL="0">
+            <a:pPr marL="0" indent="0">
               <a:buNone/>
             </a:pPr>
             <a:r>
@@ -7475,7 +7186,7 @@
           <a:bodyPr wrap="square" lIns="0" tIns="0" rIns="0" bIns="0" rtlCol="0" anchor="ctr"/>
           <a:lstStyle/>
           <a:p>
-            <a:pPr indent="0" marL="0">
+            <a:pPr marL="0" indent="0">
               <a:buNone/>
             </a:pPr>
             <a:r>
@@ -7511,7 +7222,7 @@
           <a:bodyPr wrap="square" lIns="0" tIns="0" rIns="0" bIns="0" rtlCol="0" anchor="ctr"/>
           <a:lstStyle/>
           <a:p>
-            <a:pPr indent="0" marL="0">
+            <a:pPr marL="0" indent="0">
               <a:buNone/>
             </a:pPr>
             <a:r>
@@ -7547,7 +7258,7 @@
           <a:bodyPr wrap="square" lIns="0" tIns="0" rIns="0" bIns="0" rtlCol="0" anchor="ctr"/>
           <a:lstStyle/>
           <a:p>
-            <a:pPr algn="r" indent="0" marL="0">
+            <a:pPr marL="0" indent="0" algn="r">
               <a:buNone/>
             </a:pPr>
             <a:r>
@@ -7589,7 +7300,7 @@
             <a:prstDash val="solid"/>
           </a:ln>
           <a:effectLst>
-            <a:outerShdw sx="100000" sy="100000" kx="0" ky="0" algn="bl" rotWithShape="0" blurRad="101600" dist="25400" dir="5400000">
+            <a:outerShdw blurRad="101600" dist="25400" dir="5400000" algn="bl" rotWithShape="0">
               <a:srgbClr val="000000">
                 <a:alpha val="6000"/>
               </a:srgbClr>
@@ -7599,202 +7310,7 @@
       </p:sp>
       <p:pic>
         <p:nvPicPr>
-          <p:cNvPr id="9" name="Image 1" descr="preencoded.png">    </p:cNvPr>
-          <p:cNvPicPr>
-            <a:picLocks noChangeAspect="1"/>
-          </p:cNvPicPr>
-          <p:nvPr/>
-        </p:nvPicPr>
-        <p:blipFill>
-          <a:blip r:embed="rId2"/>
-          <a:stretch>
-            <a:fillRect/>
-          </a:stretch>
-        </p:blipFill>
-        <p:spPr>
-          <a:xfrm>
-            <a:off x="777240" y="1965960"/>
-            <a:ext cx="365760" cy="365760"/>
-          </a:xfrm>
-          <a:prstGeom prst="rect">
-            <a:avLst/>
-          </a:prstGeom>
-        </p:spPr>
-      </p:pic>
-      <p:sp>
-        <p:nvSpPr>
-          <p:cNvPr id="10" name="Text 6"/>
-          <p:cNvSpPr/>
-          <p:nvPr/>
-        </p:nvSpPr>
-        <p:spPr>
-          <a:xfrm>
-            <a:off x="1234440" y="1965960"/>
-            <a:ext cx="5943600" cy="274320"/>
-          </a:xfrm>
-          <a:prstGeom prst="rect">
-            <a:avLst/>
-          </a:prstGeom>
-          <a:noFill/>
-          <a:ln/>
-        </p:spPr>
-        <p:txBody>
-          <a:bodyPr wrap="square" lIns="0" tIns="0" rIns="0" bIns="0" rtlCol="0" anchor="ctr"/>
-          <a:lstStyle/>
-          <a:p>
-            <a:pPr indent="0" marL="0">
-              <a:buNone/>
-            </a:pPr>
-            <a:r>
-              <a:rPr lang="en-US" sz="1000" spc="200" kern="0" dirty="0">
-                <a:solidFill>
-                  <a:srgbClr val="CEB4A9"/>
-                </a:solidFill>
-              </a:rPr>
-              <a:t>位址 · Address</a:t>
-            </a:r>
-            <a:endParaRPr lang="en-US" sz="1000" dirty="0"/>
-          </a:p>
-        </p:txBody>
-      </p:sp>
-      <p:sp>
-        <p:nvSpPr>
-          <p:cNvPr id="11" name="Text 7"/>
-          <p:cNvSpPr/>
-          <p:nvPr/>
-        </p:nvSpPr>
-        <p:spPr>
-          <a:xfrm>
-            <a:off x="1234440" y="2240280"/>
-            <a:ext cx="5943600" cy="365760"/>
-          </a:xfrm>
-          <a:prstGeom prst="rect">
-            <a:avLst/>
-          </a:prstGeom>
-          <a:noFill/>
-          <a:ln/>
-        </p:spPr>
-        <p:txBody>
-          <a:bodyPr wrap="square" lIns="0" tIns="0" rIns="0" bIns="0" rtlCol="0" anchor="ctr"/>
-          <a:lstStyle/>
-          <a:p>
-            <a:pPr indent="0" marL="0">
-              <a:buNone/>
-            </a:pPr>
-            <a:r>
-              <a:rPr lang="en-US" sz="1200" dirty="0">
-                <a:solidFill>
-                  <a:srgbClr val="3D3935"/>
-                </a:solidFill>
-              </a:rPr>
-              <a:t>高雄市前鎮區新光路 33 號  ·  No. 33 Xinguang Rd</a:t>
-            </a:r>
-            <a:endParaRPr lang="en-US" sz="1200" dirty="0"/>
-          </a:p>
-        </p:txBody>
-      </p:sp>
-      <p:pic>
-        <p:nvPicPr>
-          <p:cNvPr id="12" name="Image 2" descr="preencoded.png">    </p:cNvPr>
-          <p:cNvPicPr>
-            <a:picLocks noChangeAspect="1"/>
-          </p:cNvPicPr>
-          <p:nvPr/>
-        </p:nvPicPr>
-        <p:blipFill>
-          <a:blip r:embed="rId3"/>
-          <a:stretch>
-            <a:fillRect/>
-          </a:stretch>
-        </p:blipFill>
-        <p:spPr>
-          <a:xfrm>
-            <a:off x="777240" y="2743200"/>
-            <a:ext cx="365760" cy="365760"/>
-          </a:xfrm>
-          <a:prstGeom prst="rect">
-            <a:avLst/>
-          </a:prstGeom>
-        </p:spPr>
-      </p:pic>
-      <p:sp>
-        <p:nvSpPr>
-          <p:cNvPr id="13" name="Text 8"/>
-          <p:cNvSpPr/>
-          <p:nvPr/>
-        </p:nvSpPr>
-        <p:spPr>
-          <a:xfrm>
-            <a:off x="1234440" y="2743200"/>
-            <a:ext cx="5943600" cy="274320"/>
-          </a:xfrm>
-          <a:prstGeom prst="rect">
-            <a:avLst/>
-          </a:prstGeom>
-          <a:noFill/>
-          <a:ln/>
-        </p:spPr>
-        <p:txBody>
-          <a:bodyPr wrap="square" lIns="0" tIns="0" rIns="0" bIns="0" rtlCol="0" anchor="ctr"/>
-          <a:lstStyle/>
-          <a:p>
-            <a:pPr indent="0" marL="0">
-              <a:buNone/>
-            </a:pPr>
-            <a:r>
-              <a:rPr lang="en-US" sz="1000" spc="200" kern="0" dirty="0">
-                <a:solidFill>
-                  <a:srgbClr val="CEB4A9"/>
-                </a:solidFill>
-              </a:rPr>
-              <a:t>電話 · Phone</a:t>
-            </a:r>
-            <a:endParaRPr lang="en-US" sz="1000" dirty="0"/>
-          </a:p>
-        </p:txBody>
-      </p:sp>
-      <p:sp>
-        <p:nvSpPr>
-          <p:cNvPr id="14" name="Text 9"/>
-          <p:cNvSpPr/>
-          <p:nvPr/>
-        </p:nvSpPr>
-        <p:spPr>
-          <a:xfrm>
-            <a:off x="1234440" y="3017520"/>
-            <a:ext cx="5943600" cy="365760"/>
-          </a:xfrm>
-          <a:prstGeom prst="rect">
-            <a:avLst/>
-          </a:prstGeom>
-          <a:noFill/>
-          <a:ln/>
-        </p:spPr>
-        <p:txBody>
-          <a:bodyPr wrap="square" lIns="0" tIns="0" rIns="0" bIns="0" rtlCol="0" anchor="ctr"/>
-          <a:lstStyle/>
-          <a:p>
-            <a:pPr indent="0" marL="0">
-              <a:buNone/>
-            </a:pPr>
-            <a:r>
-              <a:rPr lang="en-US" sz="1400" b="1" dirty="0">
-                <a:solidFill>
-                  <a:srgbClr val="3D3935"/>
-                </a:solidFill>
-                <a:latin typeface="Consolas" pitchFamily="34" charset="0"/>
-                <a:ea typeface="Consolas" pitchFamily="34" charset="-122"/>
-                <a:cs typeface="Consolas" pitchFamily="34" charset="-120"/>
-              </a:rPr>
-              <a:t>+886-7-3391888</a:t>
-            </a:r>
-            <a:endParaRPr lang="en-US" sz="1400" dirty="0"/>
-          </a:p>
-        </p:txBody>
-      </p:sp>
-      <p:pic>
-        <p:nvPicPr>
-          <p:cNvPr id="15" name="Image 3" descr="preencoded.png">    </p:cNvPr>
+          <p:cNvPr id="9" name="Image 1" descr="preencoded.png"/>
           <p:cNvPicPr>
             <a:picLocks noChangeAspect="1"/>
           </p:cNvPicPr>
@@ -7808,6 +7324,201 @@
         </p:blipFill>
         <p:spPr>
           <a:xfrm>
+            <a:off x="777240" y="1965960"/>
+            <a:ext cx="365760" cy="365760"/>
+          </a:xfrm>
+          <a:prstGeom prst="rect">
+            <a:avLst/>
+          </a:prstGeom>
+        </p:spPr>
+      </p:pic>
+      <p:sp>
+        <p:nvSpPr>
+          <p:cNvPr id="10" name="Text 6"/>
+          <p:cNvSpPr/>
+          <p:nvPr/>
+        </p:nvSpPr>
+        <p:spPr>
+          <a:xfrm>
+            <a:off x="1234440" y="1965960"/>
+            <a:ext cx="5943600" cy="274320"/>
+          </a:xfrm>
+          <a:prstGeom prst="rect">
+            <a:avLst/>
+          </a:prstGeom>
+          <a:noFill/>
+          <a:ln/>
+        </p:spPr>
+        <p:txBody>
+          <a:bodyPr wrap="square" lIns="0" tIns="0" rIns="0" bIns="0" rtlCol="0" anchor="ctr"/>
+          <a:lstStyle/>
+          <a:p>
+            <a:pPr marL="0" indent="0">
+              <a:buNone/>
+            </a:pPr>
+            <a:r>
+              <a:rPr lang="en-US" sz="1000" kern="0" spc="200" dirty="0">
+                <a:solidFill>
+                  <a:srgbClr val="CEB4A9"/>
+                </a:solidFill>
+              </a:rPr>
+              <a:t>位址 · Address</a:t>
+            </a:r>
+            <a:endParaRPr lang="en-US" sz="1000" dirty="0"/>
+          </a:p>
+        </p:txBody>
+      </p:sp>
+      <p:sp>
+        <p:nvSpPr>
+          <p:cNvPr id="11" name="Text 7"/>
+          <p:cNvSpPr/>
+          <p:nvPr/>
+        </p:nvSpPr>
+        <p:spPr>
+          <a:xfrm>
+            <a:off x="1234440" y="2240280"/>
+            <a:ext cx="5943600" cy="365760"/>
+          </a:xfrm>
+          <a:prstGeom prst="rect">
+            <a:avLst/>
+          </a:prstGeom>
+          <a:noFill/>
+          <a:ln/>
+        </p:spPr>
+        <p:txBody>
+          <a:bodyPr wrap="square" lIns="0" tIns="0" rIns="0" bIns="0" rtlCol="0" anchor="ctr"/>
+          <a:lstStyle/>
+          <a:p>
+            <a:pPr marL="0" indent="0">
+              <a:buNone/>
+            </a:pPr>
+            <a:r>
+              <a:rPr lang="en-US" sz="1200" dirty="0">
+                <a:solidFill>
+                  <a:srgbClr val="3D3935"/>
+                </a:solidFill>
+              </a:rPr>
+              <a:t>高雄市前鎮區新光路 33 號  ·  No. 33 Xinguang Rd</a:t>
+            </a:r>
+            <a:endParaRPr lang="en-US" sz="1200" dirty="0"/>
+          </a:p>
+        </p:txBody>
+      </p:sp>
+      <p:pic>
+        <p:nvPicPr>
+          <p:cNvPr id="12" name="Image 2" descr="preencoded.png"/>
+          <p:cNvPicPr>
+            <a:picLocks noChangeAspect="1"/>
+          </p:cNvPicPr>
+          <p:nvPr/>
+        </p:nvPicPr>
+        <p:blipFill>
+          <a:blip r:embed="rId5"/>
+          <a:stretch>
+            <a:fillRect/>
+          </a:stretch>
+        </p:blipFill>
+        <p:spPr>
+          <a:xfrm>
+            <a:off x="777240" y="2743200"/>
+            <a:ext cx="365760" cy="365760"/>
+          </a:xfrm>
+          <a:prstGeom prst="rect">
+            <a:avLst/>
+          </a:prstGeom>
+        </p:spPr>
+      </p:pic>
+      <p:sp>
+        <p:nvSpPr>
+          <p:cNvPr id="13" name="Text 8"/>
+          <p:cNvSpPr/>
+          <p:nvPr/>
+        </p:nvSpPr>
+        <p:spPr>
+          <a:xfrm>
+            <a:off x="1234440" y="2743200"/>
+            <a:ext cx="5943600" cy="274320"/>
+          </a:xfrm>
+          <a:prstGeom prst="rect">
+            <a:avLst/>
+          </a:prstGeom>
+          <a:noFill/>
+          <a:ln/>
+        </p:spPr>
+        <p:txBody>
+          <a:bodyPr wrap="square" lIns="0" tIns="0" rIns="0" bIns="0" rtlCol="0" anchor="ctr"/>
+          <a:lstStyle/>
+          <a:p>
+            <a:pPr marL="0" indent="0">
+              <a:buNone/>
+            </a:pPr>
+            <a:r>
+              <a:rPr lang="en-US" sz="1000" kern="0" spc="200" dirty="0">
+                <a:solidFill>
+                  <a:srgbClr val="CEB4A9"/>
+                </a:solidFill>
+              </a:rPr>
+              <a:t>電話 · Phone</a:t>
+            </a:r>
+            <a:endParaRPr lang="en-US" sz="1000" dirty="0"/>
+          </a:p>
+        </p:txBody>
+      </p:sp>
+      <p:sp>
+        <p:nvSpPr>
+          <p:cNvPr id="14" name="Text 9"/>
+          <p:cNvSpPr/>
+          <p:nvPr/>
+        </p:nvSpPr>
+        <p:spPr>
+          <a:xfrm>
+            <a:off x="1234440" y="3017520"/>
+            <a:ext cx="5943600" cy="365760"/>
+          </a:xfrm>
+          <a:prstGeom prst="rect">
+            <a:avLst/>
+          </a:prstGeom>
+          <a:noFill/>
+          <a:ln/>
+        </p:spPr>
+        <p:txBody>
+          <a:bodyPr wrap="square" lIns="0" tIns="0" rIns="0" bIns="0" rtlCol="0" anchor="ctr"/>
+          <a:lstStyle/>
+          <a:p>
+            <a:pPr marL="0" indent="0">
+              <a:buNone/>
+            </a:pPr>
+            <a:r>
+              <a:rPr lang="en-US" sz="1400" b="1" dirty="0">
+                <a:solidFill>
+                  <a:srgbClr val="3D3935"/>
+                </a:solidFill>
+                <a:latin typeface="Consolas" pitchFamily="34" charset="0"/>
+                <a:ea typeface="Consolas" pitchFamily="34" charset="-122"/>
+                <a:cs typeface="Consolas" pitchFamily="34" charset="-120"/>
+              </a:rPr>
+              <a:t>+886-7-3391888</a:t>
+            </a:r>
+            <a:endParaRPr lang="en-US" sz="1400" dirty="0"/>
+          </a:p>
+        </p:txBody>
+      </p:sp>
+      <p:pic>
+        <p:nvPicPr>
+          <p:cNvPr id="15" name="Image 3" descr="preencoded.png"/>
+          <p:cNvPicPr>
+            <a:picLocks noChangeAspect="1"/>
+          </p:cNvPicPr>
+          <p:nvPr/>
+        </p:nvPicPr>
+        <p:blipFill>
+          <a:blip r:embed="rId6"/>
+          <a:stretch>
+            <a:fillRect/>
+          </a:stretch>
+        </p:blipFill>
+        <p:spPr>
+          <a:xfrm>
             <a:off x="777240" y="3520440"/>
             <a:ext cx="365760" cy="365760"/>
           </a:xfrm>
@@ -7837,11 +7548,11 @@
           <a:bodyPr wrap="square" lIns="0" tIns="0" rIns="0" bIns="0" rtlCol="0" anchor="ctr"/>
           <a:lstStyle/>
           <a:p>
-            <a:pPr indent="0" marL="0">
-              <a:buNone/>
-            </a:pPr>
-            <a:r>
-              <a:rPr lang="en-US" sz="1000" spc="200" kern="0" dirty="0">
+            <a:pPr marL="0" indent="0">
+              <a:buNone/>
+            </a:pPr>
+            <a:r>
+              <a:rPr lang="en-US" sz="1000" kern="0" spc="200" dirty="0">
                 <a:solidFill>
                   <a:srgbClr val="CEB4A9"/>
                 </a:solidFill>
@@ -7873,7 +7584,7 @@
           <a:bodyPr wrap="square" lIns="0" tIns="0" rIns="0" bIns="0" rtlCol="0" anchor="ctr"/>
           <a:lstStyle/>
           <a:p>
-            <a:pPr indent="0" marL="0">
+            <a:pPr marL="0" indent="0">
               <a:buNone/>
             </a:pPr>
             <a:r>
@@ -7909,7 +7620,7 @@
           <a:bodyPr wrap="square" lIns="0" tIns="0" rIns="0" bIns="0" rtlCol="0" anchor="ctr"/>
           <a:lstStyle/>
           <a:p>
-            <a:pPr indent="0" marL="0">
+            <a:pPr marL="0" indent="0">
               <a:buNone/>
             </a:pPr>
             <a:r>
@@ -7970,11 +7681,11 @@
           <a:bodyPr wrap="square" lIns="0" tIns="0" rIns="0" bIns="0" rtlCol="0" anchor="ctr"/>
           <a:lstStyle/>
           <a:p>
-            <a:pPr indent="0" marL="0">
-              <a:buNone/>
-            </a:pPr>
-            <a:r>
-              <a:rPr lang="en-US" sz="1100" b="1" spc="200" kern="0" dirty="0">
+            <a:pPr marL="0" indent="0">
+              <a:buNone/>
+            </a:pPr>
+            <a:r>
+              <a:rPr lang="en-US" sz="1100" b="1" kern="0" spc="200" dirty="0">
                 <a:solidFill>
                   <a:srgbClr val="CEB4A9"/>
                 </a:solidFill>
@@ -8006,7 +7717,7 @@
           <a:bodyPr wrap="square" lIns="0" tIns="0" rIns="0" bIns="0" rtlCol="0" anchor="ctr"/>
           <a:lstStyle/>
           <a:p>
-            <a:pPr indent="0" marL="0">
+            <a:pPr marL="0" indent="0">
               <a:buNone/>
             </a:pPr>
             <a:r>
@@ -8042,7 +7753,7 @@
           <a:bodyPr wrap="square" lIns="0" tIns="0" rIns="0" bIns="0" rtlCol="0" anchor="ctr"/>
           <a:lstStyle/>
           <a:p>
-            <a:pPr indent="0" marL="0">
+            <a:pPr marL="0" indent="0">
               <a:buNone/>
             </a:pPr>
             <a:r>
@@ -8078,7 +7789,7 @@
           <a:bodyPr wrap="square" lIns="0" tIns="0" rIns="0" bIns="0" rtlCol="0" anchor="ctr"/>
           <a:lstStyle/>
           <a:p>
-            <a:pPr indent="0" marL="0">
+            <a:pPr marL="0" indent="0">
               <a:buNone/>
             </a:pPr>
             <a:r>
@@ -8114,7 +7825,7 @@
           <a:bodyPr wrap="square" lIns="0" tIns="0" rIns="0" bIns="0" rtlCol="0" anchor="ctr"/>
           <a:lstStyle/>
           <a:p>
-            <a:pPr indent="0" marL="0">
+            <a:pPr marL="0" indent="0">
               <a:buNone/>
             </a:pPr>
             <a:r>
@@ -8150,7 +7861,7 @@
           <a:bodyPr wrap="square" lIns="0" tIns="0" rIns="0" bIns="0" rtlCol="0" anchor="ctr"/>
           <a:lstStyle/>
           <a:p>
-            <a:pPr indent="0" marL="0">
+            <a:pPr marL="0" indent="0">
               <a:buNone/>
             </a:pPr>
             <a:r>
@@ -8186,7 +7897,7 @@
           <a:bodyPr wrap="square" lIns="0" tIns="0" rIns="0" bIns="0" rtlCol="0" anchor="ctr"/>
           <a:lstStyle/>
           <a:p>
-            <a:pPr indent="0" marL="0">
+            <a:pPr marL="0" indent="0">
               <a:buNone/>
             </a:pPr>
             <a:r>
@@ -8222,7 +7933,7 @@
           <a:bodyPr wrap="square" lIns="0" tIns="0" rIns="0" bIns="0" rtlCol="0" anchor="ctr"/>
           <a:lstStyle/>
           <a:p>
-            <a:pPr indent="0" marL="0">
+            <a:pPr marL="0" indent="0">
               <a:buNone/>
             </a:pPr>
             <a:r>
@@ -8258,7 +7969,7 @@
           <a:bodyPr wrap="square" lIns="0" tIns="0" rIns="0" bIns="0" rtlCol="0" anchor="ctr"/>
           <a:lstStyle/>
           <a:p>
-            <a:pPr indent="0" marL="0">
+            <a:pPr marL="0" indent="0">
               <a:buNone/>
             </a:pPr>
             <a:r>
@@ -8294,7 +8005,7 @@
           <a:bodyPr wrap="square" lIns="0" tIns="0" rIns="0" bIns="0" rtlCol="0" anchor="ctr"/>
           <a:lstStyle/>
           <a:p>
-            <a:pPr indent="0" marL="0">
+            <a:pPr marL="0" indent="0">
               <a:buNone/>
             </a:pPr>
             <a:r>
@@ -8333,7 +8044,7 @@
             <a:prstDash val="solid"/>
           </a:ln>
           <a:effectLst>
-            <a:outerShdw sx="100000" sy="100000" kx="0" ky="0" algn="bl" rotWithShape="0" blurRad="101600" dist="25400" dir="5400000">
+            <a:outerShdw blurRad="101600" dist="25400" dir="5400000" algn="bl" rotWithShape="0">
               <a:srgbClr val="000000">
                 <a:alpha val="6000"/>
               </a:srgbClr>
@@ -8382,11 +8093,11 @@
           <a:bodyPr wrap="square" lIns="0" tIns="0" rIns="0" bIns="0" rtlCol="0" anchor="ctr"/>
           <a:lstStyle/>
           <a:p>
-            <a:pPr algn="ctr" indent="0" marL="0">
-              <a:buNone/>
-            </a:pPr>
-            <a:r>
-              <a:rPr lang="en-US" sz="1100" b="1" spc="200" kern="0" dirty="0">
+            <a:pPr marL="0" indent="0" algn="ctr">
+              <a:buNone/>
+            </a:pPr>
+            <a:r>
+              <a:rPr lang="en-US" sz="1100" b="1" kern="0" spc="200" dirty="0">
                 <a:solidFill>
                   <a:srgbClr val="CEB4A9"/>
                 </a:solidFill>
@@ -8399,14 +8110,14 @@
       </p:sp>
       <p:pic>
         <p:nvPicPr>
-          <p:cNvPr id="33" name="Image 4" descr="preencoded.png">    </p:cNvPr>
+          <p:cNvPr id="33" name="Image 4" descr="preencoded.png"/>
           <p:cNvPicPr>
             <a:picLocks noChangeAspect="1"/>
           </p:cNvPicPr>
           <p:nvPr/>
         </p:nvPicPr>
         <p:blipFill>
-          <a:blip r:embed="rId5"/>
+          <a:blip r:embed="rId7"/>
           <a:stretch>
             <a:fillRect/>
           </a:stretch>
@@ -8467,11 +8178,11 @@
           <a:bodyPr wrap="square" lIns="0" tIns="0" rIns="0" bIns="0" rtlCol="0" anchor="ctr"/>
           <a:lstStyle/>
           <a:p>
-            <a:pPr algn="ctr" indent="0" marL="0">
-              <a:buNone/>
-            </a:pPr>
-            <a:r>
-              <a:rPr lang="en-US" sz="900" spc="200" kern="0" dirty="0">
+            <a:pPr marL="0" indent="0" algn="ctr">
+              <a:buNone/>
+            </a:pPr>
+            <a:r>
+              <a:rPr lang="en-US" sz="900" kern="0" spc="200" dirty="0">
                 <a:solidFill>
                   <a:srgbClr val="CEB4A9"/>
                 </a:solidFill>
@@ -8503,7 +8214,7 @@
           <a:bodyPr wrap="square" lIns="0" tIns="0" rIns="0" bIns="0" rtlCol="0" anchor="ctr"/>
           <a:lstStyle/>
           <a:p>
-            <a:pPr algn="ctr" indent="0" marL="0">
+            <a:pPr marL="0" indent="0" algn="ctr">
               <a:buNone/>
             </a:pPr>
             <a:r>
@@ -8539,7 +8250,7 @@
           <a:bodyPr wrap="square" lIns="0" tIns="0" rIns="0" bIns="0" rtlCol="0" anchor="ctr"/>
           <a:lstStyle/>
           <a:p>
-            <a:pPr algn="r" indent="0" marL="0">
+            <a:pPr marL="0" indent="0" algn="r">
               <a:buNone/>
             </a:pPr>
             <a:r>
@@ -8578,7 +8289,7 @@
           <a:bodyPr wrap="square" lIns="0" tIns="0" rIns="0" bIns="0" rtlCol="0" anchor="ctr"/>
           <a:lstStyle/>
           <a:p>
-            <a:pPr indent="0" marL="0">
+            <a:pPr marL="0" indent="0">
               <a:buNone/>
             </a:pPr>
             <a:r>
@@ -8609,6 +8320,7 @@
         <a:solidFill>
           <a:srgbClr val="FFFFFF"/>
         </a:solidFill>
+        <a:effectLst/>
       </p:bgPr>
     </p:bg>
     <p:spTree>
@@ -8647,14 +8359,14 @@
       </p:sp>
       <p:pic>
         <p:nvPicPr>
-          <p:cNvPr id="3" name="Image 0" descr="preencoded.png">    </p:cNvPr>
+          <p:cNvPr id="3" name="Image 0" descr="preencoded.png"/>
           <p:cNvPicPr>
             <a:picLocks noChangeAspect="1"/>
           </p:cNvPicPr>
           <p:nvPr/>
         </p:nvPicPr>
         <p:blipFill>
-          <a:blip r:embed="rId1"/>
+          <a:blip r:embed="rId3"/>
           <a:stretch>
             <a:fillRect/>
           </a:stretch>
@@ -8690,7 +8402,7 @@
           <a:bodyPr wrap="square" lIns="0" tIns="0" rIns="0" bIns="0" rtlCol="0" anchor="ctr"/>
           <a:lstStyle/>
           <a:p>
-            <a:pPr indent="0" marL="0">
+            <a:pPr marL="0" indent="0">
               <a:buNone/>
             </a:pPr>
             <a:r>
@@ -8729,7 +8441,7 @@
           <a:bodyPr wrap="square" lIns="0" tIns="0" rIns="0" bIns="0" rtlCol="0" anchor="ctr"/>
           <a:lstStyle/>
           <a:p>
-            <a:pPr indent="0" marL="0">
+            <a:pPr marL="0" indent="0">
               <a:buNone/>
             </a:pPr>
             <a:r>
@@ -8765,7 +8477,7 @@
           <a:bodyPr wrap="square" lIns="0" tIns="0" rIns="0" bIns="0" rtlCol="0" anchor="ctr"/>
           <a:lstStyle/>
           <a:p>
-            <a:pPr indent="0" marL="0">
+            <a:pPr marL="0" indent="0">
               <a:buNone/>
             </a:pPr>
             <a:r>
@@ -8801,7 +8513,7 @@
           <a:bodyPr wrap="square" lIns="0" tIns="0" rIns="0" bIns="0" rtlCol="0" anchor="ctr"/>
           <a:lstStyle/>
           <a:p>
-            <a:pPr algn="r" indent="0" marL="0">
+            <a:pPr marL="0" indent="0" algn="r">
               <a:buNone/>
             </a:pPr>
             <a:r>
@@ -8843,7 +8555,7 @@
             <a:prstDash val="solid"/>
           </a:ln>
           <a:effectLst>
-            <a:outerShdw sx="100000" sy="100000" kx="0" ky="0" algn="bl" rotWithShape="0" blurRad="101600" dist="25400" dir="5400000">
+            <a:outerShdw blurRad="101600" dist="25400" dir="5400000" algn="bl" rotWithShape="0">
               <a:srgbClr val="000000">
                 <a:alpha val="6000"/>
               </a:srgbClr>
@@ -8853,202 +8565,7 @@
       </p:sp>
       <p:pic>
         <p:nvPicPr>
-          <p:cNvPr id="9" name="Image 1" descr="preencoded.png">    </p:cNvPr>
-          <p:cNvPicPr>
-            <a:picLocks noChangeAspect="1"/>
-          </p:cNvPicPr>
-          <p:nvPr/>
-        </p:nvPicPr>
-        <p:blipFill>
-          <a:blip r:embed="rId2"/>
-          <a:stretch>
-            <a:fillRect/>
-          </a:stretch>
-        </p:blipFill>
-        <p:spPr>
-          <a:xfrm>
-            <a:off x="777240" y="1965960"/>
-            <a:ext cx="365760" cy="365760"/>
-          </a:xfrm>
-          <a:prstGeom prst="rect">
-            <a:avLst/>
-          </a:prstGeom>
-        </p:spPr>
-      </p:pic>
-      <p:sp>
-        <p:nvSpPr>
-          <p:cNvPr id="10" name="Text 6"/>
-          <p:cNvSpPr/>
-          <p:nvPr/>
-        </p:nvSpPr>
-        <p:spPr>
-          <a:xfrm>
-            <a:off x="1234440" y="1965960"/>
-            <a:ext cx="5943600" cy="274320"/>
-          </a:xfrm>
-          <a:prstGeom prst="rect">
-            <a:avLst/>
-          </a:prstGeom>
-          <a:noFill/>
-          <a:ln/>
-        </p:spPr>
-        <p:txBody>
-          <a:bodyPr wrap="square" lIns="0" tIns="0" rIns="0" bIns="0" rtlCol="0" anchor="ctr"/>
-          <a:lstStyle/>
-          <a:p>
-            <a:pPr indent="0" marL="0">
-              <a:buNone/>
-            </a:pPr>
-            <a:r>
-              <a:rPr lang="en-US" sz="1000" spc="200" kern="0" dirty="0">
-                <a:solidFill>
-                  <a:srgbClr val="CEB4A9"/>
-                </a:solidFill>
-              </a:rPr>
-              <a:t>位址 · Address</a:t>
-            </a:r>
-            <a:endParaRPr lang="en-US" sz="1000" dirty="0"/>
-          </a:p>
-        </p:txBody>
-      </p:sp>
-      <p:sp>
-        <p:nvSpPr>
-          <p:cNvPr id="11" name="Text 7"/>
-          <p:cNvSpPr/>
-          <p:nvPr/>
-        </p:nvSpPr>
-        <p:spPr>
-          <a:xfrm>
-            <a:off x="1234440" y="2240280"/>
-            <a:ext cx="5943600" cy="365760"/>
-          </a:xfrm>
-          <a:prstGeom prst="rect">
-            <a:avLst/>
-          </a:prstGeom>
-          <a:noFill/>
-          <a:ln/>
-        </p:spPr>
-        <p:txBody>
-          <a:bodyPr wrap="square" lIns="0" tIns="0" rIns="0" bIns="0" rtlCol="0" anchor="ctr"/>
-          <a:lstStyle/>
-          <a:p>
-            <a:pPr indent="0" marL="0">
-              <a:buNone/>
-            </a:pPr>
-            <a:r>
-              <a:rPr lang="en-US" sz="1200" dirty="0">
-                <a:solidFill>
-                  <a:srgbClr val="3D3935"/>
-                </a:solidFill>
-              </a:rPr>
-              <a:t>高雄市前鎮區新光路 33 號  ·  No. 33 Xinguang Rd</a:t>
-            </a:r>
-            <a:endParaRPr lang="en-US" sz="1200" dirty="0"/>
-          </a:p>
-        </p:txBody>
-      </p:sp>
-      <p:pic>
-        <p:nvPicPr>
-          <p:cNvPr id="12" name="Image 2" descr="preencoded.png">    </p:cNvPr>
-          <p:cNvPicPr>
-            <a:picLocks noChangeAspect="1"/>
-          </p:cNvPicPr>
-          <p:nvPr/>
-        </p:nvPicPr>
-        <p:blipFill>
-          <a:blip r:embed="rId3"/>
-          <a:stretch>
-            <a:fillRect/>
-          </a:stretch>
-        </p:blipFill>
-        <p:spPr>
-          <a:xfrm>
-            <a:off x="777240" y="2743200"/>
-            <a:ext cx="365760" cy="365760"/>
-          </a:xfrm>
-          <a:prstGeom prst="rect">
-            <a:avLst/>
-          </a:prstGeom>
-        </p:spPr>
-      </p:pic>
-      <p:sp>
-        <p:nvSpPr>
-          <p:cNvPr id="13" name="Text 8"/>
-          <p:cNvSpPr/>
-          <p:nvPr/>
-        </p:nvSpPr>
-        <p:spPr>
-          <a:xfrm>
-            <a:off x="1234440" y="2743200"/>
-            <a:ext cx="5943600" cy="274320"/>
-          </a:xfrm>
-          <a:prstGeom prst="rect">
-            <a:avLst/>
-          </a:prstGeom>
-          <a:noFill/>
-          <a:ln/>
-        </p:spPr>
-        <p:txBody>
-          <a:bodyPr wrap="square" lIns="0" tIns="0" rIns="0" bIns="0" rtlCol="0" anchor="ctr"/>
-          <a:lstStyle/>
-          <a:p>
-            <a:pPr indent="0" marL="0">
-              <a:buNone/>
-            </a:pPr>
-            <a:r>
-              <a:rPr lang="en-US" sz="1000" spc="200" kern="0" dirty="0">
-                <a:solidFill>
-                  <a:srgbClr val="CEB4A9"/>
-                </a:solidFill>
-              </a:rPr>
-              <a:t>電話 · Phone</a:t>
-            </a:r>
-            <a:endParaRPr lang="en-US" sz="1000" dirty="0"/>
-          </a:p>
-        </p:txBody>
-      </p:sp>
-      <p:sp>
-        <p:nvSpPr>
-          <p:cNvPr id="14" name="Text 9"/>
-          <p:cNvSpPr/>
-          <p:nvPr/>
-        </p:nvSpPr>
-        <p:spPr>
-          <a:xfrm>
-            <a:off x="1234440" y="3017520"/>
-            <a:ext cx="5943600" cy="365760"/>
-          </a:xfrm>
-          <a:prstGeom prst="rect">
-            <a:avLst/>
-          </a:prstGeom>
-          <a:noFill/>
-          <a:ln/>
-        </p:spPr>
-        <p:txBody>
-          <a:bodyPr wrap="square" lIns="0" tIns="0" rIns="0" bIns="0" rtlCol="0" anchor="ctr"/>
-          <a:lstStyle/>
-          <a:p>
-            <a:pPr indent="0" marL="0">
-              <a:buNone/>
-            </a:pPr>
-            <a:r>
-              <a:rPr lang="en-US" sz="1400" b="1" dirty="0">
-                <a:solidFill>
-                  <a:srgbClr val="3D3935"/>
-                </a:solidFill>
-                <a:latin typeface="Consolas" pitchFamily="34" charset="0"/>
-                <a:ea typeface="Consolas" pitchFamily="34" charset="-122"/>
-                <a:cs typeface="Consolas" pitchFamily="34" charset="-120"/>
-              </a:rPr>
-              <a:t>+886-7-3391888</a:t>
-            </a:r>
-            <a:endParaRPr lang="en-US" sz="1400" dirty="0"/>
-          </a:p>
-        </p:txBody>
-      </p:sp>
-      <p:pic>
-        <p:nvPicPr>
-          <p:cNvPr id="15" name="Image 3" descr="preencoded.png">    </p:cNvPr>
+          <p:cNvPr id="9" name="Image 1" descr="preencoded.png"/>
           <p:cNvPicPr>
             <a:picLocks noChangeAspect="1"/>
           </p:cNvPicPr>
@@ -9062,6 +8579,201 @@
         </p:blipFill>
         <p:spPr>
           <a:xfrm>
+            <a:off x="777240" y="1965960"/>
+            <a:ext cx="365760" cy="365760"/>
+          </a:xfrm>
+          <a:prstGeom prst="rect">
+            <a:avLst/>
+          </a:prstGeom>
+        </p:spPr>
+      </p:pic>
+      <p:sp>
+        <p:nvSpPr>
+          <p:cNvPr id="10" name="Text 6"/>
+          <p:cNvSpPr/>
+          <p:nvPr/>
+        </p:nvSpPr>
+        <p:spPr>
+          <a:xfrm>
+            <a:off x="1234440" y="1965960"/>
+            <a:ext cx="5943600" cy="274320"/>
+          </a:xfrm>
+          <a:prstGeom prst="rect">
+            <a:avLst/>
+          </a:prstGeom>
+          <a:noFill/>
+          <a:ln/>
+        </p:spPr>
+        <p:txBody>
+          <a:bodyPr wrap="square" lIns="0" tIns="0" rIns="0" bIns="0" rtlCol="0" anchor="ctr"/>
+          <a:lstStyle/>
+          <a:p>
+            <a:pPr marL="0" indent="0">
+              <a:buNone/>
+            </a:pPr>
+            <a:r>
+              <a:rPr lang="en-US" sz="1000" kern="0" spc="200" dirty="0">
+                <a:solidFill>
+                  <a:srgbClr val="CEB4A9"/>
+                </a:solidFill>
+              </a:rPr>
+              <a:t>位址 · Address</a:t>
+            </a:r>
+            <a:endParaRPr lang="en-US" sz="1000" dirty="0"/>
+          </a:p>
+        </p:txBody>
+      </p:sp>
+      <p:sp>
+        <p:nvSpPr>
+          <p:cNvPr id="11" name="Text 7"/>
+          <p:cNvSpPr/>
+          <p:nvPr/>
+        </p:nvSpPr>
+        <p:spPr>
+          <a:xfrm>
+            <a:off x="1234440" y="2240280"/>
+            <a:ext cx="5943600" cy="365760"/>
+          </a:xfrm>
+          <a:prstGeom prst="rect">
+            <a:avLst/>
+          </a:prstGeom>
+          <a:noFill/>
+          <a:ln/>
+        </p:spPr>
+        <p:txBody>
+          <a:bodyPr wrap="square" lIns="0" tIns="0" rIns="0" bIns="0" rtlCol="0" anchor="ctr"/>
+          <a:lstStyle/>
+          <a:p>
+            <a:pPr marL="0" indent="0">
+              <a:buNone/>
+            </a:pPr>
+            <a:r>
+              <a:rPr lang="en-US" sz="1200" dirty="0">
+                <a:solidFill>
+                  <a:srgbClr val="3D3935"/>
+                </a:solidFill>
+              </a:rPr>
+              <a:t>高雄市前鎮區新光路 33 號  ·  No. 33 Xinguang Rd</a:t>
+            </a:r>
+            <a:endParaRPr lang="en-US" sz="1200" dirty="0"/>
+          </a:p>
+        </p:txBody>
+      </p:sp>
+      <p:pic>
+        <p:nvPicPr>
+          <p:cNvPr id="12" name="Image 2" descr="preencoded.png"/>
+          <p:cNvPicPr>
+            <a:picLocks noChangeAspect="1"/>
+          </p:cNvPicPr>
+          <p:nvPr/>
+        </p:nvPicPr>
+        <p:blipFill>
+          <a:blip r:embed="rId5"/>
+          <a:stretch>
+            <a:fillRect/>
+          </a:stretch>
+        </p:blipFill>
+        <p:spPr>
+          <a:xfrm>
+            <a:off x="777240" y="2743200"/>
+            <a:ext cx="365760" cy="365760"/>
+          </a:xfrm>
+          <a:prstGeom prst="rect">
+            <a:avLst/>
+          </a:prstGeom>
+        </p:spPr>
+      </p:pic>
+      <p:sp>
+        <p:nvSpPr>
+          <p:cNvPr id="13" name="Text 8"/>
+          <p:cNvSpPr/>
+          <p:nvPr/>
+        </p:nvSpPr>
+        <p:spPr>
+          <a:xfrm>
+            <a:off x="1234440" y="2743200"/>
+            <a:ext cx="5943600" cy="274320"/>
+          </a:xfrm>
+          <a:prstGeom prst="rect">
+            <a:avLst/>
+          </a:prstGeom>
+          <a:noFill/>
+          <a:ln/>
+        </p:spPr>
+        <p:txBody>
+          <a:bodyPr wrap="square" lIns="0" tIns="0" rIns="0" bIns="0" rtlCol="0" anchor="ctr"/>
+          <a:lstStyle/>
+          <a:p>
+            <a:pPr marL="0" indent="0">
+              <a:buNone/>
+            </a:pPr>
+            <a:r>
+              <a:rPr lang="en-US" sz="1000" kern="0" spc="200" dirty="0">
+                <a:solidFill>
+                  <a:srgbClr val="CEB4A9"/>
+                </a:solidFill>
+              </a:rPr>
+              <a:t>電話 · Phone</a:t>
+            </a:r>
+            <a:endParaRPr lang="en-US" sz="1000" dirty="0"/>
+          </a:p>
+        </p:txBody>
+      </p:sp>
+      <p:sp>
+        <p:nvSpPr>
+          <p:cNvPr id="14" name="Text 9"/>
+          <p:cNvSpPr/>
+          <p:nvPr/>
+        </p:nvSpPr>
+        <p:spPr>
+          <a:xfrm>
+            <a:off x="1234440" y="3017520"/>
+            <a:ext cx="5943600" cy="365760"/>
+          </a:xfrm>
+          <a:prstGeom prst="rect">
+            <a:avLst/>
+          </a:prstGeom>
+          <a:noFill/>
+          <a:ln/>
+        </p:spPr>
+        <p:txBody>
+          <a:bodyPr wrap="square" lIns="0" tIns="0" rIns="0" bIns="0" rtlCol="0" anchor="ctr"/>
+          <a:lstStyle/>
+          <a:p>
+            <a:pPr marL="0" indent="0">
+              <a:buNone/>
+            </a:pPr>
+            <a:r>
+              <a:rPr lang="en-US" sz="1400" b="1" dirty="0">
+                <a:solidFill>
+                  <a:srgbClr val="3D3935"/>
+                </a:solidFill>
+                <a:latin typeface="Consolas" pitchFamily="34" charset="0"/>
+                <a:ea typeface="Consolas" pitchFamily="34" charset="-122"/>
+                <a:cs typeface="Consolas" pitchFamily="34" charset="-120"/>
+              </a:rPr>
+              <a:t>+886-7-3391888</a:t>
+            </a:r>
+            <a:endParaRPr lang="en-US" sz="1400" dirty="0"/>
+          </a:p>
+        </p:txBody>
+      </p:sp>
+      <p:pic>
+        <p:nvPicPr>
+          <p:cNvPr id="15" name="Image 3" descr="preencoded.png"/>
+          <p:cNvPicPr>
+            <a:picLocks noChangeAspect="1"/>
+          </p:cNvPicPr>
+          <p:nvPr/>
+        </p:nvPicPr>
+        <p:blipFill>
+          <a:blip r:embed="rId6"/>
+          <a:stretch>
+            <a:fillRect/>
+          </a:stretch>
+        </p:blipFill>
+        <p:spPr>
+          <a:xfrm>
             <a:off x="777240" y="3520440"/>
             <a:ext cx="365760" cy="365760"/>
           </a:xfrm>
@@ -9091,11 +8803,11 @@
           <a:bodyPr wrap="square" lIns="0" tIns="0" rIns="0" bIns="0" rtlCol="0" anchor="ctr"/>
           <a:lstStyle/>
           <a:p>
-            <a:pPr indent="0" marL="0">
-              <a:buNone/>
-            </a:pPr>
-            <a:r>
-              <a:rPr lang="en-US" sz="1000" spc="200" kern="0" dirty="0">
+            <a:pPr marL="0" indent="0">
+              <a:buNone/>
+            </a:pPr>
+            <a:r>
+              <a:rPr lang="en-US" sz="1000" kern="0" spc="200" dirty="0">
                 <a:solidFill>
                   <a:srgbClr val="CEB4A9"/>
                 </a:solidFill>
@@ -9127,7 +8839,7 @@
           <a:bodyPr wrap="square" lIns="0" tIns="0" rIns="0" bIns="0" rtlCol="0" anchor="ctr"/>
           <a:lstStyle/>
           <a:p>
-            <a:pPr indent="0" marL="0">
+            <a:pPr marL="0" indent="0">
               <a:buNone/>
             </a:pPr>
             <a:r>
@@ -9163,7 +8875,7 @@
           <a:bodyPr wrap="square" lIns="0" tIns="0" rIns="0" bIns="0" rtlCol="0" anchor="ctr"/>
           <a:lstStyle/>
           <a:p>
-            <a:pPr indent="0" marL="0">
+            <a:pPr marL="0" indent="0">
               <a:buNone/>
             </a:pPr>
             <a:r>
@@ -9224,11 +8936,11 @@
           <a:bodyPr wrap="square" lIns="0" tIns="0" rIns="0" bIns="0" rtlCol="0" anchor="ctr"/>
           <a:lstStyle/>
           <a:p>
-            <a:pPr indent="0" marL="0">
-              <a:buNone/>
-            </a:pPr>
-            <a:r>
-              <a:rPr lang="en-US" sz="1100" b="1" spc="200" kern="0" dirty="0">
+            <a:pPr marL="0" indent="0">
+              <a:buNone/>
+            </a:pPr>
+            <a:r>
+              <a:rPr lang="en-US" sz="1100" b="1" kern="0" spc="200" dirty="0">
                 <a:solidFill>
                   <a:srgbClr val="CEB4A9"/>
                 </a:solidFill>
@@ -9260,7 +8972,7 @@
           <a:bodyPr wrap="square" lIns="0" tIns="0" rIns="0" bIns="0" rtlCol="0" anchor="ctr"/>
           <a:lstStyle/>
           <a:p>
-            <a:pPr indent="0" marL="0">
+            <a:pPr marL="0" indent="0">
               <a:buNone/>
             </a:pPr>
             <a:r>
@@ -9296,7 +9008,7 @@
           <a:bodyPr wrap="square" lIns="0" tIns="0" rIns="0" bIns="0" rtlCol="0" anchor="ctr"/>
           <a:lstStyle/>
           <a:p>
-            <a:pPr indent="0" marL="0">
+            <a:pPr marL="0" indent="0">
               <a:buNone/>
             </a:pPr>
             <a:r>
@@ -9332,7 +9044,7 @@
           <a:bodyPr wrap="square" lIns="0" tIns="0" rIns="0" bIns="0" rtlCol="0" anchor="ctr"/>
           <a:lstStyle/>
           <a:p>
-            <a:pPr indent="0" marL="0">
+            <a:pPr marL="0" indent="0">
               <a:buNone/>
             </a:pPr>
             <a:r>
@@ -9368,7 +9080,7 @@
           <a:bodyPr wrap="square" lIns="0" tIns="0" rIns="0" bIns="0" rtlCol="0" anchor="ctr"/>
           <a:lstStyle/>
           <a:p>
-            <a:pPr indent="0" marL="0">
+            <a:pPr marL="0" indent="0">
               <a:buNone/>
             </a:pPr>
             <a:r>
@@ -9404,7 +9116,7 @@
           <a:bodyPr wrap="square" lIns="0" tIns="0" rIns="0" bIns="0" rtlCol="0" anchor="ctr"/>
           <a:lstStyle/>
           <a:p>
-            <a:pPr indent="0" marL="0">
+            <a:pPr marL="0" indent="0">
               <a:buNone/>
             </a:pPr>
             <a:r>
@@ -9440,7 +9152,7 @@
           <a:bodyPr wrap="square" lIns="0" tIns="0" rIns="0" bIns="0" rtlCol="0" anchor="ctr"/>
           <a:lstStyle/>
           <a:p>
-            <a:pPr indent="0" marL="0">
+            <a:pPr marL="0" indent="0">
               <a:buNone/>
             </a:pPr>
             <a:r>
@@ -9476,7 +9188,7 @@
           <a:bodyPr wrap="square" lIns="0" tIns="0" rIns="0" bIns="0" rtlCol="0" anchor="ctr"/>
           <a:lstStyle/>
           <a:p>
-            <a:pPr indent="0" marL="0">
+            <a:pPr marL="0" indent="0">
               <a:buNone/>
             </a:pPr>
             <a:r>
@@ -9512,7 +9224,7 @@
           <a:bodyPr wrap="square" lIns="0" tIns="0" rIns="0" bIns="0" rtlCol="0" anchor="ctr"/>
           <a:lstStyle/>
           <a:p>
-            <a:pPr indent="0" marL="0">
+            <a:pPr marL="0" indent="0">
               <a:buNone/>
             </a:pPr>
             <a:r>
@@ -9548,7 +9260,7 @@
           <a:bodyPr wrap="square" lIns="0" tIns="0" rIns="0" bIns="0" rtlCol="0" anchor="ctr"/>
           <a:lstStyle/>
           <a:p>
-            <a:pPr indent="0" marL="0">
+            <a:pPr marL="0" indent="0">
               <a:buNone/>
             </a:pPr>
             <a:r>
@@ -9587,7 +9299,7 @@
             <a:prstDash val="solid"/>
           </a:ln>
           <a:effectLst>
-            <a:outerShdw sx="100000" sy="100000" kx="0" ky="0" algn="bl" rotWithShape="0" blurRad="101600" dist="25400" dir="5400000">
+            <a:outerShdw blurRad="101600" dist="25400" dir="5400000" algn="bl" rotWithShape="0">
               <a:srgbClr val="000000">
                 <a:alpha val="6000"/>
               </a:srgbClr>
@@ -9636,11 +9348,11 @@
           <a:bodyPr wrap="square" lIns="0" tIns="0" rIns="0" bIns="0" rtlCol="0" anchor="ctr"/>
           <a:lstStyle/>
           <a:p>
-            <a:pPr algn="ctr" indent="0" marL="0">
-              <a:buNone/>
-            </a:pPr>
-            <a:r>
-              <a:rPr lang="en-US" sz="1100" b="1" spc="200" kern="0" dirty="0">
+            <a:pPr marL="0" indent="0" algn="ctr">
+              <a:buNone/>
+            </a:pPr>
+            <a:r>
+              <a:rPr lang="en-US" sz="1100" b="1" kern="0" spc="200" dirty="0">
                 <a:solidFill>
                   <a:srgbClr val="CEB4A9"/>
                 </a:solidFill>
@@ -9653,14 +9365,14 @@
       </p:sp>
       <p:pic>
         <p:nvPicPr>
-          <p:cNvPr id="33" name="Image 4" descr="preencoded.png">    </p:cNvPr>
+          <p:cNvPr id="33" name="Image 4" descr="preencoded.png"/>
           <p:cNvPicPr>
             <a:picLocks noChangeAspect="1"/>
           </p:cNvPicPr>
           <p:nvPr/>
         </p:nvPicPr>
         <p:blipFill>
-          <a:blip r:embed="rId5"/>
+          <a:blip r:embed="rId7"/>
           <a:stretch>
             <a:fillRect/>
           </a:stretch>
@@ -9721,11 +9433,11 @@
           <a:bodyPr wrap="square" lIns="0" tIns="0" rIns="0" bIns="0" rtlCol="0" anchor="ctr"/>
           <a:lstStyle/>
           <a:p>
-            <a:pPr algn="ctr" indent="0" marL="0">
-              <a:buNone/>
-            </a:pPr>
-            <a:r>
-              <a:rPr lang="en-US" sz="900" spc="200" kern="0" dirty="0">
+            <a:pPr marL="0" indent="0" algn="ctr">
+              <a:buNone/>
+            </a:pPr>
+            <a:r>
+              <a:rPr lang="en-US" sz="900" kern="0" spc="200" dirty="0">
                 <a:solidFill>
                   <a:srgbClr val="CEB4A9"/>
                 </a:solidFill>
@@ -9757,7 +9469,7 @@
           <a:bodyPr wrap="square" lIns="0" tIns="0" rIns="0" bIns="0" rtlCol="0" anchor="ctr"/>
           <a:lstStyle/>
           <a:p>
-            <a:pPr algn="ctr" indent="0" marL="0">
+            <a:pPr marL="0" indent="0" algn="ctr">
               <a:buNone/>
             </a:pPr>
             <a:r>
@@ -9793,7 +9505,7 @@
           <a:bodyPr wrap="square" lIns="0" tIns="0" rIns="0" bIns="0" rtlCol="0" anchor="ctr"/>
           <a:lstStyle/>
           <a:p>
-            <a:pPr algn="r" indent="0" marL="0">
+            <a:pPr marL="0" indent="0" algn="r">
               <a:buNone/>
             </a:pPr>
             <a:r>
@@ -9832,7 +9544,7 @@
           <a:bodyPr wrap="square" lIns="0" tIns="0" rIns="0" bIns="0" rtlCol="0" anchor="ctr"/>
           <a:lstStyle/>
           <a:p>
-            <a:pPr indent="0" marL="0">
+            <a:pPr marL="0" indent="0">
               <a:buNone/>
             </a:pPr>
             <a:r>
@@ -9863,6 +9575,7 @@
         <a:solidFill>
           <a:srgbClr val="FFFFFF"/>
         </a:solidFill>
+        <a:effectLst/>
       </p:bgPr>
     </p:bg>
     <p:spTree>
@@ -9901,14 +9614,14 @@
       </p:sp>
       <p:pic>
         <p:nvPicPr>
-          <p:cNvPr id="3" name="Image 0" descr="preencoded.png">    </p:cNvPr>
+          <p:cNvPr id="3" name="Image 0" descr="preencoded.png"/>
           <p:cNvPicPr>
             <a:picLocks noChangeAspect="1"/>
           </p:cNvPicPr>
           <p:nvPr/>
         </p:nvPicPr>
         <p:blipFill>
-          <a:blip r:embed="rId1"/>
+          <a:blip r:embed="rId3"/>
           <a:stretch>
             <a:fillRect/>
           </a:stretch>
@@ -9944,7 +9657,7 @@
           <a:bodyPr wrap="square" lIns="0" tIns="0" rIns="0" bIns="0" rtlCol="0" anchor="ctr"/>
           <a:lstStyle/>
           <a:p>
-            <a:pPr indent="0" marL="0">
+            <a:pPr marL="0" indent="0">
               <a:buNone/>
             </a:pPr>
             <a:r>
@@ -9983,7 +9696,7 @@
           <a:bodyPr wrap="square" lIns="0" tIns="0" rIns="0" bIns="0" rtlCol="0" anchor="ctr"/>
           <a:lstStyle/>
           <a:p>
-            <a:pPr indent="0" marL="0">
+            <a:pPr marL="0" indent="0">
               <a:buNone/>
             </a:pPr>
             <a:r>
@@ -10019,7 +9732,7 @@
           <a:bodyPr wrap="square" lIns="0" tIns="0" rIns="0" bIns="0" rtlCol="0" anchor="ctr"/>
           <a:lstStyle/>
           <a:p>
-            <a:pPr indent="0" marL="0">
+            <a:pPr marL="0" indent="0">
               <a:buNone/>
             </a:pPr>
             <a:r>
@@ -10055,7 +9768,7 @@
           <a:bodyPr wrap="square" lIns="0" tIns="0" rIns="0" bIns="0" rtlCol="0" anchor="ctr"/>
           <a:lstStyle/>
           <a:p>
-            <a:pPr algn="r" indent="0" marL="0">
+            <a:pPr marL="0" indent="0" algn="r">
               <a:buNone/>
             </a:pPr>
             <a:r>
@@ -10097,7 +9810,7 @@
             <a:prstDash val="solid"/>
           </a:ln>
           <a:effectLst>
-            <a:outerShdw sx="100000" sy="100000" kx="0" ky="0" algn="bl" rotWithShape="0" blurRad="101600" dist="25400" dir="5400000">
+            <a:outerShdw blurRad="101600" dist="25400" dir="5400000" algn="bl" rotWithShape="0">
               <a:srgbClr val="000000">
                 <a:alpha val="6000"/>
               </a:srgbClr>
@@ -10107,202 +9820,7 @@
       </p:sp>
       <p:pic>
         <p:nvPicPr>
-          <p:cNvPr id="9" name="Image 1" descr="preencoded.png">    </p:cNvPr>
-          <p:cNvPicPr>
-            <a:picLocks noChangeAspect="1"/>
-          </p:cNvPicPr>
-          <p:nvPr/>
-        </p:nvPicPr>
-        <p:blipFill>
-          <a:blip r:embed="rId2"/>
-          <a:stretch>
-            <a:fillRect/>
-          </a:stretch>
-        </p:blipFill>
-        <p:spPr>
-          <a:xfrm>
-            <a:off x="777240" y="1965960"/>
-            <a:ext cx="365760" cy="365760"/>
-          </a:xfrm>
-          <a:prstGeom prst="rect">
-            <a:avLst/>
-          </a:prstGeom>
-        </p:spPr>
-      </p:pic>
-      <p:sp>
-        <p:nvSpPr>
-          <p:cNvPr id="10" name="Text 6"/>
-          <p:cNvSpPr/>
-          <p:nvPr/>
-        </p:nvSpPr>
-        <p:spPr>
-          <a:xfrm>
-            <a:off x="1234440" y="1965960"/>
-            <a:ext cx="5943600" cy="274320"/>
-          </a:xfrm>
-          <a:prstGeom prst="rect">
-            <a:avLst/>
-          </a:prstGeom>
-          <a:noFill/>
-          <a:ln/>
-        </p:spPr>
-        <p:txBody>
-          <a:bodyPr wrap="square" lIns="0" tIns="0" rIns="0" bIns="0" rtlCol="0" anchor="ctr"/>
-          <a:lstStyle/>
-          <a:p>
-            <a:pPr indent="0" marL="0">
-              <a:buNone/>
-            </a:pPr>
-            <a:r>
-              <a:rPr lang="en-US" sz="1000" spc="200" kern="0" dirty="0">
-                <a:solidFill>
-                  <a:srgbClr val="CEB4A9"/>
-                </a:solidFill>
-              </a:rPr>
-              <a:t>位址 · Address</a:t>
-            </a:r>
-            <a:endParaRPr lang="en-US" sz="1000" dirty="0"/>
-          </a:p>
-        </p:txBody>
-      </p:sp>
-      <p:sp>
-        <p:nvSpPr>
-          <p:cNvPr id="11" name="Text 7"/>
-          <p:cNvSpPr/>
-          <p:nvPr/>
-        </p:nvSpPr>
-        <p:spPr>
-          <a:xfrm>
-            <a:off x="1234440" y="2240280"/>
-            <a:ext cx="5943600" cy="365760"/>
-          </a:xfrm>
-          <a:prstGeom prst="rect">
-            <a:avLst/>
-          </a:prstGeom>
-          <a:noFill/>
-          <a:ln/>
-        </p:spPr>
-        <p:txBody>
-          <a:bodyPr wrap="square" lIns="0" tIns="0" rIns="0" bIns="0" rtlCol="0" anchor="ctr"/>
-          <a:lstStyle/>
-          <a:p>
-            <a:pPr indent="0" marL="0">
-              <a:buNone/>
-            </a:pPr>
-            <a:r>
-              <a:rPr lang="en-US" sz="1200" dirty="0">
-                <a:solidFill>
-                  <a:srgbClr val="3D3935"/>
-                </a:solidFill>
-              </a:rPr>
-              <a:t>高雄市前鎮區新光路 33 號  ·  No. 33 Xinguang Rd</a:t>
-            </a:r>
-            <a:endParaRPr lang="en-US" sz="1200" dirty="0"/>
-          </a:p>
-        </p:txBody>
-      </p:sp>
-      <p:pic>
-        <p:nvPicPr>
-          <p:cNvPr id="12" name="Image 2" descr="preencoded.png">    </p:cNvPr>
-          <p:cNvPicPr>
-            <a:picLocks noChangeAspect="1"/>
-          </p:cNvPicPr>
-          <p:nvPr/>
-        </p:nvPicPr>
-        <p:blipFill>
-          <a:blip r:embed="rId3"/>
-          <a:stretch>
-            <a:fillRect/>
-          </a:stretch>
-        </p:blipFill>
-        <p:spPr>
-          <a:xfrm>
-            <a:off x="777240" y="2743200"/>
-            <a:ext cx="365760" cy="365760"/>
-          </a:xfrm>
-          <a:prstGeom prst="rect">
-            <a:avLst/>
-          </a:prstGeom>
-        </p:spPr>
-      </p:pic>
-      <p:sp>
-        <p:nvSpPr>
-          <p:cNvPr id="13" name="Text 8"/>
-          <p:cNvSpPr/>
-          <p:nvPr/>
-        </p:nvSpPr>
-        <p:spPr>
-          <a:xfrm>
-            <a:off x="1234440" y="2743200"/>
-            <a:ext cx="5943600" cy="274320"/>
-          </a:xfrm>
-          <a:prstGeom prst="rect">
-            <a:avLst/>
-          </a:prstGeom>
-          <a:noFill/>
-          <a:ln/>
-        </p:spPr>
-        <p:txBody>
-          <a:bodyPr wrap="square" lIns="0" tIns="0" rIns="0" bIns="0" rtlCol="0" anchor="ctr"/>
-          <a:lstStyle/>
-          <a:p>
-            <a:pPr indent="0" marL="0">
-              <a:buNone/>
-            </a:pPr>
-            <a:r>
-              <a:rPr lang="en-US" sz="1000" spc="200" kern="0" dirty="0">
-                <a:solidFill>
-                  <a:srgbClr val="CEB4A9"/>
-                </a:solidFill>
-              </a:rPr>
-              <a:t>電話 · Phone</a:t>
-            </a:r>
-            <a:endParaRPr lang="en-US" sz="1000" dirty="0"/>
-          </a:p>
-        </p:txBody>
-      </p:sp>
-      <p:sp>
-        <p:nvSpPr>
-          <p:cNvPr id="14" name="Text 9"/>
-          <p:cNvSpPr/>
-          <p:nvPr/>
-        </p:nvSpPr>
-        <p:spPr>
-          <a:xfrm>
-            <a:off x="1234440" y="3017520"/>
-            <a:ext cx="5943600" cy="365760"/>
-          </a:xfrm>
-          <a:prstGeom prst="rect">
-            <a:avLst/>
-          </a:prstGeom>
-          <a:noFill/>
-          <a:ln/>
-        </p:spPr>
-        <p:txBody>
-          <a:bodyPr wrap="square" lIns="0" tIns="0" rIns="0" bIns="0" rtlCol="0" anchor="ctr"/>
-          <a:lstStyle/>
-          <a:p>
-            <a:pPr indent="0" marL="0">
-              <a:buNone/>
-            </a:pPr>
-            <a:r>
-              <a:rPr lang="en-US" sz="1400" b="1" dirty="0">
-                <a:solidFill>
-                  <a:srgbClr val="3D3935"/>
-                </a:solidFill>
-                <a:latin typeface="Consolas" pitchFamily="34" charset="0"/>
-                <a:ea typeface="Consolas" pitchFamily="34" charset="-122"/>
-                <a:cs typeface="Consolas" pitchFamily="34" charset="-120"/>
-              </a:rPr>
-              <a:t>+886-7-3391888</a:t>
-            </a:r>
-            <a:endParaRPr lang="en-US" sz="1400" dirty="0"/>
-          </a:p>
-        </p:txBody>
-      </p:sp>
-      <p:pic>
-        <p:nvPicPr>
-          <p:cNvPr id="15" name="Image 3" descr="preencoded.png">    </p:cNvPr>
+          <p:cNvPr id="9" name="Image 1" descr="preencoded.png"/>
           <p:cNvPicPr>
             <a:picLocks noChangeAspect="1"/>
           </p:cNvPicPr>
@@ -10316,6 +9834,201 @@
         </p:blipFill>
         <p:spPr>
           <a:xfrm>
+            <a:off x="777240" y="1965960"/>
+            <a:ext cx="365760" cy="365760"/>
+          </a:xfrm>
+          <a:prstGeom prst="rect">
+            <a:avLst/>
+          </a:prstGeom>
+        </p:spPr>
+      </p:pic>
+      <p:sp>
+        <p:nvSpPr>
+          <p:cNvPr id="10" name="Text 6"/>
+          <p:cNvSpPr/>
+          <p:nvPr/>
+        </p:nvSpPr>
+        <p:spPr>
+          <a:xfrm>
+            <a:off x="1234440" y="1965960"/>
+            <a:ext cx="5943600" cy="274320"/>
+          </a:xfrm>
+          <a:prstGeom prst="rect">
+            <a:avLst/>
+          </a:prstGeom>
+          <a:noFill/>
+          <a:ln/>
+        </p:spPr>
+        <p:txBody>
+          <a:bodyPr wrap="square" lIns="0" tIns="0" rIns="0" bIns="0" rtlCol="0" anchor="ctr"/>
+          <a:lstStyle/>
+          <a:p>
+            <a:pPr marL="0" indent="0">
+              <a:buNone/>
+            </a:pPr>
+            <a:r>
+              <a:rPr lang="en-US" sz="1000" kern="0" spc="200" dirty="0">
+                <a:solidFill>
+                  <a:srgbClr val="CEB4A9"/>
+                </a:solidFill>
+              </a:rPr>
+              <a:t>位址 · Address</a:t>
+            </a:r>
+            <a:endParaRPr lang="en-US" sz="1000" dirty="0"/>
+          </a:p>
+        </p:txBody>
+      </p:sp>
+      <p:sp>
+        <p:nvSpPr>
+          <p:cNvPr id="11" name="Text 7"/>
+          <p:cNvSpPr/>
+          <p:nvPr/>
+        </p:nvSpPr>
+        <p:spPr>
+          <a:xfrm>
+            <a:off x="1234440" y="2240280"/>
+            <a:ext cx="5943600" cy="365760"/>
+          </a:xfrm>
+          <a:prstGeom prst="rect">
+            <a:avLst/>
+          </a:prstGeom>
+          <a:noFill/>
+          <a:ln/>
+        </p:spPr>
+        <p:txBody>
+          <a:bodyPr wrap="square" lIns="0" tIns="0" rIns="0" bIns="0" rtlCol="0" anchor="ctr"/>
+          <a:lstStyle/>
+          <a:p>
+            <a:pPr marL="0" indent="0">
+              <a:buNone/>
+            </a:pPr>
+            <a:r>
+              <a:rPr lang="en-US" sz="1200" dirty="0">
+                <a:solidFill>
+                  <a:srgbClr val="3D3935"/>
+                </a:solidFill>
+              </a:rPr>
+              <a:t>高雄市前鎮區新光路 33 號  ·  No. 33 Xinguang Rd</a:t>
+            </a:r>
+            <a:endParaRPr lang="en-US" sz="1200" dirty="0"/>
+          </a:p>
+        </p:txBody>
+      </p:sp>
+      <p:pic>
+        <p:nvPicPr>
+          <p:cNvPr id="12" name="Image 2" descr="preencoded.png"/>
+          <p:cNvPicPr>
+            <a:picLocks noChangeAspect="1"/>
+          </p:cNvPicPr>
+          <p:nvPr/>
+        </p:nvPicPr>
+        <p:blipFill>
+          <a:blip r:embed="rId5"/>
+          <a:stretch>
+            <a:fillRect/>
+          </a:stretch>
+        </p:blipFill>
+        <p:spPr>
+          <a:xfrm>
+            <a:off x="777240" y="2743200"/>
+            <a:ext cx="365760" cy="365760"/>
+          </a:xfrm>
+          <a:prstGeom prst="rect">
+            <a:avLst/>
+          </a:prstGeom>
+        </p:spPr>
+      </p:pic>
+      <p:sp>
+        <p:nvSpPr>
+          <p:cNvPr id="13" name="Text 8"/>
+          <p:cNvSpPr/>
+          <p:nvPr/>
+        </p:nvSpPr>
+        <p:spPr>
+          <a:xfrm>
+            <a:off x="1234440" y="2743200"/>
+            <a:ext cx="5943600" cy="274320"/>
+          </a:xfrm>
+          <a:prstGeom prst="rect">
+            <a:avLst/>
+          </a:prstGeom>
+          <a:noFill/>
+          <a:ln/>
+        </p:spPr>
+        <p:txBody>
+          <a:bodyPr wrap="square" lIns="0" tIns="0" rIns="0" bIns="0" rtlCol="0" anchor="ctr"/>
+          <a:lstStyle/>
+          <a:p>
+            <a:pPr marL="0" indent="0">
+              <a:buNone/>
+            </a:pPr>
+            <a:r>
+              <a:rPr lang="en-US" sz="1000" kern="0" spc="200" dirty="0">
+                <a:solidFill>
+                  <a:srgbClr val="CEB4A9"/>
+                </a:solidFill>
+              </a:rPr>
+              <a:t>電話 · Phone</a:t>
+            </a:r>
+            <a:endParaRPr lang="en-US" sz="1000" dirty="0"/>
+          </a:p>
+        </p:txBody>
+      </p:sp>
+      <p:sp>
+        <p:nvSpPr>
+          <p:cNvPr id="14" name="Text 9"/>
+          <p:cNvSpPr/>
+          <p:nvPr/>
+        </p:nvSpPr>
+        <p:spPr>
+          <a:xfrm>
+            <a:off x="1234440" y="3017520"/>
+            <a:ext cx="5943600" cy="365760"/>
+          </a:xfrm>
+          <a:prstGeom prst="rect">
+            <a:avLst/>
+          </a:prstGeom>
+          <a:noFill/>
+          <a:ln/>
+        </p:spPr>
+        <p:txBody>
+          <a:bodyPr wrap="square" lIns="0" tIns="0" rIns="0" bIns="0" rtlCol="0" anchor="ctr"/>
+          <a:lstStyle/>
+          <a:p>
+            <a:pPr marL="0" indent="0">
+              <a:buNone/>
+            </a:pPr>
+            <a:r>
+              <a:rPr lang="en-US" sz="1400" b="1" dirty="0">
+                <a:solidFill>
+                  <a:srgbClr val="3D3935"/>
+                </a:solidFill>
+                <a:latin typeface="Consolas" pitchFamily="34" charset="0"/>
+                <a:ea typeface="Consolas" pitchFamily="34" charset="-122"/>
+                <a:cs typeface="Consolas" pitchFamily="34" charset="-120"/>
+              </a:rPr>
+              <a:t>+886-7-3391888</a:t>
+            </a:r>
+            <a:endParaRPr lang="en-US" sz="1400" dirty="0"/>
+          </a:p>
+        </p:txBody>
+      </p:sp>
+      <p:pic>
+        <p:nvPicPr>
+          <p:cNvPr id="15" name="Image 3" descr="preencoded.png"/>
+          <p:cNvPicPr>
+            <a:picLocks noChangeAspect="1"/>
+          </p:cNvPicPr>
+          <p:nvPr/>
+        </p:nvPicPr>
+        <p:blipFill>
+          <a:blip r:embed="rId6"/>
+          <a:stretch>
+            <a:fillRect/>
+          </a:stretch>
+        </p:blipFill>
+        <p:spPr>
+          <a:xfrm>
             <a:off x="777240" y="3520440"/>
             <a:ext cx="365760" cy="365760"/>
           </a:xfrm>
@@ -10345,11 +10058,11 @@
           <a:bodyPr wrap="square" lIns="0" tIns="0" rIns="0" bIns="0" rtlCol="0" anchor="ctr"/>
           <a:lstStyle/>
           <a:p>
-            <a:pPr indent="0" marL="0">
-              <a:buNone/>
-            </a:pPr>
-            <a:r>
-              <a:rPr lang="en-US" sz="1000" spc="200" kern="0" dirty="0">
+            <a:pPr marL="0" indent="0">
+              <a:buNone/>
+            </a:pPr>
+            <a:r>
+              <a:rPr lang="en-US" sz="1000" kern="0" spc="200" dirty="0">
                 <a:solidFill>
                   <a:srgbClr val="CEB4A9"/>
                 </a:solidFill>
@@ -10381,7 +10094,7 @@
           <a:bodyPr wrap="square" lIns="0" tIns="0" rIns="0" bIns="0" rtlCol="0" anchor="ctr"/>
           <a:lstStyle/>
           <a:p>
-            <a:pPr indent="0" marL="0">
+            <a:pPr marL="0" indent="0">
               <a:buNone/>
             </a:pPr>
             <a:r>
@@ -10417,7 +10130,7 @@
           <a:bodyPr wrap="square" lIns="0" tIns="0" rIns="0" bIns="0" rtlCol="0" anchor="ctr"/>
           <a:lstStyle/>
           <a:p>
-            <a:pPr indent="0" marL="0">
+            <a:pPr marL="0" indent="0">
               <a:buNone/>
             </a:pPr>
             <a:r>
@@ -10478,11 +10191,11 @@
           <a:bodyPr wrap="square" lIns="0" tIns="0" rIns="0" bIns="0" rtlCol="0" anchor="ctr"/>
           <a:lstStyle/>
           <a:p>
-            <a:pPr indent="0" marL="0">
-              <a:buNone/>
-            </a:pPr>
-            <a:r>
-              <a:rPr lang="en-US" sz="1100" b="1" spc="200" kern="0" dirty="0">
+            <a:pPr marL="0" indent="0">
+              <a:buNone/>
+            </a:pPr>
+            <a:r>
+              <a:rPr lang="en-US" sz="1100" b="1" kern="0" spc="200" dirty="0">
                 <a:solidFill>
                   <a:srgbClr val="CEB4A9"/>
                 </a:solidFill>
@@ -10514,7 +10227,7 @@
           <a:bodyPr wrap="square" lIns="0" tIns="0" rIns="0" bIns="0" rtlCol="0" anchor="ctr"/>
           <a:lstStyle/>
           <a:p>
-            <a:pPr indent="0" marL="0">
+            <a:pPr marL="0" indent="0">
               <a:buNone/>
             </a:pPr>
             <a:r>
@@ -10550,7 +10263,7 @@
           <a:bodyPr wrap="square" lIns="0" tIns="0" rIns="0" bIns="0" rtlCol="0" anchor="ctr"/>
           <a:lstStyle/>
           <a:p>
-            <a:pPr indent="0" marL="0">
+            <a:pPr marL="0" indent="0">
               <a:buNone/>
             </a:pPr>
             <a:r>
@@ -10586,7 +10299,7 @@
           <a:bodyPr wrap="square" lIns="0" tIns="0" rIns="0" bIns="0" rtlCol="0" anchor="ctr"/>
           <a:lstStyle/>
           <a:p>
-            <a:pPr indent="0" marL="0">
+            <a:pPr marL="0" indent="0">
               <a:buNone/>
             </a:pPr>
             <a:r>
@@ -10622,7 +10335,7 @@
           <a:bodyPr wrap="square" lIns="0" tIns="0" rIns="0" bIns="0" rtlCol="0" anchor="ctr"/>
           <a:lstStyle/>
           <a:p>
-            <a:pPr indent="0" marL="0">
+            <a:pPr marL="0" indent="0">
               <a:buNone/>
             </a:pPr>
             <a:r>
@@ -10658,7 +10371,7 @@
           <a:bodyPr wrap="square" lIns="0" tIns="0" rIns="0" bIns="0" rtlCol="0" anchor="ctr"/>
           <a:lstStyle/>
           <a:p>
-            <a:pPr indent="0" marL="0">
+            <a:pPr marL="0" indent="0">
               <a:buNone/>
             </a:pPr>
             <a:r>
@@ -10694,7 +10407,7 @@
           <a:bodyPr wrap="square" lIns="0" tIns="0" rIns="0" bIns="0" rtlCol="0" anchor="ctr"/>
           <a:lstStyle/>
           <a:p>
-            <a:pPr indent="0" marL="0">
+            <a:pPr marL="0" indent="0">
               <a:buNone/>
             </a:pPr>
             <a:r>
@@ -10730,7 +10443,7 @@
           <a:bodyPr wrap="square" lIns="0" tIns="0" rIns="0" bIns="0" rtlCol="0" anchor="ctr"/>
           <a:lstStyle/>
           <a:p>
-            <a:pPr indent="0" marL="0">
+            <a:pPr marL="0" indent="0">
               <a:buNone/>
             </a:pPr>
             <a:r>
@@ -10766,7 +10479,7 @@
           <a:bodyPr wrap="square" lIns="0" tIns="0" rIns="0" bIns="0" rtlCol="0" anchor="ctr"/>
           <a:lstStyle/>
           <a:p>
-            <a:pPr indent="0" marL="0">
+            <a:pPr marL="0" indent="0">
               <a:buNone/>
             </a:pPr>
             <a:r>
@@ -10802,7 +10515,7 @@
           <a:bodyPr wrap="square" lIns="0" tIns="0" rIns="0" bIns="0" rtlCol="0" anchor="ctr"/>
           <a:lstStyle/>
           <a:p>
-            <a:pPr indent="0" marL="0">
+            <a:pPr marL="0" indent="0">
               <a:buNone/>
             </a:pPr>
             <a:r>
@@ -10841,7 +10554,7 @@
             <a:prstDash val="solid"/>
           </a:ln>
           <a:effectLst>
-            <a:outerShdw sx="100000" sy="100000" kx="0" ky="0" algn="bl" rotWithShape="0" blurRad="101600" dist="25400" dir="5400000">
+            <a:outerShdw blurRad="101600" dist="25400" dir="5400000" algn="bl" rotWithShape="0">
               <a:srgbClr val="000000">
                 <a:alpha val="6000"/>
               </a:srgbClr>
@@ -10890,11 +10603,11 @@
           <a:bodyPr wrap="square" lIns="0" tIns="0" rIns="0" bIns="0" rtlCol="0" anchor="ctr"/>
           <a:lstStyle/>
           <a:p>
-            <a:pPr algn="ctr" indent="0" marL="0">
-              <a:buNone/>
-            </a:pPr>
-            <a:r>
-              <a:rPr lang="en-US" sz="1100" b="1" spc="200" kern="0" dirty="0">
+            <a:pPr marL="0" indent="0" algn="ctr">
+              <a:buNone/>
+            </a:pPr>
+            <a:r>
+              <a:rPr lang="en-US" sz="1100" b="1" kern="0" spc="200" dirty="0">
                 <a:solidFill>
                   <a:srgbClr val="CEB4A9"/>
                 </a:solidFill>
@@ -10907,14 +10620,14 @@
       </p:sp>
       <p:pic>
         <p:nvPicPr>
-          <p:cNvPr id="33" name="Image 4" descr="preencoded.png">    </p:cNvPr>
+          <p:cNvPr id="33" name="Image 4" descr="preencoded.png"/>
           <p:cNvPicPr>
             <a:picLocks noChangeAspect="1"/>
           </p:cNvPicPr>
           <p:nvPr/>
         </p:nvPicPr>
         <p:blipFill>
-          <a:blip r:embed="rId5"/>
+          <a:blip r:embed="rId7"/>
           <a:stretch>
             <a:fillRect/>
           </a:stretch>
@@ -10975,11 +10688,11 @@
           <a:bodyPr wrap="square" lIns="0" tIns="0" rIns="0" bIns="0" rtlCol="0" anchor="ctr"/>
           <a:lstStyle/>
           <a:p>
-            <a:pPr algn="ctr" indent="0" marL="0">
-              <a:buNone/>
-            </a:pPr>
-            <a:r>
-              <a:rPr lang="en-US" sz="900" spc="200" kern="0" dirty="0">
+            <a:pPr marL="0" indent="0" algn="ctr">
+              <a:buNone/>
+            </a:pPr>
+            <a:r>
+              <a:rPr lang="en-US" sz="900" kern="0" spc="200" dirty="0">
                 <a:solidFill>
                   <a:srgbClr val="CEB4A9"/>
                 </a:solidFill>
@@ -11011,7 +10724,7 @@
           <a:bodyPr wrap="square" lIns="0" tIns="0" rIns="0" bIns="0" rtlCol="0" anchor="ctr"/>
           <a:lstStyle/>
           <a:p>
-            <a:pPr algn="ctr" indent="0" marL="0">
+            <a:pPr marL="0" indent="0" algn="ctr">
               <a:buNone/>
             </a:pPr>
             <a:r>
@@ -11047,7 +10760,7 @@
           <a:bodyPr wrap="square" lIns="0" tIns="0" rIns="0" bIns="0" rtlCol="0" anchor="ctr"/>
           <a:lstStyle/>
           <a:p>
-            <a:pPr algn="r" indent="0" marL="0">
+            <a:pPr marL="0" indent="0" algn="r">
               <a:buNone/>
             </a:pPr>
             <a:r>
@@ -11086,7 +10799,7 @@
           <a:bodyPr wrap="square" lIns="0" tIns="0" rIns="0" bIns="0" rtlCol="0" anchor="ctr"/>
           <a:lstStyle/>
           <a:p>
-            <a:pPr indent="0" marL="0">
+            <a:pPr marL="0" indent="0">
               <a:buNone/>
             </a:pPr>
             <a:r>
@@ -11117,6 +10830,7 @@
         <a:solidFill>
           <a:srgbClr val="FFFFFF"/>
         </a:solidFill>
+        <a:effectLst/>
       </p:bgPr>
     </p:bg>
     <p:spTree>
@@ -11154,7 +10868,7 @@
           <a:bodyPr wrap="square" lIns="0" tIns="0" rIns="0" bIns="0" rtlCol="0" anchor="ctr"/>
           <a:lstStyle/>
           <a:p>
-            <a:pPr indent="0" marL="0">
+            <a:pPr marL="0" indent="0">
               <a:buNone/>
             </a:pPr>
             <a:r>
@@ -11193,11 +10907,11 @@
           <a:bodyPr wrap="square" lIns="0" tIns="0" rIns="0" bIns="0" rtlCol="0" anchor="ctr"/>
           <a:lstStyle/>
           <a:p>
-            <a:pPr indent="0" marL="0">
-              <a:buNone/>
-            </a:pPr>
-            <a:r>
-              <a:rPr lang="en-US" sz="1300" i="1" spc="200" kern="0" dirty="0">
+            <a:pPr marL="0" indent="0">
+              <a:buNone/>
+            </a:pPr>
+            <a:r>
+              <a:rPr lang="en-US" sz="1300" i="1" kern="0" spc="200" dirty="0">
                 <a:solidFill>
                   <a:srgbClr val="686869"/>
                 </a:solidFill>
@@ -11254,7 +10968,7 @@
           <a:bodyPr wrap="square" lIns="0" tIns="0" rIns="0" bIns="0" rtlCol="0" anchor="ctr"/>
           <a:lstStyle/>
           <a:p>
-            <a:pPr indent="0" marL="0">
+            <a:pPr marL="0" indent="0">
               <a:buNone/>
             </a:pPr>
             <a:r>
@@ -11290,7 +11004,7 @@
           <a:bodyPr wrap="square" lIns="0" tIns="0" rIns="0" bIns="0" rtlCol="0" anchor="ctr"/>
           <a:lstStyle/>
           <a:p>
-            <a:pPr indent="0" marL="0">
+            <a:pPr marL="0" indent="0">
               <a:buNone/>
             </a:pPr>
             <a:r>
@@ -11346,11 +11060,11 @@
           <a:bodyPr wrap="square" lIns="0" tIns="0" rIns="0" bIns="0" rtlCol="0" anchor="ctr"/>
           <a:lstStyle/>
           <a:p>
-            <a:pPr indent="0" marL="0">
-              <a:buNone/>
-            </a:pPr>
-            <a:r>
-              <a:rPr lang="en-US" sz="1100" b="1" spc="200" kern="0" dirty="0">
+            <a:pPr marL="0" indent="0">
+              <a:buNone/>
+            </a:pPr>
+            <a:r>
+              <a:rPr lang="en-US" sz="1100" b="1" kern="0" spc="200" dirty="0">
                 <a:solidFill>
                   <a:srgbClr val="CEB4A9"/>
                 </a:solidFill>
@@ -11382,7 +11096,7 @@
           <a:bodyPr wrap="square" lIns="0" tIns="0" rIns="0" bIns="0" rtlCol="0" anchor="ctr"/>
           <a:lstStyle/>
           <a:p>
-            <a:pPr indent="0" marL="0">
+            <a:pPr marL="0" indent="0">
               <a:buNone/>
             </a:pPr>
             <a:r>
@@ -11418,11 +11132,11 @@
           <a:bodyPr wrap="square" lIns="0" tIns="0" rIns="0" bIns="0" rtlCol="0" anchor="ctr"/>
           <a:lstStyle/>
           <a:p>
-            <a:pPr indent="0" marL="0">
-              <a:buNone/>
-            </a:pPr>
-            <a:r>
-              <a:rPr lang="en-US" sz="1100" b="1" spc="200" kern="0" dirty="0">
+            <a:pPr marL="0" indent="0">
+              <a:buNone/>
+            </a:pPr>
+            <a:r>
+              <a:rPr lang="en-US" sz="1100" b="1" kern="0" spc="200" dirty="0">
                 <a:solidFill>
                   <a:srgbClr val="CEB4A9"/>
                 </a:solidFill>
@@ -11474,7 +11188,7 @@
           <a:bodyPr wrap="square" lIns="0" tIns="0" rIns="0" bIns="0" rtlCol="0" anchor="ctr"/>
           <a:lstStyle/>
           <a:p>
-            <a:pPr indent="0" marL="0">
+            <a:pPr marL="0" indent="0">
               <a:buNone/>
             </a:pPr>
             <a:r>
@@ -11510,7 +11224,7 @@
           <a:bodyPr wrap="square" lIns="0" tIns="0" rIns="0" bIns="0" rtlCol="0" anchor="ctr"/>
           <a:lstStyle/>
           <a:p>
-            <a:pPr indent="0" marL="0">
+            <a:pPr marL="0" indent="0">
               <a:buNone/>
             </a:pPr>
             <a:r>
@@ -11546,7 +11260,7 @@
           <a:bodyPr wrap="square" lIns="0" tIns="0" rIns="0" bIns="0" rtlCol="0" anchor="ctr"/>
           <a:lstStyle/>
           <a:p>
-            <a:pPr indent="0" marL="0">
+            <a:pPr marL="0" indent="0">
               <a:buNone/>
             </a:pPr>
             <a:r>
@@ -11602,7 +11316,7 @@
           <a:bodyPr wrap="square" lIns="0" tIns="0" rIns="0" bIns="0" rtlCol="0" anchor="ctr"/>
           <a:lstStyle/>
           <a:p>
-            <a:pPr indent="0" marL="0">
+            <a:pPr marL="0" indent="0">
               <a:buNone/>
             </a:pPr>
             <a:r>
@@ -11638,7 +11352,7 @@
           <a:bodyPr wrap="square" lIns="0" tIns="0" rIns="0" bIns="0" rtlCol="0" anchor="ctr"/>
           <a:lstStyle/>
           <a:p>
-            <a:pPr indent="0" marL="0">
+            <a:pPr marL="0" indent="0">
               <a:buNone/>
             </a:pPr>
             <a:r>
@@ -11674,7 +11388,7 @@
           <a:bodyPr wrap="square" lIns="0" tIns="0" rIns="0" bIns="0" rtlCol="0" anchor="ctr"/>
           <a:lstStyle/>
           <a:p>
-            <a:pPr indent="0" marL="0">
+            <a:pPr marL="0" indent="0">
               <a:buNone/>
             </a:pPr>
             <a:r>
@@ -11730,7 +11444,7 @@
           <a:bodyPr wrap="square" lIns="0" tIns="0" rIns="0" bIns="0" rtlCol="0" anchor="ctr"/>
           <a:lstStyle/>
           <a:p>
-            <a:pPr indent="0" marL="0">
+            <a:pPr marL="0" indent="0">
               <a:buNone/>
             </a:pPr>
             <a:r>
@@ -11766,7 +11480,7 @@
           <a:bodyPr wrap="square" lIns="0" tIns="0" rIns="0" bIns="0" rtlCol="0" anchor="ctr"/>
           <a:lstStyle/>
           <a:p>
-            <a:pPr indent="0" marL="0">
+            <a:pPr marL="0" indent="0">
               <a:buNone/>
             </a:pPr>
             <a:r>
@@ -11802,7 +11516,7 @@
           <a:bodyPr wrap="square" lIns="0" tIns="0" rIns="0" bIns="0" rtlCol="0" anchor="ctr"/>
           <a:lstStyle/>
           <a:p>
-            <a:pPr indent="0" marL="0">
+            <a:pPr marL="0" indent="0">
               <a:buNone/>
             </a:pPr>
             <a:r>
@@ -11858,7 +11572,7 @@
           <a:bodyPr wrap="square" lIns="0" tIns="0" rIns="0" bIns="0" rtlCol="0" anchor="ctr"/>
           <a:lstStyle/>
           <a:p>
-            <a:pPr indent="0" marL="0">
+            <a:pPr marL="0" indent="0">
               <a:buNone/>
             </a:pPr>
             <a:r>
@@ -11894,7 +11608,7 @@
           <a:bodyPr wrap="square" lIns="0" tIns="0" rIns="0" bIns="0" rtlCol="0" anchor="ctr"/>
           <a:lstStyle/>
           <a:p>
-            <a:pPr indent="0" marL="0">
+            <a:pPr marL="0" indent="0">
               <a:buNone/>
             </a:pPr>
             <a:r>
@@ -11930,7 +11644,7 @@
           <a:bodyPr wrap="square" lIns="0" tIns="0" rIns="0" bIns="0" rtlCol="0" anchor="ctr"/>
           <a:lstStyle/>
           <a:p>
-            <a:pPr indent="0" marL="0">
+            <a:pPr marL="0" indent="0">
               <a:buNone/>
             </a:pPr>
             <a:r>
@@ -11986,7 +11700,7 @@
           <a:bodyPr wrap="square" lIns="0" tIns="0" rIns="0" bIns="0" rtlCol="0" anchor="ctr"/>
           <a:lstStyle/>
           <a:p>
-            <a:pPr indent="0" marL="0">
+            <a:pPr marL="0" indent="0">
               <a:buNone/>
             </a:pPr>
             <a:r>
@@ -12022,7 +11736,7 @@
           <a:bodyPr wrap="square" lIns="0" tIns="0" rIns="0" bIns="0" rtlCol="0" anchor="ctr"/>
           <a:lstStyle/>
           <a:p>
-            <a:pPr indent="0" marL="0">
+            <a:pPr marL="0" indent="0">
               <a:buNone/>
             </a:pPr>
             <a:r>
@@ -12058,7 +11772,7 @@
           <a:bodyPr wrap="square" lIns="0" tIns="0" rIns="0" bIns="0" rtlCol="0" anchor="ctr"/>
           <a:lstStyle/>
           <a:p>
-            <a:pPr indent="0" marL="0">
+            <a:pPr marL="0" indent="0">
               <a:buNone/>
             </a:pPr>
             <a:r>
@@ -12114,7 +11828,7 @@
           <a:bodyPr wrap="square" lIns="0" tIns="0" rIns="0" bIns="0" rtlCol="0" anchor="ctr"/>
           <a:lstStyle/>
           <a:p>
-            <a:pPr indent="0" marL="0">
+            <a:pPr marL="0" indent="0">
               <a:buNone/>
             </a:pPr>
             <a:r>
@@ -12150,7 +11864,7 @@
           <a:bodyPr wrap="square" lIns="0" tIns="0" rIns="0" bIns="0" rtlCol="0" anchor="ctr"/>
           <a:lstStyle/>
           <a:p>
-            <a:pPr indent="0" marL="0">
+            <a:pPr marL="0" indent="0">
               <a:buNone/>
             </a:pPr>
             <a:r>
@@ -12186,7 +11900,7 @@
           <a:bodyPr wrap="square" lIns="0" tIns="0" rIns="0" bIns="0" rtlCol="0" anchor="ctr"/>
           <a:lstStyle/>
           <a:p>
-            <a:pPr indent="0" marL="0">
+            <a:pPr marL="0" indent="0">
               <a:buNone/>
             </a:pPr>
             <a:r>
@@ -12242,7 +11956,7 @@
           <a:bodyPr wrap="square" lIns="0" tIns="0" rIns="0" bIns="0" rtlCol="0" anchor="ctr"/>
           <a:lstStyle/>
           <a:p>
-            <a:pPr indent="0" marL="0">
+            <a:pPr marL="0" indent="0">
               <a:buNone/>
             </a:pPr>
             <a:r>
@@ -12278,7 +11992,7 @@
           <a:bodyPr wrap="square" lIns="0" tIns="0" rIns="0" bIns="0" rtlCol="0" anchor="ctr"/>
           <a:lstStyle/>
           <a:p>
-            <a:pPr indent="0" marL="0">
+            <a:pPr marL="0" indent="0">
               <a:buNone/>
             </a:pPr>
             <a:r>
@@ -12314,7 +12028,7 @@
           <a:bodyPr wrap="square" lIns="0" tIns="0" rIns="0" bIns="0" rtlCol="0" anchor="ctr"/>
           <a:lstStyle/>
           <a:p>
-            <a:pPr indent="0" marL="0">
+            <a:pPr marL="0" indent="0">
               <a:buNone/>
             </a:pPr>
             <a:r>
@@ -12370,7 +12084,7 @@
           <a:bodyPr wrap="square" lIns="0" tIns="0" rIns="0" bIns="0" rtlCol="0" anchor="ctr"/>
           <a:lstStyle/>
           <a:p>
-            <a:pPr indent="0" marL="0">
+            <a:pPr marL="0" indent="0">
               <a:buNone/>
             </a:pPr>
             <a:r>
@@ -12406,7 +12120,7 @@
           <a:bodyPr wrap="square" lIns="0" tIns="0" rIns="0" bIns="0" rtlCol="0" anchor="ctr"/>
           <a:lstStyle/>
           <a:p>
-            <a:pPr indent="0" marL="0">
+            <a:pPr marL="0" indent="0">
               <a:buNone/>
             </a:pPr>
             <a:r>
@@ -12442,7 +12156,7 @@
           <a:bodyPr wrap="square" lIns="0" tIns="0" rIns="0" bIns="0" rtlCol="0" anchor="ctr"/>
           <a:lstStyle/>
           <a:p>
-            <a:pPr indent="0" marL="0">
+            <a:pPr marL="0" indent="0">
               <a:buNone/>
             </a:pPr>
             <a:r>
@@ -12498,7 +12212,7 @@
           <a:bodyPr wrap="square" lIns="0" tIns="0" rIns="0" bIns="0" rtlCol="0" anchor="ctr"/>
           <a:lstStyle/>
           <a:p>
-            <a:pPr indent="0" marL="0">
+            <a:pPr marL="0" indent="0">
               <a:buNone/>
             </a:pPr>
             <a:r>
@@ -12534,7 +12248,7 @@
           <a:bodyPr wrap="square" lIns="0" tIns="0" rIns="0" bIns="0" rtlCol="0" anchor="ctr"/>
           <a:lstStyle/>
           <a:p>
-            <a:pPr indent="0" marL="0">
+            <a:pPr marL="0" indent="0">
               <a:buNone/>
             </a:pPr>
             <a:r>
@@ -12570,7 +12284,7 @@
           <a:bodyPr wrap="square" lIns="0" tIns="0" rIns="0" bIns="0" rtlCol="0" anchor="ctr"/>
           <a:lstStyle/>
           <a:p>
-            <a:pPr indent="0" marL="0">
+            <a:pPr marL="0" indent="0">
               <a:buNone/>
             </a:pPr>
             <a:r>
@@ -12626,7 +12340,7 @@
           <a:bodyPr wrap="square" lIns="0" tIns="0" rIns="0" bIns="0" rtlCol="0" anchor="ctr"/>
           <a:lstStyle/>
           <a:p>
-            <a:pPr indent="0" marL="0">
+            <a:pPr marL="0" indent="0">
               <a:buNone/>
             </a:pPr>
             <a:r>
@@ -12662,7 +12376,7 @@
           <a:bodyPr wrap="square" lIns="0" tIns="0" rIns="0" bIns="0" rtlCol="0" anchor="ctr"/>
           <a:lstStyle/>
           <a:p>
-            <a:pPr indent="0" marL="0">
+            <a:pPr marL="0" indent="0">
               <a:buNone/>
             </a:pPr>
             <a:r>
@@ -12698,7 +12412,7 @@
           <a:bodyPr wrap="square" lIns="0" tIns="0" rIns="0" bIns="0" rtlCol="0" anchor="ctr"/>
           <a:lstStyle/>
           <a:p>
-            <a:pPr indent="0" marL="0">
+            <a:pPr marL="0" indent="0">
               <a:buNone/>
             </a:pPr>
             <a:r>
@@ -12734,7 +12448,7 @@
           <a:bodyPr wrap="square" lIns="0" tIns="0" rIns="0" bIns="0" rtlCol="0" anchor="ctr"/>
           <a:lstStyle/>
           <a:p>
-            <a:pPr algn="r" indent="0" marL="0">
+            <a:pPr marL="0" indent="0" algn="r">
               <a:buNone/>
             </a:pPr>
             <a:r>
@@ -12773,7 +12487,7 @@
           <a:bodyPr wrap="square" lIns="0" tIns="0" rIns="0" bIns="0" rtlCol="0" anchor="ctr"/>
           <a:lstStyle/>
           <a:p>
-            <a:pPr indent="0" marL="0">
+            <a:pPr marL="0" indent="0">
               <a:buNone/>
             </a:pPr>
             <a:r>
@@ -12804,6 +12518,7 @@
         <a:solidFill>
           <a:srgbClr val="FFFFFF"/>
         </a:solidFill>
+        <a:effectLst/>
       </p:bgPr>
     </p:bg>
     <p:spTree>
@@ -12841,7 +12556,7 @@
           <a:bodyPr wrap="square" lIns="0" tIns="0" rIns="0" bIns="0" rtlCol="0" anchor="ctr"/>
           <a:lstStyle/>
           <a:p>
-            <a:pPr indent="0" marL="0">
+            <a:pPr marL="0" indent="0">
               <a:buNone/>
             </a:pPr>
             <a:r>
@@ -12880,11 +12595,11 @@
           <a:bodyPr wrap="square" lIns="0" tIns="0" rIns="0" bIns="0" rtlCol="0" anchor="ctr"/>
           <a:lstStyle/>
           <a:p>
-            <a:pPr indent="0" marL="0">
-              <a:buNone/>
-            </a:pPr>
-            <a:r>
-              <a:rPr lang="en-US" sz="1300" i="1" spc="200" kern="0" dirty="0">
+            <a:pPr marL="0" indent="0">
+              <a:buNone/>
+            </a:pPr>
+            <a:r>
+              <a:rPr lang="en-US" sz="1300" i="1" kern="0" spc="200" dirty="0">
                 <a:solidFill>
                   <a:srgbClr val="686869"/>
                 </a:solidFill>
@@ -12944,7 +12659,7 @@
             <a:prstDash val="solid"/>
           </a:ln>
           <a:effectLst>
-            <a:outerShdw sx="100000" sy="100000" kx="0" ky="0" algn="bl" rotWithShape="0" blurRad="101600" dist="25400" dir="5400000">
+            <a:outerShdw blurRad="101600" dist="25400" dir="5400000" algn="bl" rotWithShape="0">
               <a:srgbClr val="000000">
                 <a:alpha val="6000"/>
               </a:srgbClr>
@@ -12954,14 +12669,14 @@
       </p:sp>
       <p:pic>
         <p:nvPicPr>
-          <p:cNvPr id="6" name="Image 0" descr="preencoded.png">    </p:cNvPr>
+          <p:cNvPr id="6" name="Image 0" descr="preencoded.png"/>
           <p:cNvPicPr>
             <a:picLocks noChangeAspect="1"/>
           </p:cNvPicPr>
           <p:nvPr/>
         </p:nvPicPr>
         <p:blipFill>
-          <a:blip r:embed="rId1"/>
+          <a:blip r:embed="rId3"/>
           <a:stretch>
             <a:fillRect/>
           </a:stretch>
@@ -12997,7 +12712,7 @@
           <a:bodyPr wrap="square" lIns="0" tIns="0" rIns="0" bIns="0" rtlCol="0" anchor="ctr"/>
           <a:lstStyle/>
           <a:p>
-            <a:pPr indent="0" marL="0">
+            <a:pPr marL="0" indent="0">
               <a:buNone/>
             </a:pPr>
             <a:r>
@@ -13033,7 +12748,7 @@
           <a:bodyPr wrap="square" lIns="0" tIns="0" rIns="0" bIns="0" rtlCol="0" anchor="ctr"/>
           <a:lstStyle/>
           <a:p>
-            <a:pPr indent="0" marL="0">
+            <a:pPr marL="0" indent="0">
               <a:buNone/>
             </a:pPr>
             <a:r>
@@ -13089,7 +12804,7 @@
           <a:bodyPr wrap="square" lIns="0" tIns="0" rIns="0" bIns="0" rtlCol="0" anchor="ctr"/>
           <a:lstStyle/>
           <a:p>
-            <a:pPr algn="ctr" indent="0" marL="0">
+            <a:pPr marL="0" indent="0" algn="ctr">
               <a:buNone/>
             </a:pPr>
             <a:r>
@@ -13128,7 +12843,7 @@
           <a:bodyPr wrap="square" lIns="0" tIns="0" rIns="0" bIns="0" rtlCol="0" anchor="ctr"/>
           <a:lstStyle/>
           <a:p>
-            <a:pPr indent="0" marL="0">
+            <a:pPr marL="0" indent="0">
               <a:buNone/>
             </a:pPr>
             <a:r>
@@ -13164,7 +12879,7 @@
           <a:bodyPr wrap="square" lIns="0" tIns="0" rIns="0" bIns="0" rtlCol="0" anchor="ctr"/>
           <a:lstStyle/>
           <a:p>
-            <a:pPr indent="0" marL="0">
+            <a:pPr marL="0" indent="0">
               <a:buNone/>
             </a:pPr>
             <a:r>
@@ -13220,7 +12935,7 @@
           <a:bodyPr wrap="square" lIns="0" tIns="0" rIns="0" bIns="0" rtlCol="0" anchor="ctr"/>
           <a:lstStyle/>
           <a:p>
-            <a:pPr algn="ctr" indent="0" marL="0">
+            <a:pPr marL="0" indent="0" algn="ctr">
               <a:buNone/>
             </a:pPr>
             <a:r>
@@ -13259,7 +12974,7 @@
           <a:bodyPr wrap="square" lIns="0" tIns="0" rIns="0" bIns="0" rtlCol="0" anchor="ctr"/>
           <a:lstStyle/>
           <a:p>
-            <a:pPr indent="0" marL="0">
+            <a:pPr marL="0" indent="0">
               <a:buNone/>
             </a:pPr>
             <a:r>
@@ -13295,7 +13010,7 @@
           <a:bodyPr wrap="square" lIns="0" tIns="0" rIns="0" bIns="0" rtlCol="0" anchor="ctr"/>
           <a:lstStyle/>
           <a:p>
-            <a:pPr indent="0" marL="0">
+            <a:pPr marL="0" indent="0">
               <a:buNone/>
             </a:pPr>
             <a:r>
@@ -13351,7 +13066,7 @@
           <a:bodyPr wrap="square" lIns="0" tIns="0" rIns="0" bIns="0" rtlCol="0" anchor="ctr"/>
           <a:lstStyle/>
           <a:p>
-            <a:pPr algn="ctr" indent="0" marL="0">
+            <a:pPr marL="0" indent="0" algn="ctr">
               <a:buNone/>
             </a:pPr>
             <a:r>
@@ -13390,7 +13105,7 @@
           <a:bodyPr wrap="square" lIns="0" tIns="0" rIns="0" bIns="0" rtlCol="0" anchor="ctr"/>
           <a:lstStyle/>
           <a:p>
-            <a:pPr indent="0" marL="0">
+            <a:pPr marL="0" indent="0">
               <a:buNone/>
             </a:pPr>
             <a:r>
@@ -13426,7 +13141,7 @@
           <a:bodyPr wrap="square" lIns="0" tIns="0" rIns="0" bIns="0" rtlCol="0" anchor="ctr"/>
           <a:lstStyle/>
           <a:p>
-            <a:pPr indent="0" marL="0">
+            <a:pPr marL="0" indent="0">
               <a:buNone/>
             </a:pPr>
             <a:r>
@@ -13482,7 +13197,7 @@
           <a:bodyPr wrap="square" lIns="0" tIns="0" rIns="0" bIns="0" rtlCol="0" anchor="ctr"/>
           <a:lstStyle/>
           <a:p>
-            <a:pPr algn="ctr" indent="0" marL="0">
+            <a:pPr marL="0" indent="0" algn="ctr">
               <a:buNone/>
             </a:pPr>
             <a:r>
@@ -13521,7 +13236,7 @@
           <a:bodyPr wrap="square" lIns="0" tIns="0" rIns="0" bIns="0" rtlCol="0" anchor="ctr"/>
           <a:lstStyle/>
           <a:p>
-            <a:pPr indent="0" marL="0">
+            <a:pPr marL="0" indent="0">
               <a:buNone/>
             </a:pPr>
             <a:r>
@@ -13557,7 +13272,7 @@
           <a:bodyPr wrap="square" lIns="0" tIns="0" rIns="0" bIns="0" rtlCol="0" anchor="ctr"/>
           <a:lstStyle/>
           <a:p>
-            <a:pPr indent="0" marL="0">
+            <a:pPr marL="0" indent="0">
               <a:buNone/>
             </a:pPr>
             <a:r>
@@ -13596,7 +13311,7 @@
             <a:prstDash val="solid"/>
           </a:ln>
           <a:effectLst>
-            <a:outerShdw sx="100000" sy="100000" kx="0" ky="0" algn="bl" rotWithShape="0" blurRad="101600" dist="25400" dir="5400000">
+            <a:outerShdw blurRad="101600" dist="25400" dir="5400000" algn="bl" rotWithShape="0">
               <a:srgbClr val="000000">
                 <a:alpha val="6000"/>
               </a:srgbClr>
@@ -13606,14 +13321,14 @@
       </p:sp>
       <p:pic>
         <p:nvPicPr>
-          <p:cNvPr id="26" name="Image 1" descr="preencoded.png">    </p:cNvPr>
+          <p:cNvPr id="26" name="Image 1" descr="preencoded.png"/>
           <p:cNvPicPr>
             <a:picLocks noChangeAspect="1"/>
           </p:cNvPicPr>
           <p:nvPr/>
         </p:nvPicPr>
         <p:blipFill>
-          <a:blip r:embed="rId2"/>
+          <a:blip r:embed="rId4"/>
           <a:stretch>
             <a:fillRect/>
           </a:stretch>
@@ -13649,7 +13364,7 @@
           <a:bodyPr wrap="square" lIns="0" tIns="0" rIns="0" bIns="0" rtlCol="0" anchor="ctr"/>
           <a:lstStyle/>
           <a:p>
-            <a:pPr indent="0" marL="0">
+            <a:pPr marL="0" indent="0">
               <a:buNone/>
             </a:pPr>
             <a:r>
@@ -13685,7 +13400,7 @@
           <a:bodyPr wrap="square" lIns="0" tIns="0" rIns="0" bIns="0" rtlCol="0" anchor="ctr"/>
           <a:lstStyle/>
           <a:p>
-            <a:pPr indent="0" marL="0">
+            <a:pPr marL="0" indent="0">
               <a:buNone/>
             </a:pPr>
             <a:r>
@@ -13721,7 +13436,7 @@
           <a:bodyPr wrap="square" lIns="0" tIns="0" rIns="0" bIns="0" rtlCol="0" anchor="ctr"/>
           <a:lstStyle/>
           <a:p>
-            <a:pPr algn="ctr" indent="0" marL="0">
+            <a:pPr marL="0" indent="0" algn="ctr">
               <a:buNone/>
             </a:pPr>
             <a:r>
@@ -13757,7 +13472,7 @@
           <a:bodyPr wrap="square" lIns="0" tIns="0" rIns="0" bIns="0" rtlCol="0" anchor="ctr"/>
           <a:lstStyle/>
           <a:p>
-            <a:pPr indent="0" marL="0">
+            <a:pPr marL="0" indent="0">
               <a:buNone/>
             </a:pPr>
             <a:r>
@@ -13793,7 +13508,7 @@
           <a:bodyPr wrap="square" lIns="0" tIns="0" rIns="0" bIns="0" rtlCol="0" anchor="ctr"/>
           <a:lstStyle/>
           <a:p>
-            <a:pPr indent="0" marL="0">
+            <a:pPr marL="0" indent="0">
               <a:buNone/>
             </a:pPr>
             <a:r>
@@ -13829,7 +13544,7 @@
           <a:bodyPr wrap="square" lIns="0" tIns="0" rIns="0" bIns="0" rtlCol="0" anchor="ctr"/>
           <a:lstStyle/>
           <a:p>
-            <a:pPr algn="ctr" indent="0" marL="0">
+            <a:pPr marL="0" indent="0" algn="ctr">
               <a:buNone/>
             </a:pPr>
             <a:r>
@@ -13865,7 +13580,7 @@
           <a:bodyPr wrap="square" lIns="0" tIns="0" rIns="0" bIns="0" rtlCol="0" anchor="ctr"/>
           <a:lstStyle/>
           <a:p>
-            <a:pPr indent="0" marL="0">
+            <a:pPr marL="0" indent="0">
               <a:buNone/>
             </a:pPr>
             <a:r>
@@ -13901,7 +13616,7 @@
           <a:bodyPr wrap="square" lIns="0" tIns="0" rIns="0" bIns="0" rtlCol="0" anchor="ctr"/>
           <a:lstStyle/>
           <a:p>
-            <a:pPr indent="0" marL="0">
+            <a:pPr marL="0" indent="0">
               <a:buNone/>
             </a:pPr>
             <a:r>
@@ -13937,7 +13652,7 @@
           <a:bodyPr wrap="square" lIns="0" tIns="0" rIns="0" bIns="0" rtlCol="0" anchor="ctr"/>
           <a:lstStyle/>
           <a:p>
-            <a:pPr algn="ctr" indent="0" marL="0">
+            <a:pPr marL="0" indent="0" algn="ctr">
               <a:buNone/>
             </a:pPr>
             <a:r>
@@ -13973,7 +13688,7 @@
           <a:bodyPr wrap="square" lIns="0" tIns="0" rIns="0" bIns="0" rtlCol="0" anchor="ctr"/>
           <a:lstStyle/>
           <a:p>
-            <a:pPr indent="0" marL="0">
+            <a:pPr marL="0" indent="0">
               <a:buNone/>
             </a:pPr>
             <a:r>
@@ -14009,7 +13724,7 @@
           <a:bodyPr wrap="square" lIns="0" tIns="0" rIns="0" bIns="0" rtlCol="0" anchor="ctr"/>
           <a:lstStyle/>
           <a:p>
-            <a:pPr indent="0" marL="0">
+            <a:pPr marL="0" indent="0">
               <a:buNone/>
             </a:pPr>
             <a:r>
@@ -14045,7 +13760,7 @@
           <a:bodyPr wrap="square" lIns="0" tIns="0" rIns="0" bIns="0" rtlCol="0" anchor="ctr"/>
           <a:lstStyle/>
           <a:p>
-            <a:pPr algn="ctr" indent="0" marL="0">
+            <a:pPr marL="0" indent="0" algn="ctr">
               <a:buNone/>
             </a:pPr>
             <a:r>
@@ -14081,7 +13796,7 @@
           <a:bodyPr wrap="square" lIns="0" tIns="0" rIns="0" bIns="0" rtlCol="0" anchor="ctr"/>
           <a:lstStyle/>
           <a:p>
-            <a:pPr indent="0" marL="0">
+            <a:pPr marL="0" indent="0">
               <a:buNone/>
             </a:pPr>
             <a:r>
@@ -14117,7 +13832,7 @@
           <a:bodyPr wrap="square" lIns="0" tIns="0" rIns="0" bIns="0" rtlCol="0" anchor="ctr"/>
           <a:lstStyle/>
           <a:p>
-            <a:pPr indent="0" marL="0">
+            <a:pPr marL="0" indent="0">
               <a:buNone/>
             </a:pPr>
             <a:r>
@@ -14153,7 +13868,7 @@
           <a:bodyPr wrap="square" lIns="0" tIns="0" rIns="0" bIns="0" rtlCol="0" anchor="ctr"/>
           <a:lstStyle/>
           <a:p>
-            <a:pPr algn="ctr" indent="0" marL="0">
+            <a:pPr marL="0" indent="0" algn="ctr">
               <a:buNone/>
             </a:pPr>
             <a:r>
@@ -14189,7 +13904,7 @@
           <a:bodyPr wrap="square" lIns="0" tIns="0" rIns="0" bIns="0" rtlCol="0" anchor="ctr"/>
           <a:lstStyle/>
           <a:p>
-            <a:pPr indent="0" marL="0">
+            <a:pPr marL="0" indent="0">
               <a:buNone/>
             </a:pPr>
             <a:r>
@@ -14225,7 +13940,7 @@
           <a:bodyPr wrap="square" lIns="0" tIns="0" rIns="0" bIns="0" rtlCol="0" anchor="ctr"/>
           <a:lstStyle/>
           <a:p>
-            <a:pPr indent="0" marL="0">
+            <a:pPr marL="0" indent="0">
               <a:buNone/>
             </a:pPr>
             <a:r>
@@ -14261,7 +13976,7 @@
           <a:bodyPr wrap="square" lIns="0" tIns="0" rIns="0" bIns="0" rtlCol="0" anchor="ctr"/>
           <a:lstStyle/>
           <a:p>
-            <a:pPr algn="r" indent="0" marL="0">
+            <a:pPr marL="0" indent="0" algn="r">
               <a:buNone/>
             </a:pPr>
             <a:r>
@@ -14300,7 +14015,7 @@
           <a:bodyPr wrap="square" lIns="0" tIns="0" rIns="0" bIns="0" rtlCol="0" anchor="ctr"/>
           <a:lstStyle/>
           <a:p>
-            <a:pPr indent="0" marL="0">
+            <a:pPr marL="0" indent="0">
               <a:buNone/>
             </a:pPr>
             <a:r>
@@ -14331,6 +14046,7 @@
         <a:solidFill>
           <a:srgbClr val="FFFFFF"/>
         </a:solidFill>
+        <a:effectLst/>
       </p:bgPr>
     </p:bg>
     <p:spTree>
@@ -14368,7 +14084,7 @@
           <a:bodyPr wrap="square" lIns="0" tIns="0" rIns="0" bIns="0" rtlCol="0" anchor="ctr"/>
           <a:lstStyle/>
           <a:p>
-            <a:pPr indent="0" marL="0">
+            <a:pPr marL="0" indent="0">
               <a:buNone/>
             </a:pPr>
             <a:r>
@@ -14407,11 +14123,11 @@
           <a:bodyPr wrap="square" lIns="0" tIns="0" rIns="0" bIns="0" rtlCol="0" anchor="ctr"/>
           <a:lstStyle/>
           <a:p>
-            <a:pPr indent="0" marL="0">
-              <a:buNone/>
-            </a:pPr>
-            <a:r>
-              <a:rPr lang="en-US" sz="1300" i="1" spc="200" kern="0" dirty="0">
+            <a:pPr marL="0" indent="0">
+              <a:buNone/>
+            </a:pPr>
+            <a:r>
+              <a:rPr lang="en-US" sz="1300" i="1" kern="0" spc="200" dirty="0">
                 <a:solidFill>
                   <a:srgbClr val="686869"/>
                 </a:solidFill>
@@ -14468,7 +14184,7 @@
           <a:bodyPr wrap="square" lIns="0" tIns="0" rIns="0" bIns="0" rtlCol="0" anchor="ctr"/>
           <a:lstStyle/>
           <a:p>
-            <a:pPr indent="0" marL="0">
+            <a:pPr marL="0" indent="0">
               <a:buNone/>
             </a:pPr>
             <a:r>
@@ -14554,11 +14270,11 @@
           <a:bodyPr wrap="square" lIns="0" tIns="0" rIns="0" bIns="0" rtlCol="0" anchor="ctr"/>
           <a:lstStyle/>
           <a:p>
-            <a:pPr indent="0" marL="0">
-              <a:buNone/>
-            </a:pPr>
-            <a:r>
-              <a:rPr lang="en-US" sz="900" b="1" spc="300" kern="0" dirty="0">
+            <a:pPr marL="0" indent="0">
+              <a:buNone/>
+            </a:pPr>
+            <a:r>
+              <a:rPr lang="en-US" sz="900" b="1" kern="0" spc="300" dirty="0">
                 <a:solidFill>
                   <a:srgbClr val="CEB4A9"/>
                 </a:solidFill>
@@ -14590,7 +14306,7 @@
           <a:bodyPr wrap="square" lIns="0" tIns="0" rIns="0" bIns="0" rtlCol="0" anchor="ctr"/>
           <a:lstStyle/>
           <a:p>
-            <a:pPr indent="0" marL="0">
+            <a:pPr marL="0" indent="0">
               <a:buNone/>
             </a:pPr>
             <a:r>
@@ -14626,7 +14342,7 @@
           <a:bodyPr wrap="square" lIns="0" tIns="0" rIns="0" bIns="0" rtlCol="0" anchor="ctr"/>
           <a:lstStyle/>
           <a:p>
-            <a:pPr indent="0" marL="0">
+            <a:pPr marL="0" indent="0">
               <a:buNone/>
             </a:pPr>
             <a:r>
@@ -14662,7 +14378,7 @@
           <a:bodyPr wrap="square" lIns="0" tIns="0" rIns="0" bIns="0" rtlCol="0" anchor="ctr"/>
           <a:lstStyle/>
           <a:p>
-            <a:pPr indent="0" marL="0">
+            <a:pPr marL="0" indent="0">
               <a:buNone/>
             </a:pPr>
             <a:r>
@@ -14748,11 +14464,11 @@
           <a:bodyPr wrap="square" lIns="0" tIns="0" rIns="0" bIns="0" rtlCol="0" anchor="ctr"/>
           <a:lstStyle/>
           <a:p>
-            <a:pPr indent="0" marL="0">
-              <a:buNone/>
-            </a:pPr>
-            <a:r>
-              <a:rPr lang="en-US" sz="900" b="1" spc="300" kern="0" dirty="0">
+            <a:pPr marL="0" indent="0">
+              <a:buNone/>
+            </a:pPr>
+            <a:r>
+              <a:rPr lang="en-US" sz="900" b="1" kern="0" spc="300" dirty="0">
                 <a:solidFill>
                   <a:srgbClr val="CEB4A9"/>
                 </a:solidFill>
@@ -14784,7 +14500,7 @@
           <a:bodyPr wrap="square" lIns="0" tIns="0" rIns="0" bIns="0" rtlCol="0" anchor="ctr"/>
           <a:lstStyle/>
           <a:p>
-            <a:pPr indent="0" marL="0">
+            <a:pPr marL="0" indent="0">
               <a:buNone/>
             </a:pPr>
             <a:r>
@@ -14820,7 +14536,7 @@
           <a:bodyPr wrap="square" lIns="0" tIns="0" rIns="0" bIns="0" rtlCol="0" anchor="ctr"/>
           <a:lstStyle/>
           <a:p>
-            <a:pPr indent="0" marL="0">
+            <a:pPr marL="0" indent="0">
               <a:buNone/>
             </a:pPr>
             <a:r>
@@ -14856,7 +14572,7 @@
           <a:bodyPr wrap="square" lIns="0" tIns="0" rIns="0" bIns="0" rtlCol="0" anchor="ctr"/>
           <a:lstStyle/>
           <a:p>
-            <a:pPr indent="0" marL="0">
+            <a:pPr marL="0" indent="0">
               <a:buNone/>
             </a:pPr>
             <a:r>
@@ -14942,11 +14658,11 @@
           <a:bodyPr wrap="square" lIns="0" tIns="0" rIns="0" bIns="0" rtlCol="0" anchor="ctr"/>
           <a:lstStyle/>
           <a:p>
-            <a:pPr indent="0" marL="0">
-              <a:buNone/>
-            </a:pPr>
-            <a:r>
-              <a:rPr lang="en-US" sz="900" b="1" spc="300" kern="0" dirty="0">
+            <a:pPr marL="0" indent="0">
+              <a:buNone/>
+            </a:pPr>
+            <a:r>
+              <a:rPr lang="en-US" sz="900" b="1" kern="0" spc="300" dirty="0">
                 <a:solidFill>
                   <a:srgbClr val="CEB4A9"/>
                 </a:solidFill>
@@ -14978,7 +14694,7 @@
           <a:bodyPr wrap="square" lIns="0" tIns="0" rIns="0" bIns="0" rtlCol="0" anchor="ctr"/>
           <a:lstStyle/>
           <a:p>
-            <a:pPr indent="0" marL="0">
+            <a:pPr marL="0" indent="0">
               <a:buNone/>
             </a:pPr>
             <a:r>
@@ -15014,7 +14730,7 @@
           <a:bodyPr wrap="square" lIns="0" tIns="0" rIns="0" bIns="0" rtlCol="0" anchor="ctr"/>
           <a:lstStyle/>
           <a:p>
-            <a:pPr indent="0" marL="0">
+            <a:pPr marL="0" indent="0">
               <a:buNone/>
             </a:pPr>
             <a:r>
@@ -15050,7 +14766,7 @@
           <a:bodyPr wrap="square" lIns="0" tIns="0" rIns="0" bIns="0" rtlCol="0" anchor="ctr"/>
           <a:lstStyle/>
           <a:p>
-            <a:pPr indent="0" marL="0">
+            <a:pPr marL="0" indent="0">
               <a:buNone/>
             </a:pPr>
             <a:r>
@@ -15136,11 +14852,11 @@
           <a:bodyPr wrap="square" lIns="0" tIns="0" rIns="0" bIns="0" rtlCol="0" anchor="ctr"/>
           <a:lstStyle/>
           <a:p>
-            <a:pPr indent="0" marL="0">
-              <a:buNone/>
-            </a:pPr>
-            <a:r>
-              <a:rPr lang="en-US" sz="900" b="1" spc="300" kern="0" dirty="0">
+            <a:pPr marL="0" indent="0">
+              <a:buNone/>
+            </a:pPr>
+            <a:r>
+              <a:rPr lang="en-US" sz="900" b="1" kern="0" spc="300" dirty="0">
                 <a:solidFill>
                   <a:srgbClr val="CEB4A9"/>
                 </a:solidFill>
@@ -15172,7 +14888,7 @@
           <a:bodyPr wrap="square" lIns="0" tIns="0" rIns="0" bIns="0" rtlCol="0" anchor="ctr"/>
           <a:lstStyle/>
           <a:p>
-            <a:pPr indent="0" marL="0">
+            <a:pPr marL="0" indent="0">
               <a:buNone/>
             </a:pPr>
             <a:r>
@@ -15208,7 +14924,7 @@
           <a:bodyPr wrap="square" lIns="0" tIns="0" rIns="0" bIns="0" rtlCol="0" anchor="ctr"/>
           <a:lstStyle/>
           <a:p>
-            <a:pPr indent="0" marL="0">
+            <a:pPr marL="0" indent="0">
               <a:buNone/>
             </a:pPr>
             <a:r>
@@ -15244,7 +14960,7 @@
           <a:bodyPr wrap="square" lIns="0" tIns="0" rIns="0" bIns="0" rtlCol="0" anchor="ctr"/>
           <a:lstStyle/>
           <a:p>
-            <a:pPr indent="0" marL="0">
+            <a:pPr marL="0" indent="0">
               <a:buNone/>
             </a:pPr>
             <a:r>
@@ -15280,7 +14996,7 @@
           <a:bodyPr wrap="square" lIns="0" tIns="0" rIns="0" bIns="0" rtlCol="0" anchor="ctr"/>
           <a:lstStyle/>
           <a:p>
-            <a:pPr algn="r" indent="0" marL="0">
+            <a:pPr marL="0" indent="0" algn="r">
               <a:buNone/>
             </a:pPr>
             <a:r>
@@ -15319,7 +15035,7 @@
           <a:bodyPr wrap="square" lIns="0" tIns="0" rIns="0" bIns="0" rtlCol="0" anchor="ctr"/>
           <a:lstStyle/>
           <a:p>
-            <a:pPr indent="0" marL="0">
+            <a:pPr marL="0" indent="0">
               <a:buNone/>
             </a:pPr>
             <a:r>
@@ -15350,6 +15066,7 @@
         <a:solidFill>
           <a:srgbClr val="FFFFFF"/>
         </a:solidFill>
+        <a:effectLst/>
       </p:bgPr>
     </p:bg>
     <p:spTree>
@@ -15387,7 +15104,7 @@
           <a:bodyPr wrap="square" lIns="0" tIns="0" rIns="0" bIns="0" rtlCol="0" anchor="ctr"/>
           <a:lstStyle/>
           <a:p>
-            <a:pPr indent="0" marL="0">
+            <a:pPr marL="0" indent="0">
               <a:buNone/>
             </a:pPr>
             <a:r>
@@ -15426,11 +15143,11 @@
           <a:bodyPr wrap="square" lIns="0" tIns="0" rIns="0" bIns="0" rtlCol="0" anchor="ctr"/>
           <a:lstStyle/>
           <a:p>
-            <a:pPr indent="0" marL="0">
-              <a:buNone/>
-            </a:pPr>
-            <a:r>
-              <a:rPr lang="en-US" sz="1300" i="1" spc="200" kern="0" dirty="0">
+            <a:pPr marL="0" indent="0">
+              <a:buNone/>
+            </a:pPr>
+            <a:r>
+              <a:rPr lang="en-US" sz="1300" i="1" kern="0" spc="200" dirty="0">
                 <a:solidFill>
                   <a:srgbClr val="686869"/>
                 </a:solidFill>
@@ -15490,7 +15207,7 @@
             <a:prstDash val="solid"/>
           </a:ln>
           <a:effectLst>
-            <a:outerShdw sx="100000" sy="100000" kx="0" ky="0" algn="bl" rotWithShape="0" blurRad="101600" dist="25400" dir="5400000">
+            <a:outerShdw blurRad="101600" dist="25400" dir="5400000" algn="bl" rotWithShape="0">
               <a:srgbClr val="000000">
                 <a:alpha val="6000"/>
               </a:srgbClr>
@@ -15520,14 +15237,14 @@
       </p:sp>
       <p:pic>
         <p:nvPicPr>
-          <p:cNvPr id="7" name="Image 0" descr="preencoded.png">    </p:cNvPr>
+          <p:cNvPr id="7" name="Image 0" descr="preencoded.png"/>
           <p:cNvPicPr>
             <a:picLocks noChangeAspect="1"/>
           </p:cNvPicPr>
           <p:nvPr/>
         </p:nvPicPr>
         <p:blipFill>
-          <a:blip r:embed="rId1"/>
+          <a:blip r:embed="rId3"/>
           <a:stretch>
             <a:fillRect/>
           </a:stretch>
@@ -15563,7 +15280,7 @@
           <a:bodyPr wrap="square" lIns="0" tIns="0" rIns="0" bIns="0" rtlCol="0" anchor="ctr"/>
           <a:lstStyle/>
           <a:p>
-            <a:pPr indent="0" marL="0">
+            <a:pPr marL="0" indent="0">
               <a:buNone/>
             </a:pPr>
             <a:r>
@@ -15599,11 +15316,11 @@
           <a:bodyPr wrap="square" lIns="0" tIns="0" rIns="0" bIns="0" rtlCol="0" anchor="ctr"/>
           <a:lstStyle/>
           <a:p>
-            <a:pPr indent="0" marL="0">
-              <a:buNone/>
-            </a:pPr>
-            <a:r>
-              <a:rPr lang="en-US" sz="1100" b="1" spc="200" kern="0" dirty="0">
+            <a:pPr marL="0" indent="0">
+              <a:buNone/>
+            </a:pPr>
+            <a:r>
+              <a:rPr lang="en-US" sz="1100" b="1" kern="0" spc="200" dirty="0">
                 <a:solidFill>
                   <a:srgbClr val="CEB4A9"/>
                 </a:solidFill>
@@ -15660,7 +15377,7 @@
           <a:bodyPr wrap="square" lIns="0" tIns="0" rIns="0" bIns="0" rtlCol="0" anchor="ctr"/>
           <a:lstStyle/>
           <a:p>
-            <a:pPr algn="ctr" indent="0" marL="0">
+            <a:pPr marL="0" indent="0" algn="ctr">
               <a:buNone/>
             </a:pPr>
             <a:r>
@@ -15699,7 +15416,7 @@
           <a:bodyPr wrap="square" lIns="0" tIns="0" rIns="0" bIns="0" rtlCol="0" anchor="ctr"/>
           <a:lstStyle/>
           <a:p>
-            <a:pPr indent="0" marL="0">
+            <a:pPr marL="0" indent="0">
               <a:buNone/>
             </a:pPr>
             <a:r>
@@ -15735,7 +15452,7 @@
           <a:bodyPr wrap="square" lIns="0" tIns="0" rIns="0" bIns="0" rtlCol="0" anchor="ctr"/>
           <a:lstStyle/>
           <a:p>
-            <a:pPr indent="0" marL="0">
+            <a:pPr marL="0" indent="0">
               <a:buNone/>
             </a:pPr>
             <a:r>
@@ -15771,11 +15488,11 @@
           <a:bodyPr wrap="square" lIns="0" tIns="0" rIns="0" bIns="0" rtlCol="0" anchor="ctr"/>
           <a:lstStyle/>
           <a:p>
-            <a:pPr indent="0" marL="0">
-              <a:buNone/>
-            </a:pPr>
-            <a:r>
-              <a:rPr lang="en-US" sz="1100" b="1" spc="200" kern="0" dirty="0">
+            <a:pPr marL="0" indent="0">
+              <a:buNone/>
+            </a:pPr>
+            <a:r>
+              <a:rPr lang="en-US" sz="1100" b="1" kern="0" spc="200" dirty="0">
                 <a:solidFill>
                   <a:srgbClr val="CEB4A9"/>
                 </a:solidFill>
@@ -15832,7 +15549,7 @@
           <a:bodyPr wrap="square" lIns="0" tIns="0" rIns="0" bIns="0" rtlCol="0" anchor="ctr"/>
           <a:lstStyle/>
           <a:p>
-            <a:pPr algn="ctr" indent="0" marL="0">
+            <a:pPr marL="0" indent="0" algn="ctr">
               <a:buNone/>
             </a:pPr>
             <a:r>
@@ -15871,7 +15588,7 @@
           <a:bodyPr wrap="square" lIns="0" tIns="0" rIns="0" bIns="0" rtlCol="0" anchor="ctr"/>
           <a:lstStyle/>
           <a:p>
-            <a:pPr indent="0" marL="0">
+            <a:pPr marL="0" indent="0">
               <a:buNone/>
             </a:pPr>
             <a:r>
@@ -15907,7 +15624,7 @@
           <a:bodyPr wrap="square" lIns="0" tIns="0" rIns="0" bIns="0" rtlCol="0" anchor="ctr"/>
           <a:lstStyle/>
           <a:p>
-            <a:pPr indent="0" marL="0">
+            <a:pPr marL="0" indent="0">
               <a:buNone/>
             </a:pPr>
             <a:r>
@@ -15943,11 +15660,11 @@
           <a:bodyPr wrap="square" lIns="0" tIns="0" rIns="0" bIns="0" rtlCol="0" anchor="ctr"/>
           <a:lstStyle/>
           <a:p>
-            <a:pPr indent="0" marL="0">
-              <a:buNone/>
-            </a:pPr>
-            <a:r>
-              <a:rPr lang="en-US" sz="1100" b="1" spc="200" kern="0" dirty="0">
+            <a:pPr marL="0" indent="0">
+              <a:buNone/>
+            </a:pPr>
+            <a:r>
+              <a:rPr lang="en-US" sz="1100" b="1" kern="0" spc="200" dirty="0">
                 <a:solidFill>
                   <a:srgbClr val="CEB4A9"/>
                 </a:solidFill>
@@ -16004,11 +15721,11 @@
           <a:bodyPr wrap="square" lIns="0" tIns="0" rIns="0" bIns="0" rtlCol="0" anchor="ctr"/>
           <a:lstStyle/>
           <a:p>
-            <a:pPr algn="ctr" indent="0" marL="0">
-              <a:buNone/>
-            </a:pPr>
-            <a:r>
-              <a:rPr lang="en-US" sz="2800" b="1" spc="600" kern="0" dirty="0">
+            <a:pPr marL="0" indent="0" algn="ctr">
+              <a:buNone/>
+            </a:pPr>
+            <a:r>
+              <a:rPr lang="en-US" sz="2800" b="1" kern="0" spc="600" dirty="0">
                 <a:solidFill>
                   <a:srgbClr val="3D3935"/>
                 </a:solidFill>
@@ -16043,7 +15760,7 @@
           <a:bodyPr wrap="square" lIns="0" tIns="0" rIns="0" bIns="0" rtlCol="0" anchor="ctr"/>
           <a:lstStyle/>
           <a:p>
-            <a:pPr indent="0" marL="0">
+            <a:pPr marL="0" indent="0">
               <a:buNone/>
             </a:pPr>
             <a:r>
@@ -16079,7 +15796,7 @@
           <a:bodyPr wrap="square" lIns="0" tIns="0" rIns="0" bIns="0" rtlCol="0" anchor="ctr"/>
           <a:lstStyle/>
           <a:p>
-            <a:pPr indent="0" marL="0">
+            <a:pPr marL="0" indent="0">
               <a:buNone/>
             </a:pPr>
             <a:r>
@@ -16115,11 +15832,11 @@
           <a:bodyPr wrap="square" lIns="0" tIns="0" rIns="0" bIns="0" rtlCol="0" anchor="ctr"/>
           <a:lstStyle/>
           <a:p>
-            <a:pPr indent="0" marL="0">
-              <a:buNone/>
-            </a:pPr>
-            <a:r>
-              <a:rPr lang="en-US" sz="1100" b="1" spc="200" kern="0" dirty="0">
+            <a:pPr marL="0" indent="0">
+              <a:buNone/>
+            </a:pPr>
+            <a:r>
+              <a:rPr lang="en-US" sz="1100" b="1" kern="0" spc="200" dirty="0">
                 <a:solidFill>
                   <a:srgbClr val="CEB4A9"/>
                 </a:solidFill>
@@ -16171,7 +15888,7 @@
           <a:bodyPr wrap="square" lIns="0" tIns="0" rIns="0" bIns="0" rtlCol="0" anchor="ctr"/>
           <a:lstStyle/>
           <a:p>
-            <a:pPr algn="ctr" indent="0" marL="0">
+            <a:pPr marL="0" indent="0" algn="ctr">
               <a:buNone/>
             </a:pPr>
             <a:r>
@@ -16210,7 +15927,7 @@
           <a:bodyPr wrap="square" lIns="0" tIns="0" rIns="0" bIns="0" rtlCol="0" anchor="ctr"/>
           <a:lstStyle/>
           <a:p>
-            <a:pPr indent="0" marL="0">
+            <a:pPr marL="0" indent="0">
               <a:buNone/>
             </a:pPr>
             <a:r>
@@ -16266,7 +15983,7 @@
           <a:bodyPr wrap="square" lIns="0" tIns="0" rIns="0" bIns="0" rtlCol="0" anchor="ctr"/>
           <a:lstStyle/>
           <a:p>
-            <a:pPr algn="ctr" indent="0" marL="0">
+            <a:pPr marL="0" indent="0" algn="ctr">
               <a:buNone/>
             </a:pPr>
             <a:r>
@@ -16305,7 +16022,7 @@
           <a:bodyPr wrap="square" lIns="0" tIns="0" rIns="0" bIns="0" rtlCol="0" anchor="ctr"/>
           <a:lstStyle/>
           <a:p>
-            <a:pPr indent="0" marL="0">
+            <a:pPr marL="0" indent="0">
               <a:buNone/>
             </a:pPr>
             <a:r>
@@ -16361,7 +16078,7 @@
           <a:bodyPr wrap="square" lIns="0" tIns="0" rIns="0" bIns="0" rtlCol="0" anchor="ctr"/>
           <a:lstStyle/>
           <a:p>
-            <a:pPr algn="ctr" indent="0" marL="0">
+            <a:pPr marL="0" indent="0" algn="ctr">
               <a:buNone/>
             </a:pPr>
             <a:r>
@@ -16400,7 +16117,7 @@
           <a:bodyPr wrap="square" lIns="0" tIns="0" rIns="0" bIns="0" rtlCol="0" anchor="ctr"/>
           <a:lstStyle/>
           <a:p>
-            <a:pPr indent="0" marL="0">
+            <a:pPr marL="0" indent="0">
               <a:buNone/>
             </a:pPr>
             <a:r>
@@ -16456,7 +16173,7 @@
           <a:bodyPr wrap="square" lIns="0" tIns="0" rIns="0" bIns="0" rtlCol="0" anchor="ctr"/>
           <a:lstStyle/>
           <a:p>
-            <a:pPr algn="ctr" indent="0" marL="0">
+            <a:pPr marL="0" indent="0" algn="ctr">
               <a:buNone/>
             </a:pPr>
             <a:r>
@@ -16495,7 +16212,7 @@
           <a:bodyPr wrap="square" lIns="0" tIns="0" rIns="0" bIns="0" rtlCol="0" anchor="ctr"/>
           <a:lstStyle/>
           <a:p>
-            <a:pPr indent="0" marL="0">
+            <a:pPr marL="0" indent="0">
               <a:buNone/>
             </a:pPr>
             <a:r>
@@ -16551,7 +16268,7 @@
           <a:bodyPr wrap="square" lIns="0" tIns="0" rIns="0" bIns="0" rtlCol="0" anchor="ctr"/>
           <a:lstStyle/>
           <a:p>
-            <a:pPr algn="ctr" indent="0" marL="0">
+            <a:pPr marL="0" indent="0" algn="ctr">
               <a:buNone/>
             </a:pPr>
             <a:r>
@@ -16590,7 +16307,7 @@
           <a:bodyPr wrap="square" lIns="0" tIns="0" rIns="0" bIns="0" rtlCol="0" anchor="ctr"/>
           <a:lstStyle/>
           <a:p>
-            <a:pPr indent="0" marL="0">
+            <a:pPr marL="0" indent="0">
               <a:buNone/>
             </a:pPr>
             <a:r>
@@ -16646,7 +16363,7 @@
           <a:bodyPr wrap="square" lIns="0" tIns="0" rIns="0" bIns="0" rtlCol="0" anchor="ctr"/>
           <a:lstStyle/>
           <a:p>
-            <a:pPr algn="ctr" indent="0" marL="0">
+            <a:pPr marL="0" indent="0" algn="ctr">
               <a:buNone/>
             </a:pPr>
             <a:r>
@@ -16682,7 +16399,7 @@
           <a:bodyPr wrap="square" lIns="0" tIns="0" rIns="0" bIns="0" rtlCol="0" anchor="ctr"/>
           <a:lstStyle/>
           <a:p>
-            <a:pPr algn="r" indent="0" marL="0">
+            <a:pPr marL="0" indent="0" algn="r">
               <a:buNone/>
             </a:pPr>
             <a:r>
@@ -16721,7 +16438,7 @@
           <a:bodyPr wrap="square" lIns="0" tIns="0" rIns="0" bIns="0" rtlCol="0" anchor="ctr"/>
           <a:lstStyle/>
           <a:p>
-            <a:pPr indent="0" marL="0">
+            <a:pPr marL="0" indent="0">
               <a:buNone/>
             </a:pPr>
             <a:r>
@@ -16752,6 +16469,7 @@
         <a:solidFill>
           <a:srgbClr val="FFFFFF"/>
         </a:solidFill>
+        <a:effectLst/>
       </p:bgPr>
     </p:bg>
     <p:spTree>
@@ -16789,7 +16507,7 @@
           <a:bodyPr wrap="square" lIns="0" tIns="0" rIns="0" bIns="0" rtlCol="0" anchor="ctr"/>
           <a:lstStyle/>
           <a:p>
-            <a:pPr indent="0" marL="0">
+            <a:pPr marL="0" indent="0">
               <a:buNone/>
             </a:pPr>
             <a:r>
@@ -16828,11 +16546,11 @@
           <a:bodyPr wrap="square" lIns="0" tIns="0" rIns="0" bIns="0" rtlCol="0" anchor="ctr"/>
           <a:lstStyle/>
           <a:p>
-            <a:pPr indent="0" marL="0">
-              <a:buNone/>
-            </a:pPr>
-            <a:r>
-              <a:rPr lang="en-US" sz="1300" i="1" spc="200" kern="0" dirty="0">
+            <a:pPr marL="0" indent="0">
+              <a:buNone/>
+            </a:pPr>
+            <a:r>
+              <a:rPr lang="en-US" sz="1300" i="1" kern="0" spc="200" dirty="0">
                 <a:solidFill>
                   <a:srgbClr val="686869"/>
                 </a:solidFill>
@@ -16889,7 +16607,7 @@
           <a:bodyPr wrap="square" lIns="0" tIns="0" rIns="0" bIns="0" rtlCol="0" anchor="ctr"/>
           <a:lstStyle/>
           <a:p>
-            <a:pPr indent="0" marL="0">
+            <a:pPr marL="0" indent="0">
               <a:buNone/>
             </a:pPr>
             <a:r>
@@ -16925,7 +16643,7 @@
           <a:bodyPr wrap="square" lIns="0" tIns="0" rIns="0" bIns="0" rtlCol="0" anchor="ctr"/>
           <a:lstStyle/>
           <a:p>
-            <a:pPr indent="0" marL="0">
+            <a:pPr marL="0" indent="0">
               <a:buNone/>
             </a:pPr>
             <a:r>
@@ -16964,7 +16682,7 @@
             <a:prstDash val="solid"/>
           </a:ln>
           <a:effectLst>
-            <a:outerShdw sx="100000" sy="100000" kx="0" ky="0" algn="bl" rotWithShape="0" blurRad="101600" dist="25400" dir="5400000">
+            <a:outerShdw blurRad="101600" dist="25400" dir="5400000" algn="bl" rotWithShape="0">
               <a:srgbClr val="000000">
                 <a:alpha val="6000"/>
               </a:srgbClr>
@@ -16999,14 +16717,14 @@
       </p:sp>
       <p:pic>
         <p:nvPicPr>
-          <p:cNvPr id="9" name="Image 0" descr="preencoded.png">    </p:cNvPr>
+          <p:cNvPr id="9" name="Image 0" descr="preencoded.png"/>
           <p:cNvPicPr>
             <a:picLocks noChangeAspect="1"/>
           </p:cNvPicPr>
           <p:nvPr/>
         </p:nvPicPr>
         <p:blipFill>
-          <a:blip r:embed="rId1"/>
+          <a:blip r:embed="rId3"/>
           <a:stretch>
             <a:fillRect/>
           </a:stretch>
@@ -17042,7 +16760,7 @@
           <a:bodyPr wrap="square" lIns="0" tIns="0" rIns="0" bIns="0" rtlCol="0" anchor="ctr"/>
           <a:lstStyle/>
           <a:p>
-            <a:pPr indent="0" marL="0">
+            <a:pPr marL="0" indent="0">
               <a:buNone/>
             </a:pPr>
             <a:r>
@@ -17078,7 +16796,7 @@
           <a:bodyPr wrap="square" lIns="0" tIns="0" rIns="0" bIns="0" rtlCol="0" anchor="ctr"/>
           <a:lstStyle/>
           <a:p>
-            <a:pPr indent="0" marL="0">
+            <a:pPr marL="0" indent="0">
               <a:buNone/>
             </a:pPr>
             <a:r>
@@ -17139,7 +16857,7 @@
           <a:bodyPr wrap="square" lIns="0" tIns="0" rIns="0" bIns="0" rtlCol="0" anchor="ctr"/>
           <a:lstStyle/>
           <a:p>
-            <a:pPr indent="0" marL="0">
+            <a:pPr marL="0" indent="0">
               <a:buNone/>
             </a:pPr>
             <a:r>
@@ -17181,7 +16899,7 @@
             <a:prstDash val="solid"/>
           </a:ln>
           <a:effectLst>
-            <a:outerShdw sx="100000" sy="100000" kx="0" ky="0" algn="bl" rotWithShape="0" blurRad="101600" dist="25400" dir="5400000">
+            <a:outerShdw blurRad="101600" dist="25400" dir="5400000" algn="bl" rotWithShape="0">
               <a:srgbClr val="000000">
                 <a:alpha val="6000"/>
               </a:srgbClr>
@@ -17216,14 +16934,14 @@
       </p:sp>
       <p:pic>
         <p:nvPicPr>
-          <p:cNvPr id="16" name="Image 1" descr="preencoded.png">    </p:cNvPr>
+          <p:cNvPr id="16" name="Image 1" descr="preencoded.png"/>
           <p:cNvPicPr>
             <a:picLocks noChangeAspect="1"/>
           </p:cNvPicPr>
           <p:nvPr/>
         </p:nvPicPr>
         <p:blipFill>
-          <a:blip r:embed="rId2"/>
+          <a:blip r:embed="rId4"/>
           <a:stretch>
             <a:fillRect/>
           </a:stretch>
@@ -17259,7 +16977,7 @@
           <a:bodyPr wrap="square" lIns="0" tIns="0" rIns="0" bIns="0" rtlCol="0" anchor="ctr"/>
           <a:lstStyle/>
           <a:p>
-            <a:pPr indent="0" marL="0">
+            <a:pPr marL="0" indent="0">
               <a:buNone/>
             </a:pPr>
             <a:r>
@@ -17295,7 +17013,7 @@
           <a:bodyPr wrap="square" lIns="0" tIns="0" rIns="0" bIns="0" rtlCol="0" anchor="ctr"/>
           <a:lstStyle/>
           <a:p>
-            <a:pPr indent="0" marL="0">
+            <a:pPr marL="0" indent="0">
               <a:buNone/>
             </a:pPr>
             <a:r>
@@ -17356,7 +17074,7 @@
           <a:bodyPr wrap="square" lIns="0" tIns="0" rIns="0" bIns="0" rtlCol="0" anchor="ctr"/>
           <a:lstStyle/>
           <a:p>
-            <a:pPr indent="0" marL="0">
+            <a:pPr marL="0" indent="0">
               <a:buNone/>
             </a:pPr>
             <a:r>
@@ -17426,14 +17144,14 @@
       </p:sp>
       <p:pic>
         <p:nvPicPr>
-          <p:cNvPr id="23" name="Image 2" descr="preencoded.png">    </p:cNvPr>
+          <p:cNvPr id="23" name="Image 2" descr="preencoded.png"/>
           <p:cNvPicPr>
             <a:picLocks noChangeAspect="1"/>
           </p:cNvPicPr>
           <p:nvPr/>
         </p:nvPicPr>
         <p:blipFill>
-          <a:blip r:embed="rId3"/>
+          <a:blip r:embed="rId5"/>
           <a:stretch>
             <a:fillRect/>
           </a:stretch>
@@ -17469,7 +17187,7 @@
           <a:bodyPr wrap="square" lIns="0" tIns="0" rIns="0" bIns="0" rtlCol="0" anchor="ctr"/>
           <a:lstStyle/>
           <a:p>
-            <a:pPr indent="0" marL="0">
+            <a:pPr marL="0" indent="0">
               <a:buNone/>
             </a:pPr>
             <a:r>
@@ -17505,7 +17223,7 @@
           <a:bodyPr wrap="square" lIns="0" tIns="0" rIns="0" bIns="0" rtlCol="0" anchor="ctr"/>
           <a:lstStyle/>
           <a:p>
-            <a:pPr indent="0" marL="0">
+            <a:pPr marL="0" indent="0">
               <a:buNone/>
             </a:pPr>
             <a:r>
@@ -17566,11 +17284,11 @@
           <a:bodyPr wrap="square" lIns="0" tIns="0" rIns="0" bIns="0" rtlCol="0" anchor="ctr"/>
           <a:lstStyle/>
           <a:p>
-            <a:pPr algn="ctr" indent="0" marL="0">
-              <a:buNone/>
-            </a:pPr>
-            <a:r>
-              <a:rPr lang="en-US" sz="3200" b="1" spc="600" kern="0" dirty="0">
+            <a:pPr marL="0" indent="0" algn="ctr">
+              <a:buNone/>
+            </a:pPr>
+            <a:r>
+              <a:rPr lang="en-US" sz="3200" b="1" kern="0" spc="600" dirty="0">
                 <a:solidFill>
                   <a:srgbClr val="3D3935"/>
                 </a:solidFill>
@@ -17605,7 +17323,7 @@
           <a:bodyPr wrap="square" lIns="0" tIns="0" rIns="0" bIns="0" rtlCol="0" anchor="ctr"/>
           <a:lstStyle/>
           <a:p>
-            <a:pPr indent="0" marL="0">
+            <a:pPr marL="0" indent="0">
               <a:buNone/>
             </a:pPr>
             <a:r>
@@ -17641,7 +17359,7 @@
           <a:bodyPr wrap="square" lIns="0" tIns="0" rIns="0" bIns="0" rtlCol="0" anchor="ctr"/>
           <a:lstStyle/>
           <a:p>
-            <a:pPr indent="0" marL="0">
+            <a:pPr marL="0" indent="0">
               <a:buNone/>
             </a:pPr>
             <a:r>
@@ -17677,7 +17395,7 @@
           <a:bodyPr wrap="square" lIns="0" tIns="0" rIns="0" bIns="0" rtlCol="0" anchor="ctr"/>
           <a:lstStyle/>
           <a:p>
-            <a:pPr algn="r" indent="0" marL="0">
+            <a:pPr marL="0" indent="0" algn="r">
               <a:buNone/>
             </a:pPr>
             <a:r>
@@ -17716,7 +17434,7 @@
           <a:bodyPr wrap="square" lIns="0" tIns="0" rIns="0" bIns="0" rtlCol="0" anchor="ctr"/>
           <a:lstStyle/>
           <a:p>
-            <a:pPr indent="0" marL="0">
+            <a:pPr marL="0" indent="0">
               <a:buNone/>
             </a:pPr>
             <a:r>
@@ -17747,6 +17465,7 @@
         <a:solidFill>
           <a:srgbClr val="3D3935"/>
         </a:solidFill>
+        <a:effectLst/>
       </p:bgPr>
     </p:bg>
     <p:spTree>
@@ -17765,14 +17484,14 @@
       </p:grpSpPr>
       <p:pic>
         <p:nvPicPr>
-          <p:cNvPr id="2" name="Image 0" descr="preencoded.png">    </p:cNvPr>
+          <p:cNvPr id="2" name="Image 0" descr="preencoded.png"/>
           <p:cNvPicPr>
             <a:picLocks noChangeAspect="1"/>
           </p:cNvPicPr>
           <p:nvPr/>
         </p:nvPicPr>
         <p:blipFill>
-          <a:blip r:embed="rId1"/>
+          <a:blip r:embed="rId3"/>
           <a:stretch>
             <a:fillRect/>
           </a:stretch>
@@ -17808,11 +17527,11 @@
           <a:bodyPr wrap="square" lIns="0" tIns="0" rIns="0" bIns="0" rtlCol="0" anchor="ctr"/>
           <a:lstStyle/>
           <a:p>
-            <a:pPr indent="0" marL="0">
-              <a:buNone/>
-            </a:pPr>
-            <a:r>
-              <a:rPr lang="en-US" sz="1400" i="1" spc="200" kern="0" dirty="0">
+            <a:pPr marL="0" indent="0">
+              <a:buNone/>
+            </a:pPr>
+            <a:r>
+              <a:rPr lang="en-US" sz="1400" i="1" kern="0" spc="200" dirty="0">
                 <a:solidFill>
                   <a:srgbClr val="CEB4A9"/>
                 </a:solidFill>
@@ -17847,7 +17566,7 @@
           <a:bodyPr wrap="square" lIns="0" tIns="0" rIns="0" bIns="0" rtlCol="0" anchor="ctr"/>
           <a:lstStyle/>
           <a:p>
-            <a:pPr algn="ctr" indent="0" marL="0">
+            <a:pPr marL="0" indent="0" algn="ctr">
               <a:buNone/>
             </a:pPr>
             <a:r>
@@ -17911,7 +17630,7 @@
           <a:bodyPr wrap="square" lIns="0" tIns="0" rIns="0" bIns="0" rtlCol="0" anchor="ctr"/>
           <a:lstStyle/>
           <a:p>
-            <a:pPr algn="ctr" indent="0" marL="0">
+            <a:pPr marL="0" indent="0" algn="ctr">
               <a:buNone/>
             </a:pPr>
             <a:r>
@@ -17947,7 +17666,7 @@
           <a:bodyPr wrap="square" lIns="0" tIns="0" rIns="0" bIns="0" rtlCol="0" anchor="ctr"/>
           <a:lstStyle/>
           <a:p>
-            <a:pPr algn="ctr" indent="0" marL="0">
+            <a:pPr marL="0" indent="0" algn="ctr">
               <a:buNone/>
             </a:pPr>
             <a:r>
@@ -17961,31 +17680,6 @@
             <a:endParaRPr lang="en-US" sz="1400" dirty="0"/>
           </a:p>
         </p:txBody>
-      </p:sp>
-      <p:sp>
-        <p:nvSpPr>
-          <p:cNvPr id="8" name="Shape 5"/>
-          <p:cNvSpPr/>
-          <p:nvPr/>
-        </p:nvSpPr>
-        <p:spPr>
-          <a:xfrm>
-            <a:off x="1371600" y="4023360"/>
-            <a:ext cx="9418320" cy="2194560"/>
-          </a:xfrm>
-          <a:prstGeom prst="rect">
-            <a:avLst/>
-          </a:prstGeom>
-          <a:solidFill>
-            <a:srgbClr val="26211E"/>
-          </a:solidFill>
-          <a:ln w="12700">
-            <a:solidFill>
-              <a:srgbClr val="CEB4A9"/>
-            </a:solidFill>
-            <a:prstDash val="solid"/>
-          </a:ln>
-        </p:spPr>
       </p:sp>
       <p:sp>
         <p:nvSpPr>
@@ -18008,11 +17702,11 @@
           <a:bodyPr wrap="square" lIns="0" tIns="0" rIns="0" bIns="0" rtlCol="0" anchor="ctr"/>
           <a:lstStyle/>
           <a:p>
-            <a:pPr algn="ctr" indent="0" marL="0">
-              <a:buNone/>
-            </a:pPr>
-            <a:r>
-              <a:rPr lang="en-US" sz="1400" b="1" spc="300" kern="0" dirty="0">
+            <a:pPr marL="0" indent="0" algn="ctr">
+              <a:buNone/>
+            </a:pPr>
+            <a:r>
+              <a:rPr lang="en-US" sz="1400" b="1" kern="0" spc="300" dirty="0">
                 <a:solidFill>
                   <a:srgbClr val="CEB4A9"/>
                 </a:solidFill>
@@ -18031,7 +17725,7 @@
         </p:nvSpPr>
         <p:spPr>
           <a:xfrm>
-            <a:off x="1691640" y="4663440"/>
+            <a:off x="5444130" y="4800600"/>
             <a:ext cx="2834640" cy="274320"/>
           </a:xfrm>
           <a:prstGeom prst="rect">
@@ -18044,11 +17738,11 @@
           <a:bodyPr wrap="square" lIns="0" tIns="0" rIns="0" bIns="0" rtlCol="0" anchor="ctr"/>
           <a:lstStyle/>
           <a:p>
-            <a:pPr indent="0" marL="0">
-              <a:buNone/>
-            </a:pPr>
-            <a:r>
-              <a:rPr lang="en-US" sz="1000" spc="200" kern="0" dirty="0">
+            <a:pPr marL="0" indent="0">
+              <a:buNone/>
+            </a:pPr>
+            <a:r>
+              <a:rPr lang="en-US" sz="1000" kern="0" spc="200" dirty="0">
                 <a:solidFill>
                   <a:srgbClr val="DAD9D6"/>
                 </a:solidFill>
@@ -18067,7 +17761,7 @@
         </p:nvSpPr>
         <p:spPr>
           <a:xfrm>
-            <a:off x="1691640" y="4937760"/>
+            <a:off x="5444130" y="5074920"/>
             <a:ext cx="2834640" cy="228600"/>
           </a:xfrm>
           <a:prstGeom prst="rect">
@@ -18080,7 +17774,7 @@
           <a:bodyPr wrap="square" lIns="0" tIns="0" rIns="0" bIns="0" rtlCol="0" anchor="ctr"/>
           <a:lstStyle/>
           <a:p>
-            <a:pPr indent="0" marL="0">
+            <a:pPr marL="0" indent="0">
               <a:buNone/>
             </a:pPr>
             <a:r>
@@ -18103,7 +17797,7 @@
         </p:nvSpPr>
         <p:spPr>
           <a:xfrm>
-            <a:off x="1691640" y="5257800"/>
+            <a:off x="5444130" y="5394960"/>
             <a:ext cx="2834640" cy="320040"/>
           </a:xfrm>
           <a:prstGeom prst="rect">
@@ -18116,7 +17810,7 @@
           <a:bodyPr wrap="square" lIns="0" tIns="0" rIns="0" bIns="0" rtlCol="0" anchor="ctr"/>
           <a:lstStyle/>
           <a:p>
-            <a:pPr indent="0" marL="0">
+            <a:pPr marL="0" indent="0">
               <a:buNone/>
             </a:pPr>
             <a:r>
@@ -18139,7 +17833,7 @@
         </p:nvSpPr>
         <p:spPr>
           <a:xfrm>
-            <a:off x="1691640" y="5623560"/>
+            <a:off x="5444130" y="5760720"/>
             <a:ext cx="2834640" cy="274320"/>
           </a:xfrm>
           <a:prstGeom prst="rect">
@@ -18152,7 +17846,7 @@
           <a:bodyPr wrap="square" lIns="0" tIns="0" rIns="0" bIns="0" rtlCol="0" anchor="ctr"/>
           <a:lstStyle/>
           <a:p>
-            <a:pPr indent="0" marL="0">
+            <a:pPr marL="0" indent="0">
               <a:buNone/>
             </a:pPr>
             <a:r>
@@ -18172,300 +17866,6 @@
       </p:sp>
       <p:sp>
         <p:nvSpPr>
-          <p:cNvPr id="14" name="Text 11"/>
-          <p:cNvSpPr/>
-          <p:nvPr/>
-        </p:nvSpPr>
-        <p:spPr>
-          <a:xfrm>
-            <a:off x="4709160" y="4663440"/>
-            <a:ext cx="2834640" cy="274320"/>
-          </a:xfrm>
-          <a:prstGeom prst="rect">
-            <a:avLst/>
-          </a:prstGeom>
-          <a:noFill/>
-          <a:ln/>
-        </p:spPr>
-        <p:txBody>
-          <a:bodyPr wrap="square" lIns="0" tIns="0" rIns="0" bIns="0" rtlCol="0" anchor="ctr"/>
-          <a:lstStyle/>
-          <a:p>
-            <a:pPr indent="0" marL="0">
-              <a:buNone/>
-            </a:pPr>
-            <a:r>
-              <a:rPr lang="en-US" sz="1000" spc="200" kern="0" dirty="0">
-                <a:solidFill>
-                  <a:srgbClr val="DAD9D6"/>
-                </a:solidFill>
-              </a:rPr>
-              <a:t>餐飲部主管</a:t>
-            </a:r>
-            <a:endParaRPr lang="en-US" sz="1000" dirty="0"/>
-          </a:p>
-        </p:txBody>
-      </p:sp>
-      <p:sp>
-        <p:nvSpPr>
-          <p:cNvPr id="15" name="Text 12"/>
-          <p:cNvSpPr/>
-          <p:nvPr/>
-        </p:nvSpPr>
-        <p:spPr>
-          <a:xfrm>
-            <a:off x="4709160" y="4937760"/>
-            <a:ext cx="2834640" cy="228600"/>
-          </a:xfrm>
-          <a:prstGeom prst="rect">
-            <a:avLst/>
-          </a:prstGeom>
-          <a:noFill/>
-          <a:ln/>
-        </p:spPr>
-        <p:txBody>
-          <a:bodyPr wrap="square" lIns="0" tIns="0" rIns="0" bIns="0" rtlCol="0" anchor="ctr"/>
-          <a:lstStyle/>
-          <a:p>
-            <a:pPr indent="0" marL="0">
-              <a:buNone/>
-            </a:pPr>
-            <a:r>
-              <a:rPr lang="en-US" sz="800" i="1" dirty="0">
-                <a:solidFill>
-                  <a:srgbClr val="686869"/>
-                </a:solidFill>
-              </a:rPr>
-              <a:t>F&amp;B Department</a:t>
-            </a:r>
-            <a:endParaRPr lang="en-US" sz="800" dirty="0"/>
-          </a:p>
-        </p:txBody>
-      </p:sp>
-      <p:sp>
-        <p:nvSpPr>
-          <p:cNvPr id="16" name="Text 13"/>
-          <p:cNvSpPr/>
-          <p:nvPr/>
-        </p:nvSpPr>
-        <p:spPr>
-          <a:xfrm>
-            <a:off x="4709160" y="5257800"/>
-            <a:ext cx="2834640" cy="320040"/>
-          </a:xfrm>
-          <a:prstGeom prst="rect">
-            <a:avLst/>
-          </a:prstGeom>
-          <a:noFill/>
-          <a:ln/>
-        </p:spPr>
-        <p:txBody>
-          <a:bodyPr wrap="square" lIns="0" tIns="0" rIns="0" bIns="0" rtlCol="0" anchor="ctr"/>
-          <a:lstStyle/>
-          <a:p>
-            <a:pPr indent="0" marL="0">
-              <a:buNone/>
-            </a:pPr>
-            <a:r>
-              <a:rPr lang="en-US" sz="1400" b="1" dirty="0">
-                <a:solidFill>
-                  <a:srgbClr val="FFFFFF"/>
-                </a:solidFill>
-              </a:rPr>
-              <a:t>[ 現場填 ]</a:t>
-            </a:r>
-            <a:endParaRPr lang="en-US" sz="1400" dirty="0"/>
-          </a:p>
-        </p:txBody>
-      </p:sp>
-      <p:sp>
-        <p:nvSpPr>
-          <p:cNvPr id="17" name="Text 14"/>
-          <p:cNvSpPr/>
-          <p:nvPr/>
-        </p:nvSpPr>
-        <p:spPr>
-          <a:xfrm>
-            <a:off x="4709160" y="5623560"/>
-            <a:ext cx="2834640" cy="274320"/>
-          </a:xfrm>
-          <a:prstGeom prst="rect">
-            <a:avLst/>
-          </a:prstGeom>
-          <a:noFill/>
-          <a:ln/>
-        </p:spPr>
-        <p:txBody>
-          <a:bodyPr wrap="square" lIns="0" tIns="0" rIns="0" bIns="0" rtlCol="0" anchor="ctr"/>
-          <a:lstStyle/>
-          <a:p>
-            <a:pPr indent="0" marL="0">
-              <a:buNone/>
-            </a:pPr>
-            <a:r>
-              <a:rPr lang="en-US" sz="1000" dirty="0">
-                <a:solidFill>
-                  <a:srgbClr val="CEB4A9"/>
-                </a:solidFill>
-                <a:latin typeface="Consolas" pitchFamily="34" charset="0"/>
-                <a:ea typeface="Consolas" pitchFamily="34" charset="-122"/>
-                <a:cs typeface="Consolas" pitchFamily="34" charset="-120"/>
-              </a:rPr>
-              <a:t>—</a:t>
-            </a:r>
-            <a:endParaRPr lang="en-US" sz="1000" dirty="0"/>
-          </a:p>
-        </p:txBody>
-      </p:sp>
-      <p:sp>
-        <p:nvSpPr>
-          <p:cNvPr id="18" name="Text 15"/>
-          <p:cNvSpPr/>
-          <p:nvPr/>
-        </p:nvSpPr>
-        <p:spPr>
-          <a:xfrm>
-            <a:off x="7726680" y="4663440"/>
-            <a:ext cx="2834640" cy="274320"/>
-          </a:xfrm>
-          <a:prstGeom prst="rect">
-            <a:avLst/>
-          </a:prstGeom>
-          <a:noFill/>
-          <a:ln/>
-        </p:spPr>
-        <p:txBody>
-          <a:bodyPr wrap="square" lIns="0" tIns="0" rIns="0" bIns="0" rtlCol="0" anchor="ctr"/>
-          <a:lstStyle/>
-          <a:p>
-            <a:pPr indent="0" marL="0">
-              <a:buNone/>
-            </a:pPr>
-            <a:r>
-              <a:rPr lang="en-US" sz="1000" spc="200" kern="0" dirty="0">
-                <a:solidFill>
-                  <a:srgbClr val="DAD9D6"/>
-                </a:solidFill>
-              </a:rPr>
-              <a:t>IT 部門</a:t>
-            </a:r>
-            <a:endParaRPr lang="en-US" sz="1000" dirty="0"/>
-          </a:p>
-        </p:txBody>
-      </p:sp>
-      <p:sp>
-        <p:nvSpPr>
-          <p:cNvPr id="19" name="Text 16"/>
-          <p:cNvSpPr/>
-          <p:nvPr/>
-        </p:nvSpPr>
-        <p:spPr>
-          <a:xfrm>
-            <a:off x="7726680" y="4937760"/>
-            <a:ext cx="2834640" cy="228600"/>
-          </a:xfrm>
-          <a:prstGeom prst="rect">
-            <a:avLst/>
-          </a:prstGeom>
-          <a:noFill/>
-          <a:ln/>
-        </p:spPr>
-        <p:txBody>
-          <a:bodyPr wrap="square" lIns="0" tIns="0" rIns="0" bIns="0" rtlCol="0" anchor="ctr"/>
-          <a:lstStyle/>
-          <a:p>
-            <a:pPr indent="0" marL="0">
-              <a:buNone/>
-            </a:pPr>
-            <a:r>
-              <a:rPr lang="en-US" sz="800" i="1" dirty="0">
-                <a:solidFill>
-                  <a:srgbClr val="686869"/>
-                </a:solidFill>
-              </a:rPr>
-              <a:t>IT Department</a:t>
-            </a:r>
-            <a:endParaRPr lang="en-US" sz="800" dirty="0"/>
-          </a:p>
-        </p:txBody>
-      </p:sp>
-      <p:sp>
-        <p:nvSpPr>
-          <p:cNvPr id="20" name="Text 17"/>
-          <p:cNvSpPr/>
-          <p:nvPr/>
-        </p:nvSpPr>
-        <p:spPr>
-          <a:xfrm>
-            <a:off x="7726680" y="5257800"/>
-            <a:ext cx="2834640" cy="320040"/>
-          </a:xfrm>
-          <a:prstGeom prst="rect">
-            <a:avLst/>
-          </a:prstGeom>
-          <a:noFill/>
-          <a:ln/>
-        </p:spPr>
-        <p:txBody>
-          <a:bodyPr wrap="square" lIns="0" tIns="0" rIns="0" bIns="0" rtlCol="0" anchor="ctr"/>
-          <a:lstStyle/>
-          <a:p>
-            <a:pPr indent="0" marL="0">
-              <a:buNone/>
-            </a:pPr>
-            <a:r>
-              <a:rPr lang="en-US" sz="1400" b="1" dirty="0">
-                <a:solidFill>
-                  <a:srgbClr val="FFFFFF"/>
-                </a:solidFill>
-              </a:rPr>
-              <a:t>[ 現場填 ]</a:t>
-            </a:r>
-            <a:endParaRPr lang="en-US" sz="1400" dirty="0"/>
-          </a:p>
-        </p:txBody>
-      </p:sp>
-      <p:sp>
-        <p:nvSpPr>
-          <p:cNvPr id="21" name="Text 18"/>
-          <p:cNvSpPr/>
-          <p:nvPr/>
-        </p:nvSpPr>
-        <p:spPr>
-          <a:xfrm>
-            <a:off x="7726680" y="5623560"/>
-            <a:ext cx="2834640" cy="274320"/>
-          </a:xfrm>
-          <a:prstGeom prst="rect">
-            <a:avLst/>
-          </a:prstGeom>
-          <a:noFill/>
-          <a:ln/>
-        </p:spPr>
-        <p:txBody>
-          <a:bodyPr wrap="square" lIns="0" tIns="0" rIns="0" bIns="0" rtlCol="0" anchor="ctr"/>
-          <a:lstStyle/>
-          <a:p>
-            <a:pPr indent="0" marL="0">
-              <a:buNone/>
-            </a:pPr>
-            <a:r>
-              <a:rPr lang="en-US" sz="1000" dirty="0">
-                <a:solidFill>
-                  <a:srgbClr val="CEB4A9"/>
-                </a:solidFill>
-                <a:latin typeface="Consolas" pitchFamily="34" charset="0"/>
-                <a:ea typeface="Consolas" pitchFamily="34" charset="-122"/>
-                <a:cs typeface="Consolas" pitchFamily="34" charset="-120"/>
-              </a:rPr>
-              <a:t>—</a:t>
-            </a:r>
-            <a:endParaRPr lang="en-US" sz="1000" dirty="0"/>
-          </a:p>
-        </p:txBody>
-      </p:sp>
-      <p:sp>
-        <p:nvSpPr>
           <p:cNvPr id="22" name="Text 19"/>
           <p:cNvSpPr/>
           <p:nvPr/>
@@ -18485,7 +17885,7 @@
           <a:bodyPr wrap="square" lIns="0" tIns="0" rIns="0" bIns="0" rtlCol="0" anchor="ctr"/>
           <a:lstStyle/>
           <a:p>
-            <a:pPr algn="ctr" indent="0" marL="0">
+            <a:pPr marL="0" indent="0" algn="ctr">
               <a:buNone/>
             </a:pPr>
             <a:r>
@@ -18516,6 +17916,7 @@
         <a:solidFill>
           <a:srgbClr val="FFFFFF"/>
         </a:solidFill>
+        <a:effectLst/>
       </p:bgPr>
     </p:bg>
     <p:spTree>
@@ -18553,7 +17954,7 @@
           <a:bodyPr wrap="square" lIns="0" tIns="0" rIns="0" bIns="0" rtlCol="0" anchor="ctr"/>
           <a:lstStyle/>
           <a:p>
-            <a:pPr indent="0" marL="0">
+            <a:pPr marL="0" indent="0">
               <a:buNone/>
             </a:pPr>
             <a:r>
@@ -18592,11 +17993,11 @@
           <a:bodyPr wrap="square" lIns="0" tIns="0" rIns="0" bIns="0" rtlCol="0" anchor="ctr"/>
           <a:lstStyle/>
           <a:p>
-            <a:pPr indent="0" marL="0">
-              <a:buNone/>
-            </a:pPr>
-            <a:r>
-              <a:rPr lang="en-US" sz="1300" i="1" spc="200" kern="0" dirty="0">
+            <a:pPr marL="0" indent="0">
+              <a:buNone/>
+            </a:pPr>
+            <a:r>
+              <a:rPr lang="en-US" sz="1300" i="1" kern="0" spc="200" dirty="0">
                 <a:solidFill>
                   <a:srgbClr val="686869"/>
                 </a:solidFill>
@@ -18653,7 +18054,7 @@
           <a:bodyPr wrap="square" lIns="0" tIns="0" rIns="0" bIns="0" rtlCol="0" anchor="ctr"/>
           <a:lstStyle/>
           <a:p>
-            <a:pPr indent="0" marL="0">
+            <a:pPr marL="0" indent="0">
               <a:buNone/>
             </a:pPr>
             <a:r>
@@ -18689,7 +18090,7 @@
           <a:bodyPr wrap="square" lIns="0" tIns="0" rIns="0" bIns="0" rtlCol="0" anchor="ctr"/>
           <a:lstStyle/>
           <a:p>
-            <a:pPr indent="0" marL="0">
+            <a:pPr marL="0" indent="0">
               <a:buNone/>
             </a:pPr>
             <a:r>
@@ -18728,7 +18129,7 @@
             <a:prstDash val="solid"/>
           </a:ln>
           <a:effectLst>
-            <a:outerShdw sx="100000" sy="100000" kx="0" ky="0" algn="bl" rotWithShape="0" blurRad="101600" dist="25400" dir="5400000">
+            <a:outerShdw blurRad="101600" dist="25400" dir="5400000" algn="bl" rotWithShape="0">
               <a:srgbClr val="000000">
                 <a:alpha val="6000"/>
               </a:srgbClr>
@@ -18738,14 +18139,14 @@
       </p:sp>
       <p:pic>
         <p:nvPicPr>
-          <p:cNvPr id="8" name="Image 0" descr="preencoded.png">    </p:cNvPr>
+          <p:cNvPr id="8" name="Image 0" descr="preencoded.png"/>
           <p:cNvPicPr>
             <a:picLocks noChangeAspect="1"/>
           </p:cNvPicPr>
           <p:nvPr/>
         </p:nvPicPr>
         <p:blipFill>
-          <a:blip r:embed="rId1"/>
+          <a:blip r:embed="rId3"/>
           <a:stretch>
             <a:fillRect/>
           </a:stretch>
@@ -18781,7 +18182,7 @@
           <a:bodyPr wrap="square" lIns="0" tIns="0" rIns="0" bIns="0" rtlCol="0" anchor="ctr"/>
           <a:lstStyle/>
           <a:p>
-            <a:pPr indent="0" marL="0">
+            <a:pPr marL="0" indent="0">
               <a:buNone/>
             </a:pPr>
             <a:r>
@@ -18837,7 +18238,7 @@
           <a:bodyPr wrap="square" lIns="0" tIns="0" rIns="0" bIns="0" rtlCol="0" anchor="ctr"/>
           <a:lstStyle/>
           <a:p>
-            <a:pPr algn="ctr" indent="0" marL="0">
+            <a:pPr marL="0" indent="0" algn="ctr">
               <a:buNone/>
             </a:pPr>
             <a:r>
@@ -18876,7 +18277,7 @@
           <a:bodyPr wrap="square" lIns="0" tIns="0" rIns="0" bIns="0" rtlCol="0" anchor="ctr"/>
           <a:lstStyle/>
           <a:p>
-            <a:pPr indent="0" marL="0">
+            <a:pPr marL="0" indent="0">
               <a:buNone/>
             </a:pPr>
             <a:r>
@@ -18912,7 +18313,7 @@
           <a:bodyPr wrap="square" lIns="0" tIns="0" rIns="0" bIns="0" rtlCol="0" anchor="ctr"/>
           <a:lstStyle/>
           <a:p>
-            <a:pPr indent="0" marL="0">
+            <a:pPr marL="0" indent="0">
               <a:buNone/>
             </a:pPr>
             <a:r>
@@ -18968,7 +18369,7 @@
           <a:bodyPr wrap="square" lIns="0" tIns="0" rIns="0" bIns="0" rtlCol="0" anchor="ctr"/>
           <a:lstStyle/>
           <a:p>
-            <a:pPr algn="ctr" indent="0" marL="0">
+            <a:pPr marL="0" indent="0" algn="ctr">
               <a:buNone/>
             </a:pPr>
             <a:r>
@@ -19007,7 +18408,7 @@
           <a:bodyPr wrap="square" lIns="0" tIns="0" rIns="0" bIns="0" rtlCol="0" anchor="ctr"/>
           <a:lstStyle/>
           <a:p>
-            <a:pPr indent="0" marL="0">
+            <a:pPr marL="0" indent="0">
               <a:buNone/>
             </a:pPr>
             <a:r>
@@ -19043,7 +18444,7 @@
           <a:bodyPr wrap="square" lIns="0" tIns="0" rIns="0" bIns="0" rtlCol="0" anchor="ctr"/>
           <a:lstStyle/>
           <a:p>
-            <a:pPr indent="0" marL="0">
+            <a:pPr marL="0" indent="0">
               <a:buNone/>
             </a:pPr>
             <a:r>
@@ -19099,7 +18500,7 @@
           <a:bodyPr wrap="square" lIns="0" tIns="0" rIns="0" bIns="0" rtlCol="0" anchor="ctr"/>
           <a:lstStyle/>
           <a:p>
-            <a:pPr algn="ctr" indent="0" marL="0">
+            <a:pPr marL="0" indent="0" algn="ctr">
               <a:buNone/>
             </a:pPr>
             <a:r>
@@ -19138,7 +18539,7 @@
           <a:bodyPr wrap="square" lIns="0" tIns="0" rIns="0" bIns="0" rtlCol="0" anchor="ctr"/>
           <a:lstStyle/>
           <a:p>
-            <a:pPr indent="0" marL="0">
+            <a:pPr marL="0" indent="0">
               <a:buNone/>
             </a:pPr>
             <a:r>
@@ -19174,7 +18575,7 @@
           <a:bodyPr wrap="square" lIns="0" tIns="0" rIns="0" bIns="0" rtlCol="0" anchor="ctr"/>
           <a:lstStyle/>
           <a:p>
-            <a:pPr indent="0" marL="0">
+            <a:pPr marL="0" indent="0">
               <a:buNone/>
             </a:pPr>
             <a:r>
@@ -19230,7 +18631,7 @@
           <a:bodyPr wrap="square" lIns="0" tIns="0" rIns="0" bIns="0" rtlCol="0" anchor="ctr"/>
           <a:lstStyle/>
           <a:p>
-            <a:pPr algn="ctr" indent="0" marL="0">
+            <a:pPr marL="0" indent="0" algn="ctr">
               <a:buNone/>
             </a:pPr>
             <a:r>
@@ -19269,7 +18670,7 @@
           <a:bodyPr wrap="square" lIns="0" tIns="0" rIns="0" bIns="0" rtlCol="0" anchor="ctr"/>
           <a:lstStyle/>
           <a:p>
-            <a:pPr indent="0" marL="0">
+            <a:pPr marL="0" indent="0">
               <a:buNone/>
             </a:pPr>
             <a:r>
@@ -19305,7 +18706,7 @@
           <a:bodyPr wrap="square" lIns="0" tIns="0" rIns="0" bIns="0" rtlCol="0" anchor="ctr"/>
           <a:lstStyle/>
           <a:p>
-            <a:pPr indent="0" marL="0">
+            <a:pPr marL="0" indent="0">
               <a:buNone/>
             </a:pPr>
             <a:r>
@@ -19344,7 +18745,7 @@
             <a:prstDash val="solid"/>
           </a:ln>
           <a:effectLst>
-            <a:outerShdw sx="100000" sy="100000" kx="0" ky="0" algn="bl" rotWithShape="0" blurRad="101600" dist="25400" dir="5400000">
+            <a:outerShdw blurRad="101600" dist="25400" dir="5400000" algn="bl" rotWithShape="0">
               <a:srgbClr val="000000">
                 <a:alpha val="6000"/>
               </a:srgbClr>
@@ -19354,14 +18755,14 @@
       </p:sp>
       <p:pic>
         <p:nvPicPr>
-          <p:cNvPr id="27" name="Image 1" descr="preencoded.png">    </p:cNvPr>
+          <p:cNvPr id="27" name="Image 1" descr="preencoded.png"/>
           <p:cNvPicPr>
             <a:picLocks noChangeAspect="1"/>
           </p:cNvPicPr>
           <p:nvPr/>
         </p:nvPicPr>
         <p:blipFill>
-          <a:blip r:embed="rId2"/>
+          <a:blip r:embed="rId4"/>
           <a:stretch>
             <a:fillRect/>
           </a:stretch>
@@ -19397,7 +18798,7 @@
           <a:bodyPr wrap="square" lIns="0" tIns="0" rIns="0" bIns="0" rtlCol="0" anchor="ctr"/>
           <a:lstStyle/>
           <a:p>
-            <a:pPr indent="0" marL="0">
+            <a:pPr marL="0" indent="0">
               <a:buNone/>
             </a:pPr>
             <a:r>
@@ -19453,7 +18854,7 @@
           <a:bodyPr wrap="square" lIns="0" tIns="0" rIns="0" bIns="0" rtlCol="0" anchor="ctr"/>
           <a:lstStyle/>
           <a:p>
-            <a:pPr algn="ctr" indent="0" marL="0">
+            <a:pPr marL="0" indent="0" algn="ctr">
               <a:buNone/>
             </a:pPr>
             <a:r>
@@ -19492,7 +18893,7 @@
           <a:bodyPr wrap="square" lIns="0" tIns="0" rIns="0" bIns="0" rtlCol="0" anchor="ctr"/>
           <a:lstStyle/>
           <a:p>
-            <a:pPr indent="0" marL="0">
+            <a:pPr marL="0" indent="0">
               <a:buNone/>
             </a:pPr>
             <a:r>
@@ -19528,7 +18929,7 @@
           <a:bodyPr wrap="square" lIns="0" tIns="0" rIns="0" bIns="0" rtlCol="0" anchor="ctr"/>
           <a:lstStyle/>
           <a:p>
-            <a:pPr indent="0" marL="0">
+            <a:pPr marL="0" indent="0">
               <a:buNone/>
             </a:pPr>
             <a:r>
@@ -19584,7 +18985,7 @@
           <a:bodyPr wrap="square" lIns="0" tIns="0" rIns="0" bIns="0" rtlCol="0" anchor="ctr"/>
           <a:lstStyle/>
           <a:p>
-            <a:pPr algn="ctr" indent="0" marL="0">
+            <a:pPr marL="0" indent="0" algn="ctr">
               <a:buNone/>
             </a:pPr>
             <a:r>
@@ -19623,7 +19024,7 @@
           <a:bodyPr wrap="square" lIns="0" tIns="0" rIns="0" bIns="0" rtlCol="0" anchor="ctr"/>
           <a:lstStyle/>
           <a:p>
-            <a:pPr indent="0" marL="0">
+            <a:pPr marL="0" indent="0">
               <a:buNone/>
             </a:pPr>
             <a:r>
@@ -19659,7 +19060,7 @@
           <a:bodyPr wrap="square" lIns="0" tIns="0" rIns="0" bIns="0" rtlCol="0" anchor="ctr"/>
           <a:lstStyle/>
           <a:p>
-            <a:pPr indent="0" marL="0">
+            <a:pPr marL="0" indent="0">
               <a:buNone/>
             </a:pPr>
             <a:r>
@@ -19715,7 +19116,7 @@
           <a:bodyPr wrap="square" lIns="0" tIns="0" rIns="0" bIns="0" rtlCol="0" anchor="ctr"/>
           <a:lstStyle/>
           <a:p>
-            <a:pPr algn="ctr" indent="0" marL="0">
+            <a:pPr marL="0" indent="0" algn="ctr">
               <a:buNone/>
             </a:pPr>
             <a:r>
@@ -19754,7 +19155,7 @@
           <a:bodyPr wrap="square" lIns="0" tIns="0" rIns="0" bIns="0" rtlCol="0" anchor="ctr"/>
           <a:lstStyle/>
           <a:p>
-            <a:pPr indent="0" marL="0">
+            <a:pPr marL="0" indent="0">
               <a:buNone/>
             </a:pPr>
             <a:r>
@@ -19790,7 +19191,7 @@
           <a:bodyPr wrap="square" lIns="0" tIns="0" rIns="0" bIns="0" rtlCol="0" anchor="ctr"/>
           <a:lstStyle/>
           <a:p>
-            <a:pPr indent="0" marL="0">
+            <a:pPr marL="0" indent="0">
               <a:buNone/>
             </a:pPr>
             <a:r>
@@ -19846,7 +19247,7 @@
           <a:bodyPr wrap="square" lIns="0" tIns="0" rIns="0" bIns="0" rtlCol="0" anchor="ctr"/>
           <a:lstStyle/>
           <a:p>
-            <a:pPr algn="ctr" indent="0" marL="0">
+            <a:pPr marL="0" indent="0" algn="ctr">
               <a:buNone/>
             </a:pPr>
             <a:r>
@@ -19885,7 +19286,7 @@
           <a:bodyPr wrap="square" lIns="0" tIns="0" rIns="0" bIns="0" rtlCol="0" anchor="ctr"/>
           <a:lstStyle/>
           <a:p>
-            <a:pPr indent="0" marL="0">
+            <a:pPr marL="0" indent="0">
               <a:buNone/>
             </a:pPr>
             <a:r>
@@ -19921,7 +19322,7 @@
           <a:bodyPr wrap="square" lIns="0" tIns="0" rIns="0" bIns="0" rtlCol="0" anchor="ctr"/>
           <a:lstStyle/>
           <a:p>
-            <a:pPr indent="0" marL="0">
+            <a:pPr marL="0" indent="0">
               <a:buNone/>
             </a:pPr>
             <a:r>
@@ -19957,7 +19358,7 @@
           <a:bodyPr wrap="square" lIns="0" tIns="0" rIns="0" bIns="0" rtlCol="0" anchor="ctr"/>
           <a:lstStyle/>
           <a:p>
-            <a:pPr algn="r" indent="0" marL="0">
+            <a:pPr marL="0" indent="0" algn="r">
               <a:buNone/>
             </a:pPr>
             <a:r>
@@ -19996,7 +19397,7 @@
           <a:bodyPr wrap="square" lIns="0" tIns="0" rIns="0" bIns="0" rtlCol="0" anchor="ctr"/>
           <a:lstStyle/>
           <a:p>
-            <a:pPr indent="0" marL="0">
+            <a:pPr marL="0" indent="0">
               <a:buNone/>
             </a:pPr>
             <a:r>
@@ -20027,6 +19428,7 @@
         <a:solidFill>
           <a:srgbClr val="FFFFFF"/>
         </a:solidFill>
+        <a:effectLst/>
       </p:bgPr>
     </p:bg>
     <p:spTree>
@@ -20064,7 +19466,7 @@
           <a:bodyPr wrap="square" lIns="0" tIns="0" rIns="0" bIns="0" rtlCol="0" anchor="ctr"/>
           <a:lstStyle/>
           <a:p>
-            <a:pPr indent="0" marL="0">
+            <a:pPr marL="0" indent="0">
               <a:buNone/>
             </a:pPr>
             <a:r>
@@ -20103,11 +19505,11 @@
           <a:bodyPr wrap="square" lIns="0" tIns="0" rIns="0" bIns="0" rtlCol="0" anchor="ctr"/>
           <a:lstStyle/>
           <a:p>
-            <a:pPr indent="0" marL="0">
-              <a:buNone/>
-            </a:pPr>
-            <a:r>
-              <a:rPr lang="en-US" sz="1300" i="1" spc="200" kern="0" dirty="0">
+            <a:pPr marL="0" indent="0">
+              <a:buNone/>
+            </a:pPr>
+            <a:r>
+              <a:rPr lang="en-US" sz="1300" i="1" kern="0" spc="200" dirty="0">
                 <a:solidFill>
                   <a:srgbClr val="686869"/>
                 </a:solidFill>
@@ -20164,7 +19566,7 @@
           <a:bodyPr wrap="square" lIns="0" tIns="0" rIns="0" bIns="0" rtlCol="0" anchor="ctr"/>
           <a:lstStyle/>
           <a:p>
-            <a:pPr indent="0" marL="0">
+            <a:pPr marL="0" indent="0">
               <a:buNone/>
             </a:pPr>
             <a:r>
@@ -20200,7 +19602,7 @@
           <a:bodyPr wrap="square" lIns="0" tIns="0" rIns="0" bIns="0" rtlCol="0" anchor="ctr"/>
           <a:lstStyle/>
           <a:p>
-            <a:pPr indent="0" marL="0">
+            <a:pPr marL="0" indent="0">
               <a:buNone/>
             </a:pPr>
             <a:r>
@@ -20239,7 +19641,7 @@
             <a:prstDash val="solid"/>
           </a:ln>
           <a:effectLst>
-            <a:outerShdw sx="100000" sy="100000" kx="0" ky="0" algn="bl" rotWithShape="0" blurRad="101600" dist="25400" dir="5400000">
+            <a:outerShdw blurRad="101600" dist="25400" dir="5400000" algn="bl" rotWithShape="0">
               <a:srgbClr val="000000">
                 <a:alpha val="6000"/>
               </a:srgbClr>
@@ -20288,11 +19690,11 @@
           <a:bodyPr wrap="square" lIns="0" tIns="0" rIns="0" bIns="0" rtlCol="0" anchor="ctr"/>
           <a:lstStyle/>
           <a:p>
-            <a:pPr indent="0" marL="0">
-              <a:buNone/>
-            </a:pPr>
-            <a:r>
-              <a:rPr lang="en-US" sz="900" spc="300" kern="0" dirty="0">
+            <a:pPr marL="0" indent="0">
+              <a:buNone/>
+            </a:pPr>
+            <a:r>
+              <a:rPr lang="en-US" sz="900" kern="0" spc="300" dirty="0">
                 <a:solidFill>
                   <a:srgbClr val="DAD9D6"/>
                 </a:solidFill>
@@ -20324,7 +19726,7 @@
           <a:bodyPr wrap="square" lIns="0" tIns="0" rIns="0" bIns="0" rtlCol="0" anchor="ctr"/>
           <a:lstStyle/>
           <a:p>
-            <a:pPr indent="0" marL="0">
+            <a:pPr marL="0" indent="0">
               <a:buNone/>
             </a:pPr>
             <a:r>
@@ -20344,14 +19746,14 @@
       </p:sp>
       <p:pic>
         <p:nvPicPr>
-          <p:cNvPr id="11" name="Image 0" descr="preencoded.png">    </p:cNvPr>
+          <p:cNvPr id="11" name="Image 0" descr="preencoded.png"/>
           <p:cNvPicPr>
             <a:picLocks noChangeAspect="1"/>
           </p:cNvPicPr>
           <p:nvPr/>
         </p:nvPicPr>
         <p:blipFill>
-          <a:blip r:embed="rId1"/>
+          <a:blip r:embed="rId3"/>
           <a:stretch>
             <a:fillRect/>
           </a:stretch>
@@ -20387,7 +19789,7 @@
           <a:bodyPr wrap="square" lIns="0" tIns="0" rIns="0" bIns="0" rtlCol="0" anchor="ctr"/>
           <a:lstStyle/>
           <a:p>
-            <a:pPr indent="0" marL="0">
+            <a:pPr marL="0" indent="0">
               <a:buNone/>
             </a:pPr>
             <a:r>
@@ -20423,7 +19825,7 @@
           <a:bodyPr wrap="square" lIns="0" tIns="0" rIns="0" bIns="0" rtlCol="0" anchor="ctr"/>
           <a:lstStyle/>
           <a:p>
-            <a:pPr indent="0" marL="0">
+            <a:pPr marL="0" indent="0">
               <a:buNone/>
             </a:pPr>
             <a:r>
@@ -20484,11 +19886,11 @@
           <a:bodyPr wrap="square" lIns="0" tIns="0" rIns="0" bIns="0" rtlCol="0" anchor="ctr"/>
           <a:lstStyle/>
           <a:p>
-            <a:pPr indent="0" marL="0">
-              <a:buNone/>
-            </a:pPr>
-            <a:r>
-              <a:rPr lang="en-US" sz="900" spc="200" kern="0" dirty="0">
+            <a:pPr marL="0" indent="0">
+              <a:buNone/>
+            </a:pPr>
+            <a:r>
+              <a:rPr lang="en-US" sz="900" kern="0" spc="200" dirty="0">
                 <a:solidFill>
                   <a:srgbClr val="CEB4A9"/>
                 </a:solidFill>
@@ -20520,7 +19922,7 @@
           <a:bodyPr wrap="square" lIns="0" tIns="0" rIns="0" bIns="0" rtlCol="0" anchor="ctr"/>
           <a:lstStyle/>
           <a:p>
-            <a:pPr indent="0" marL="0">
+            <a:pPr marL="0" indent="0">
               <a:buNone/>
             </a:pPr>
             <a:r>
@@ -20556,7 +19958,7 @@
           <a:bodyPr wrap="square" lIns="0" tIns="0" rIns="0" bIns="0" rtlCol="0" anchor="ctr"/>
           <a:lstStyle/>
           <a:p>
-            <a:pPr indent="0" marL="0">
+            <a:pPr marL="0" indent="0">
               <a:buNone/>
             </a:pPr>
             <a:r>
@@ -20592,11 +19994,11 @@
           <a:bodyPr wrap="square" lIns="0" tIns="0" rIns="0" bIns="0" rtlCol="0" anchor="ctr"/>
           <a:lstStyle/>
           <a:p>
-            <a:pPr indent="0" marL="0">
-              <a:buNone/>
-            </a:pPr>
-            <a:r>
-              <a:rPr lang="en-US" sz="900" spc="200" kern="0" dirty="0">
+            <a:pPr marL="0" indent="0">
+              <a:buNone/>
+            </a:pPr>
+            <a:r>
+              <a:rPr lang="en-US" sz="900" kern="0" spc="200" dirty="0">
                 <a:solidFill>
                   <a:srgbClr val="CEB4A9"/>
                 </a:solidFill>
@@ -20653,7 +20055,7 @@
           <a:bodyPr wrap="square" lIns="0" tIns="0" rIns="0" bIns="0" rtlCol="0" anchor="ctr"/>
           <a:lstStyle/>
           <a:p>
-            <a:pPr algn="ctr" indent="0" marL="0">
+            <a:pPr marL="0" indent="0" algn="ctr">
               <a:buNone/>
             </a:pPr>
             <a:r>
@@ -20712,7 +20114,7 @@
           <a:bodyPr wrap="square" lIns="0" tIns="0" rIns="0" bIns="0" rtlCol="0" anchor="ctr"/>
           <a:lstStyle/>
           <a:p>
-            <a:pPr algn="ctr" indent="0" marL="0">
+            <a:pPr marL="0" indent="0" algn="ctr">
               <a:buNone/>
             </a:pPr>
             <a:r>
@@ -20751,7 +20153,7 @@
             <a:prstDash val="solid"/>
           </a:ln>
           <a:effectLst>
-            <a:outerShdw sx="100000" sy="100000" kx="0" ky="0" algn="bl" rotWithShape="0" blurRad="101600" dist="25400" dir="5400000">
+            <a:outerShdw blurRad="101600" dist="25400" dir="5400000" algn="bl" rotWithShape="0">
               <a:srgbClr val="000000">
                 <a:alpha val="6000"/>
               </a:srgbClr>
@@ -20800,11 +20202,11 @@
           <a:bodyPr wrap="square" lIns="0" tIns="0" rIns="0" bIns="0" rtlCol="0" anchor="ctr"/>
           <a:lstStyle/>
           <a:p>
-            <a:pPr indent="0" marL="0">
-              <a:buNone/>
-            </a:pPr>
-            <a:r>
-              <a:rPr lang="en-US" sz="900" spc="300" kern="0" dirty="0">
+            <a:pPr marL="0" indent="0">
+              <a:buNone/>
+            </a:pPr>
+            <a:r>
+              <a:rPr lang="en-US" sz="900" kern="0" spc="300" dirty="0">
                 <a:solidFill>
                   <a:srgbClr val="DAD9D6"/>
                 </a:solidFill>
@@ -20836,7 +20238,7 @@
           <a:bodyPr wrap="square" lIns="0" tIns="0" rIns="0" bIns="0" rtlCol="0" anchor="ctr"/>
           <a:lstStyle/>
           <a:p>
-            <a:pPr indent="0" marL="0">
+            <a:pPr marL="0" indent="0">
               <a:buNone/>
             </a:pPr>
             <a:r>
@@ -20856,14 +20258,14 @@
       </p:sp>
       <p:pic>
         <p:nvPicPr>
-          <p:cNvPr id="27" name="Image 1" descr="preencoded.png">    </p:cNvPr>
+          <p:cNvPr id="27" name="Image 1" descr="preencoded.png"/>
           <p:cNvPicPr>
             <a:picLocks noChangeAspect="1"/>
           </p:cNvPicPr>
           <p:nvPr/>
         </p:nvPicPr>
         <p:blipFill>
-          <a:blip r:embed="rId2"/>
+          <a:blip r:embed="rId4"/>
           <a:stretch>
             <a:fillRect/>
           </a:stretch>
@@ -20899,7 +20301,7 @@
           <a:bodyPr wrap="square" lIns="0" tIns="0" rIns="0" bIns="0" rtlCol="0" anchor="ctr"/>
           <a:lstStyle/>
           <a:p>
-            <a:pPr indent="0" marL="0">
+            <a:pPr marL="0" indent="0">
               <a:buNone/>
             </a:pPr>
             <a:r>
@@ -20935,7 +20337,7 @@
           <a:bodyPr wrap="square" lIns="0" tIns="0" rIns="0" bIns="0" rtlCol="0" anchor="ctr"/>
           <a:lstStyle/>
           <a:p>
-            <a:pPr indent="0" marL="0">
+            <a:pPr marL="0" indent="0">
               <a:buNone/>
             </a:pPr>
             <a:r>
@@ -20996,11 +20398,11 @@
           <a:bodyPr wrap="square" lIns="0" tIns="0" rIns="0" bIns="0" rtlCol="0" anchor="ctr"/>
           <a:lstStyle/>
           <a:p>
-            <a:pPr indent="0" marL="0">
-              <a:buNone/>
-            </a:pPr>
-            <a:r>
-              <a:rPr lang="en-US" sz="900" spc="200" kern="0" dirty="0">
+            <a:pPr marL="0" indent="0">
+              <a:buNone/>
+            </a:pPr>
+            <a:r>
+              <a:rPr lang="en-US" sz="900" kern="0" spc="200" dirty="0">
                 <a:solidFill>
                   <a:srgbClr val="CEB4A9"/>
                 </a:solidFill>
@@ -21032,7 +20434,7 @@
           <a:bodyPr wrap="square" lIns="0" tIns="0" rIns="0" bIns="0" rtlCol="0" anchor="ctr"/>
           <a:lstStyle/>
           <a:p>
-            <a:pPr indent="0" marL="0">
+            <a:pPr marL="0" indent="0">
               <a:buNone/>
             </a:pPr>
             <a:r>
@@ -21068,7 +20470,7 @@
           <a:bodyPr wrap="square" lIns="0" tIns="0" rIns="0" bIns="0" rtlCol="0" anchor="ctr"/>
           <a:lstStyle/>
           <a:p>
-            <a:pPr indent="0" marL="0">
+            <a:pPr marL="0" indent="0">
               <a:buNone/>
             </a:pPr>
             <a:r>
@@ -21104,11 +20506,11 @@
           <a:bodyPr wrap="square" lIns="0" tIns="0" rIns="0" bIns="0" rtlCol="0" anchor="ctr"/>
           <a:lstStyle/>
           <a:p>
-            <a:pPr indent="0" marL="0">
-              <a:buNone/>
-            </a:pPr>
-            <a:r>
-              <a:rPr lang="en-US" sz="900" spc="200" kern="0" dirty="0">
+            <a:pPr marL="0" indent="0">
+              <a:buNone/>
+            </a:pPr>
+            <a:r>
+              <a:rPr lang="en-US" sz="900" kern="0" spc="200" dirty="0">
                 <a:solidFill>
                   <a:srgbClr val="CEB4A9"/>
                 </a:solidFill>
@@ -21165,7 +20567,7 @@
           <a:bodyPr wrap="square" lIns="0" tIns="0" rIns="0" bIns="0" rtlCol="0" anchor="ctr"/>
           <a:lstStyle/>
           <a:p>
-            <a:pPr algn="ctr" indent="0" marL="0">
+            <a:pPr marL="0" indent="0" algn="ctr">
               <a:buNone/>
             </a:pPr>
             <a:r>
@@ -21224,7 +20626,7 @@
           <a:bodyPr wrap="square" lIns="0" tIns="0" rIns="0" bIns="0" rtlCol="0" anchor="ctr"/>
           <a:lstStyle/>
           <a:p>
-            <a:pPr algn="ctr" indent="0" marL="0">
+            <a:pPr marL="0" indent="0" algn="ctr">
               <a:buNone/>
             </a:pPr>
             <a:r>
@@ -21263,7 +20665,7 @@
             <a:prstDash val="solid"/>
           </a:ln>
           <a:effectLst>
-            <a:outerShdw sx="100000" sy="100000" kx="0" ky="0" algn="bl" rotWithShape="0" blurRad="101600" dist="25400" dir="5400000">
+            <a:outerShdw blurRad="101600" dist="25400" dir="5400000" algn="bl" rotWithShape="0">
               <a:srgbClr val="000000">
                 <a:alpha val="6000"/>
               </a:srgbClr>
@@ -21312,11 +20714,11 @@
           <a:bodyPr wrap="square" lIns="0" tIns="0" rIns="0" bIns="0" rtlCol="0" anchor="ctr"/>
           <a:lstStyle/>
           <a:p>
-            <a:pPr indent="0" marL="0">
-              <a:buNone/>
-            </a:pPr>
-            <a:r>
-              <a:rPr lang="en-US" sz="900" spc="300" kern="0" dirty="0">
+            <a:pPr marL="0" indent="0">
+              <a:buNone/>
+            </a:pPr>
+            <a:r>
+              <a:rPr lang="en-US" sz="900" kern="0" spc="300" dirty="0">
                 <a:solidFill>
                   <a:srgbClr val="DAD9D6"/>
                 </a:solidFill>
@@ -21348,7 +20750,7 @@
           <a:bodyPr wrap="square" lIns="0" tIns="0" rIns="0" bIns="0" rtlCol="0" anchor="ctr"/>
           <a:lstStyle/>
           <a:p>
-            <a:pPr indent="0" marL="0">
+            <a:pPr marL="0" indent="0">
               <a:buNone/>
             </a:pPr>
             <a:r>
@@ -21368,14 +20770,14 @@
       </p:sp>
       <p:pic>
         <p:nvPicPr>
-          <p:cNvPr id="43" name="Image 2" descr="preencoded.png">    </p:cNvPr>
+          <p:cNvPr id="43" name="Image 2" descr="preencoded.png"/>
           <p:cNvPicPr>
             <a:picLocks noChangeAspect="1"/>
           </p:cNvPicPr>
           <p:nvPr/>
         </p:nvPicPr>
         <p:blipFill>
-          <a:blip r:embed="rId3"/>
+          <a:blip r:embed="rId5"/>
           <a:stretch>
             <a:fillRect/>
           </a:stretch>
@@ -21411,7 +20813,7 @@
           <a:bodyPr wrap="square" lIns="0" tIns="0" rIns="0" bIns="0" rtlCol="0" anchor="ctr"/>
           <a:lstStyle/>
           <a:p>
-            <a:pPr indent="0" marL="0">
+            <a:pPr marL="0" indent="0">
               <a:buNone/>
             </a:pPr>
             <a:r>
@@ -21447,7 +20849,7 @@
           <a:bodyPr wrap="square" lIns="0" tIns="0" rIns="0" bIns="0" rtlCol="0" anchor="ctr"/>
           <a:lstStyle/>
           <a:p>
-            <a:pPr indent="0" marL="0">
+            <a:pPr marL="0" indent="0">
               <a:buNone/>
             </a:pPr>
             <a:r>
@@ -21508,11 +20910,11 @@
           <a:bodyPr wrap="square" lIns="0" tIns="0" rIns="0" bIns="0" rtlCol="0" anchor="ctr"/>
           <a:lstStyle/>
           <a:p>
-            <a:pPr indent="0" marL="0">
-              <a:buNone/>
-            </a:pPr>
-            <a:r>
-              <a:rPr lang="en-US" sz="900" spc="200" kern="0" dirty="0">
+            <a:pPr marL="0" indent="0">
+              <a:buNone/>
+            </a:pPr>
+            <a:r>
+              <a:rPr lang="en-US" sz="900" kern="0" spc="200" dirty="0">
                 <a:solidFill>
                   <a:srgbClr val="CEB4A9"/>
                 </a:solidFill>
@@ -21544,7 +20946,7 @@
           <a:bodyPr wrap="square" lIns="0" tIns="0" rIns="0" bIns="0" rtlCol="0" anchor="ctr"/>
           <a:lstStyle/>
           <a:p>
-            <a:pPr indent="0" marL="0">
+            <a:pPr marL="0" indent="0">
               <a:buNone/>
             </a:pPr>
             <a:r>
@@ -21580,7 +20982,7 @@
           <a:bodyPr wrap="square" lIns="0" tIns="0" rIns="0" bIns="0" rtlCol="0" anchor="ctr"/>
           <a:lstStyle/>
           <a:p>
-            <a:pPr indent="0" marL="0">
+            <a:pPr marL="0" indent="0">
               <a:buNone/>
             </a:pPr>
             <a:r>
@@ -21616,11 +21018,11 @@
           <a:bodyPr wrap="square" lIns="0" tIns="0" rIns="0" bIns="0" rtlCol="0" anchor="ctr"/>
           <a:lstStyle/>
           <a:p>
-            <a:pPr indent="0" marL="0">
-              <a:buNone/>
-            </a:pPr>
-            <a:r>
-              <a:rPr lang="en-US" sz="900" spc="200" kern="0" dirty="0">
+            <a:pPr marL="0" indent="0">
+              <a:buNone/>
+            </a:pPr>
+            <a:r>
+              <a:rPr lang="en-US" sz="900" kern="0" spc="200" dirty="0">
                 <a:solidFill>
                   <a:srgbClr val="CEB4A9"/>
                 </a:solidFill>
@@ -21677,7 +21079,7 @@
           <a:bodyPr wrap="square" lIns="0" tIns="0" rIns="0" bIns="0" rtlCol="0" anchor="ctr"/>
           <a:lstStyle/>
           <a:p>
-            <a:pPr algn="ctr" indent="0" marL="0">
+            <a:pPr marL="0" indent="0" algn="ctr">
               <a:buNone/>
             </a:pPr>
             <a:r>
@@ -21736,7 +21138,7 @@
           <a:bodyPr wrap="square" lIns="0" tIns="0" rIns="0" bIns="0" rtlCol="0" anchor="ctr"/>
           <a:lstStyle/>
           <a:p>
-            <a:pPr algn="ctr" indent="0" marL="0">
+            <a:pPr marL="0" indent="0" algn="ctr">
               <a:buNone/>
             </a:pPr>
             <a:r>
@@ -21772,7 +21174,7 @@
           <a:bodyPr wrap="square" lIns="0" tIns="0" rIns="0" bIns="0" rtlCol="0" anchor="ctr"/>
           <a:lstStyle/>
           <a:p>
-            <a:pPr algn="r" indent="0" marL="0">
+            <a:pPr marL="0" indent="0" algn="r">
               <a:buNone/>
             </a:pPr>
             <a:r>
@@ -21811,7 +21213,7 @@
           <a:bodyPr wrap="square" lIns="0" tIns="0" rIns="0" bIns="0" rtlCol="0" anchor="ctr"/>
           <a:lstStyle/>
           <a:p>
-            <a:pPr indent="0" marL="0">
+            <a:pPr marL="0" indent="0">
               <a:buNone/>
             </a:pPr>
             <a:r>
@@ -21842,6 +21244,7 @@
         <a:solidFill>
           <a:srgbClr val="FFFFFF"/>
         </a:solidFill>
+        <a:effectLst/>
       </p:bgPr>
     </p:bg>
     <p:spTree>
@@ -21879,7 +21282,7 @@
           <a:bodyPr wrap="square" lIns="0" tIns="0" rIns="0" bIns="0" rtlCol="0" anchor="ctr"/>
           <a:lstStyle/>
           <a:p>
-            <a:pPr indent="0" marL="0">
+            <a:pPr marL="0" indent="0">
               <a:buNone/>
             </a:pPr>
             <a:r>
@@ -21918,11 +21321,11 @@
           <a:bodyPr wrap="square" lIns="0" tIns="0" rIns="0" bIns="0" rtlCol="0" anchor="ctr"/>
           <a:lstStyle/>
           <a:p>
-            <a:pPr indent="0" marL="0">
-              <a:buNone/>
-            </a:pPr>
-            <a:r>
-              <a:rPr lang="en-US" sz="1300" i="1" spc="200" kern="0" dirty="0">
+            <a:pPr marL="0" indent="0">
+              <a:buNone/>
+            </a:pPr>
+            <a:r>
+              <a:rPr lang="en-US" sz="1300" i="1" kern="0" spc="200" dirty="0">
                 <a:solidFill>
                   <a:srgbClr val="686869"/>
                 </a:solidFill>
@@ -21982,7 +21385,7 @@
             <a:prstDash val="solid"/>
           </a:ln>
           <a:effectLst>
-            <a:outerShdw sx="100000" sy="100000" kx="0" ky="0" algn="bl" rotWithShape="0" blurRad="101600" dist="25400" dir="5400000">
+            <a:outerShdw blurRad="101600" dist="25400" dir="5400000" algn="bl" rotWithShape="0">
               <a:srgbClr val="000000">
                 <a:alpha val="6000"/>
               </a:srgbClr>
@@ -22011,11 +21414,11 @@
           <a:bodyPr wrap="square" lIns="0" tIns="0" rIns="0" bIns="0" rtlCol="0" anchor="ctr"/>
           <a:lstStyle/>
           <a:p>
-            <a:pPr indent="0" marL="0">
-              <a:buNone/>
-            </a:pPr>
-            <a:r>
-              <a:rPr lang="en-US" sz="1200" b="1" spc="200" kern="0" dirty="0">
+            <a:pPr marL="0" indent="0">
+              <a:buNone/>
+            </a:pPr>
+            <a:r>
+              <a:rPr lang="en-US" sz="1200" b="1" kern="0" spc="200" dirty="0">
                 <a:solidFill>
                   <a:srgbClr val="CEB4A9"/>
                 </a:solidFill>
@@ -22072,7 +21475,7 @@
           <a:bodyPr wrap="square" lIns="0" tIns="0" rIns="0" bIns="0" rtlCol="0" anchor="ctr"/>
           <a:lstStyle/>
           <a:p>
-            <a:pPr indent="0" marL="0">
+            <a:pPr marL="0" indent="0">
               <a:lnSpc>
                 <a:spcPts val="1800"/>
               </a:lnSpc>
@@ -22089,7 +21492,7 @@
             <a:endParaRPr lang="en-US" sz="1200" dirty="0"/>
           </a:p>
           <a:p>
-            <a:pPr indent="0" marL="0">
+            <a:pPr marL="0" indent="0">
               <a:lnSpc>
                 <a:spcPts val="1800"/>
               </a:lnSpc>
@@ -22106,7 +21509,7 @@
             <a:endParaRPr lang="en-US" sz="1200" dirty="0"/>
           </a:p>
           <a:p>
-            <a:pPr indent="0" marL="0">
+            <a:pPr marL="0" indent="0">
               <a:lnSpc>
                 <a:spcPts val="1800"/>
               </a:lnSpc>
@@ -22145,7 +21548,7 @@
           <a:bodyPr wrap="square" lIns="0" tIns="0" rIns="0" bIns="0" rtlCol="0" anchor="ctr"/>
           <a:lstStyle/>
           <a:p>
-            <a:pPr indent="0" marL="0">
+            <a:pPr marL="0" indent="0">
               <a:buNone/>
             </a:pPr>
             <a:r>
@@ -22206,7 +21609,7 @@
           <a:bodyPr wrap="square" lIns="0" tIns="0" rIns="0" bIns="0" rtlCol="0" anchor="ctr"/>
           <a:lstStyle/>
           <a:p>
-            <a:pPr indent="0" marL="0">
+            <a:pPr marL="0" indent="0">
               <a:lnSpc>
                 <a:spcPts val="1600"/>
               </a:lnSpc>
@@ -22223,7 +21626,7 @@
             <a:endParaRPr lang="en-US" sz="1100" dirty="0"/>
           </a:p>
           <a:p>
-            <a:pPr indent="0" marL="0">
+            <a:pPr marL="0" indent="0">
               <a:lnSpc>
                 <a:spcPts val="1600"/>
               </a:lnSpc>
@@ -22240,7 +21643,7 @@
             <a:endParaRPr lang="en-US" sz="1100" dirty="0"/>
           </a:p>
           <a:p>
-            <a:pPr indent="0" marL="0">
+            <a:pPr marL="0" indent="0">
               <a:lnSpc>
                 <a:spcPts val="1600"/>
               </a:lnSpc>
@@ -22282,7 +21685,7 @@
             <a:prstDash val="solid"/>
           </a:ln>
           <a:effectLst>
-            <a:outerShdw sx="100000" sy="100000" kx="0" ky="0" algn="bl" rotWithShape="0" blurRad="101600" dist="25400" dir="5400000">
+            <a:outerShdw blurRad="101600" dist="25400" dir="5400000" algn="bl" rotWithShape="0">
               <a:srgbClr val="000000">
                 <a:alpha val="6000"/>
               </a:srgbClr>
@@ -22311,11 +21714,11 @@
           <a:bodyPr wrap="square" lIns="0" tIns="0" rIns="0" bIns="0" rtlCol="0" anchor="ctr"/>
           <a:lstStyle/>
           <a:p>
-            <a:pPr indent="0" marL="0">
-              <a:buNone/>
-            </a:pPr>
-            <a:r>
-              <a:rPr lang="en-US" sz="1200" b="1" spc="200" kern="0" dirty="0">
+            <a:pPr marL="0" indent="0">
+              <a:buNone/>
+            </a:pPr>
+            <a:r>
+              <a:rPr lang="en-US" sz="1200" b="1" kern="0" spc="200" dirty="0">
                 <a:solidFill>
                   <a:srgbClr val="CEB4A9"/>
                 </a:solidFill>
@@ -22347,7 +21750,7 @@
           <a:bodyPr wrap="square" lIns="0" tIns="0" rIns="0" bIns="0" rtlCol="0" anchor="ctr"/>
           <a:lstStyle/>
           <a:p>
-            <a:pPr indent="0" marL="0">
+            <a:pPr marL="0" indent="0">
               <a:buNone/>
             </a:pPr>
             <a:r>
@@ -22383,7 +21786,7 @@
           <a:bodyPr wrap="square" lIns="0" tIns="0" rIns="0" bIns="0" rtlCol="0" anchor="ctr"/>
           <a:lstStyle/>
           <a:p>
-            <a:pPr indent="0" marL="0">
+            <a:pPr marL="0" indent="0">
               <a:buNone/>
             </a:pPr>
             <a:r>
@@ -22419,7 +21822,7 @@
           <a:bodyPr wrap="square" lIns="0" tIns="0" rIns="0" bIns="0" rtlCol="0" anchor="ctr"/>
           <a:lstStyle/>
           <a:p>
-            <a:pPr indent="0" marL="0">
+            <a:pPr marL="0" indent="0">
               <a:buNone/>
             </a:pPr>
             <a:r>
@@ -22455,7 +21858,7 @@
           <a:bodyPr wrap="square" lIns="0" tIns="0" rIns="0" bIns="0" rtlCol="0" anchor="ctr"/>
           <a:lstStyle/>
           <a:p>
-            <a:pPr indent="0" marL="0">
+            <a:pPr marL="0" indent="0">
               <a:buNone/>
             </a:pPr>
             <a:r>
@@ -22491,7 +21894,7 @@
           <a:bodyPr wrap="square" lIns="0" tIns="0" rIns="0" bIns="0" rtlCol="0" anchor="ctr"/>
           <a:lstStyle/>
           <a:p>
-            <a:pPr indent="0" marL="0">
+            <a:pPr marL="0" indent="0">
               <a:buNone/>
             </a:pPr>
             <a:r>
@@ -22527,7 +21930,7 @@
           <a:bodyPr wrap="square" lIns="0" tIns="0" rIns="0" bIns="0" rtlCol="0" anchor="ctr"/>
           <a:lstStyle/>
           <a:p>
-            <a:pPr indent="0" marL="0">
+            <a:pPr marL="0" indent="0">
               <a:buNone/>
             </a:pPr>
             <a:r>
@@ -22563,7 +21966,7 @@
           <a:bodyPr wrap="square" lIns="0" tIns="0" rIns="0" bIns="0" rtlCol="0" anchor="ctr"/>
           <a:lstStyle/>
           <a:p>
-            <a:pPr indent="0" marL="0">
+            <a:pPr marL="0" indent="0">
               <a:buNone/>
             </a:pPr>
             <a:r>
@@ -22599,7 +22002,7 @@
           <a:bodyPr wrap="square" lIns="0" tIns="0" rIns="0" bIns="0" rtlCol="0" anchor="ctr"/>
           <a:lstStyle/>
           <a:p>
-            <a:pPr indent="0" marL="0">
+            <a:pPr marL="0" indent="0">
               <a:buNone/>
             </a:pPr>
             <a:r>
@@ -22635,7 +22038,7 @@
           <a:bodyPr wrap="square" lIns="0" tIns="0" rIns="0" bIns="0" rtlCol="0" anchor="ctr"/>
           <a:lstStyle/>
           <a:p>
-            <a:pPr indent="0" marL="0">
+            <a:pPr marL="0" indent="0">
               <a:buNone/>
             </a:pPr>
             <a:r>
@@ -22671,7 +22074,7 @@
           <a:bodyPr wrap="square" lIns="0" tIns="0" rIns="0" bIns="0" rtlCol="0" anchor="ctr"/>
           <a:lstStyle/>
           <a:p>
-            <a:pPr indent="0" marL="0">
+            <a:pPr marL="0" indent="0">
               <a:buNone/>
             </a:pPr>
             <a:r>
@@ -22707,7 +22110,7 @@
           <a:bodyPr wrap="square" lIns="0" tIns="0" rIns="0" bIns="0" rtlCol="0" anchor="ctr"/>
           <a:lstStyle/>
           <a:p>
-            <a:pPr indent="0" marL="0">
+            <a:pPr marL="0" indent="0">
               <a:buNone/>
             </a:pPr>
             <a:r>
@@ -22743,7 +22146,7 @@
           <a:bodyPr wrap="square" lIns="0" tIns="0" rIns="0" bIns="0" rtlCol="0" anchor="ctr"/>
           <a:lstStyle/>
           <a:p>
-            <a:pPr indent="0" marL="0">
+            <a:pPr marL="0" indent="0">
               <a:buNone/>
             </a:pPr>
             <a:r>
@@ -22779,7 +22182,7 @@
           <a:bodyPr wrap="square" lIns="0" tIns="0" rIns="0" bIns="0" rtlCol="0" anchor="ctr"/>
           <a:lstStyle/>
           <a:p>
-            <a:pPr indent="0" marL="0">
+            <a:pPr marL="0" indent="0">
               <a:buNone/>
             </a:pPr>
             <a:r>
@@ -22815,7 +22218,7 @@
           <a:bodyPr wrap="square" lIns="0" tIns="0" rIns="0" bIns="0" rtlCol="0" anchor="ctr"/>
           <a:lstStyle/>
           <a:p>
-            <a:pPr indent="0" marL="0">
+            <a:pPr marL="0" indent="0">
               <a:buNone/>
             </a:pPr>
             <a:r>
@@ -22851,7 +22254,7 @@
           <a:bodyPr wrap="square" lIns="0" tIns="0" rIns="0" bIns="0" rtlCol="0" anchor="ctr"/>
           <a:lstStyle/>
           <a:p>
-            <a:pPr indent="0" marL="0">
+            <a:pPr marL="0" indent="0">
               <a:buNone/>
             </a:pPr>
             <a:r>
@@ -22887,7 +22290,7 @@
           <a:bodyPr wrap="square" lIns="0" tIns="0" rIns="0" bIns="0" rtlCol="0" anchor="ctr"/>
           <a:lstStyle/>
           <a:p>
-            <a:pPr algn="r" indent="0" marL="0">
+            <a:pPr marL="0" indent="0" algn="r">
               <a:buNone/>
             </a:pPr>
             <a:r>
@@ -22926,7 +22329,7 @@
           <a:bodyPr wrap="square" lIns="0" tIns="0" rIns="0" bIns="0" rtlCol="0" anchor="ctr"/>
           <a:lstStyle/>
           <a:p>
-            <a:pPr indent="0" marL="0">
+            <a:pPr marL="0" indent="0">
               <a:buNone/>
             </a:pPr>
             <a:r>
@@ -22957,6 +22360,7 @@
         <a:solidFill>
           <a:srgbClr val="FFFFFF"/>
         </a:solidFill>
+        <a:effectLst/>
       </p:bgPr>
     </p:bg>
     <p:spTree>
@@ -22994,7 +22398,7 @@
           <a:bodyPr wrap="square" lIns="0" tIns="0" rIns="0" bIns="0" rtlCol="0" anchor="ctr"/>
           <a:lstStyle/>
           <a:p>
-            <a:pPr indent="0" marL="0">
+            <a:pPr marL="0" indent="0">
               <a:buNone/>
             </a:pPr>
             <a:r>
@@ -23033,11 +22437,11 @@
           <a:bodyPr wrap="square" lIns="0" tIns="0" rIns="0" bIns="0" rtlCol="0" anchor="ctr"/>
           <a:lstStyle/>
           <a:p>
-            <a:pPr indent="0" marL="0">
-              <a:buNone/>
-            </a:pPr>
-            <a:r>
-              <a:rPr lang="en-US" sz="1300" i="1" spc="200" kern="0" dirty="0">
+            <a:pPr marL="0" indent="0">
+              <a:buNone/>
+            </a:pPr>
+            <a:r>
+              <a:rPr lang="en-US" sz="1300" i="1" kern="0" spc="200" dirty="0">
                 <a:solidFill>
                   <a:srgbClr val="686869"/>
                 </a:solidFill>
@@ -23097,7 +22501,7 @@
             <a:prstDash val="solid"/>
           </a:ln>
           <a:effectLst>
-            <a:outerShdw sx="100000" sy="100000" kx="0" ky="0" algn="bl" rotWithShape="0" blurRad="101600" dist="25400" dir="5400000">
+            <a:outerShdw blurRad="101600" dist="25400" dir="5400000" algn="bl" rotWithShape="0">
               <a:srgbClr val="000000">
                 <a:alpha val="6000"/>
               </a:srgbClr>
@@ -23132,14 +22536,14 @@
       </p:sp>
       <p:pic>
         <p:nvPicPr>
-          <p:cNvPr id="7" name="Image 0" descr="preencoded.png">    </p:cNvPr>
+          <p:cNvPr id="7" name="Image 0" descr="preencoded.png"/>
           <p:cNvPicPr>
             <a:picLocks noChangeAspect="1"/>
           </p:cNvPicPr>
           <p:nvPr/>
         </p:nvPicPr>
         <p:blipFill>
-          <a:blip r:embed="rId1"/>
+          <a:blip r:embed="rId3"/>
           <a:stretch>
             <a:fillRect/>
           </a:stretch>
@@ -23175,7 +22579,7 @@
           <a:bodyPr wrap="square" lIns="0" tIns="0" rIns="0" bIns="0" rtlCol="0" anchor="ctr"/>
           <a:lstStyle/>
           <a:p>
-            <a:pPr indent="0" marL="0">
+            <a:pPr marL="0" indent="0">
               <a:buNone/>
             </a:pPr>
             <a:r>
@@ -23211,7 +22615,7 @@
           <a:bodyPr wrap="square" lIns="0" tIns="0" rIns="0" bIns="0" rtlCol="0" anchor="ctr"/>
           <a:lstStyle/>
           <a:p>
-            <a:pPr indent="0" marL="0">
+            <a:pPr marL="0" indent="0">
               <a:buNone/>
             </a:pPr>
             <a:r>
@@ -23272,7 +22676,7 @@
           <a:bodyPr wrap="square" lIns="0" tIns="0" rIns="0" bIns="0" rtlCol="0" anchor="ctr"/>
           <a:lstStyle/>
           <a:p>
-            <a:pPr indent="0" marL="0">
+            <a:pPr marL="0" indent="0">
               <a:buNone/>
             </a:pPr>
             <a:r>
@@ -23311,7 +22715,7 @@
           <a:bodyPr wrap="square" lIns="0" tIns="0" rIns="0" bIns="0" rtlCol="0" anchor="ctr"/>
           <a:lstStyle/>
           <a:p>
-            <a:pPr indent="0" marL="0">
+            <a:pPr marL="0" indent="0">
               <a:buNone/>
             </a:pPr>
             <a:r>
@@ -23347,7 +22751,7 @@
           <a:bodyPr wrap="square" lIns="0" tIns="0" rIns="0" bIns="0" rtlCol="0" anchor="ctr"/>
           <a:lstStyle/>
           <a:p>
-            <a:pPr indent="0" marL="0">
+            <a:pPr marL="0" indent="0">
               <a:buNone/>
             </a:pPr>
             <a:r>
@@ -23408,11 +22812,11 @@
           <a:bodyPr wrap="square" lIns="0" tIns="0" rIns="0" bIns="0" rtlCol="0" anchor="ctr"/>
           <a:lstStyle/>
           <a:p>
-            <a:pPr indent="0" marL="0">
-              <a:buNone/>
-            </a:pPr>
-            <a:r>
-              <a:rPr lang="en-US" sz="1100" b="1" spc="200" kern="0" dirty="0">
+            <a:pPr marL="0" indent="0">
+              <a:buNone/>
+            </a:pPr>
+            <a:r>
+              <a:rPr lang="en-US" sz="1100" b="1" kern="0" spc="200" dirty="0">
                 <a:solidFill>
                   <a:srgbClr val="CEB4A9"/>
                 </a:solidFill>
@@ -23444,7 +22848,7 @@
           <a:bodyPr wrap="square" lIns="0" tIns="0" rIns="0" bIns="0" rtlCol="0" anchor="ctr"/>
           <a:lstStyle/>
           <a:p>
-            <a:pPr indent="0" marL="0">
+            <a:pPr marL="0" indent="0">
               <a:buNone/>
             </a:pPr>
             <a:r>
@@ -23505,11 +22909,11 @@
           <a:bodyPr wrap="square" lIns="0" tIns="0" rIns="0" bIns="0" rtlCol="0" anchor="ctr"/>
           <a:lstStyle/>
           <a:p>
-            <a:pPr algn="ctr" indent="0" marL="0">
-              <a:buNone/>
-            </a:pPr>
-            <a:r>
-              <a:rPr lang="en-US" sz="1400" b="1" spc="400" kern="0" dirty="0">
+            <a:pPr marL="0" indent="0" algn="ctr">
+              <a:buNone/>
+            </a:pPr>
+            <a:r>
+              <a:rPr lang="en-US" sz="1400" b="1" kern="0" spc="400" dirty="0">
                 <a:solidFill>
                   <a:srgbClr val="3D3935"/>
                 </a:solidFill>
@@ -23544,7 +22948,7 @@
           <a:bodyPr wrap="square" lIns="0" tIns="0" rIns="0" bIns="0" rtlCol="0" anchor="ctr"/>
           <a:lstStyle/>
           <a:p>
-            <a:pPr indent="0" marL="0">
+            <a:pPr marL="0" indent="0">
               <a:buNone/>
             </a:pPr>
             <a:r>
@@ -23583,6 +22987,13 @@
             <a:prstDash val="solid"/>
           </a:ln>
         </p:spPr>
+        <p:txBody>
+          <a:bodyPr/>
+          <a:lstStyle/>
+          <a:p>
+            <a:endParaRPr lang="zh-TW" altLang="en-US" dirty="0"/>
+          </a:p>
+        </p:txBody>
       </p:sp>
       <p:sp>
         <p:nvSpPr>
@@ -23605,7 +23016,7 @@
           <a:bodyPr wrap="square" lIns="0" tIns="0" rIns="0" bIns="0" rtlCol="0" anchor="ctr"/>
           <a:lstStyle/>
           <a:p>
-            <a:pPr algn="ctr" indent="0" marL="0">
+            <a:pPr marL="0" indent="0" algn="ctr">
               <a:buNone/>
             </a:pPr>
             <a:r>
@@ -23619,6 +23030,39 @@
               </a:rPr>
               <a:t>BM36258896</a:t>
             </a:r>
+            <a:r>
+              <a:rPr lang="en-US" altLang="zh-TW" sz="1400" b="1" dirty="0">
+                <a:solidFill>
+                  <a:srgbClr val="3D3935"/>
+                </a:solidFill>
+                <a:latin typeface="Consolas" pitchFamily="34" charset="0"/>
+                <a:ea typeface="Consolas" pitchFamily="34" charset="-122"/>
+                <a:cs typeface="Consolas" pitchFamily="34" charset="-120"/>
+              </a:rPr>
+              <a:t>(</a:t>
+            </a:r>
+            <a:r>
+              <a:rPr lang="zh-TW" altLang="en-US" sz="1400" b="1" dirty="0">
+                <a:solidFill>
+                  <a:srgbClr val="3D3935"/>
+                </a:solidFill>
+                <a:latin typeface="Consolas" pitchFamily="34" charset="0"/>
+                <a:ea typeface="Consolas" pitchFamily="34" charset="-122"/>
+                <a:cs typeface="Consolas" pitchFamily="34" charset="-120"/>
+              </a:rPr>
+              <a:t>範例</a:t>
+            </a:r>
+            <a:r>
+              <a:rPr lang="en-US" altLang="zh-TW" sz="1400" b="1" dirty="0">
+                <a:solidFill>
+                  <a:srgbClr val="3D3935"/>
+                </a:solidFill>
+                <a:latin typeface="Consolas" pitchFamily="34" charset="0"/>
+                <a:ea typeface="Consolas" pitchFamily="34" charset="-122"/>
+                <a:cs typeface="Consolas" pitchFamily="34" charset="-120"/>
+              </a:rPr>
+              <a:t>)</a:t>
+            </a:r>
             <a:endParaRPr lang="en-US" sz="1400" dirty="0"/>
           </a:p>
         </p:txBody>
@@ -23644,7 +23088,7 @@
           <a:bodyPr wrap="square" lIns="0" tIns="0" rIns="0" bIns="0" rtlCol="0" anchor="ctr"/>
           <a:lstStyle/>
           <a:p>
-            <a:pPr indent="0" marL="0">
+            <a:pPr marL="0" indent="0">
               <a:buNone/>
             </a:pPr>
             <a:r>
@@ -23705,7 +23149,7 @@
           <a:bodyPr wrap="square" lIns="0" tIns="0" rIns="0" bIns="0" rtlCol="0" anchor="ctr"/>
           <a:lstStyle/>
           <a:p>
-            <a:pPr algn="ctr" indent="0" marL="0">
+            <a:pPr marL="0" indent="0" algn="ctr">
               <a:buNone/>
             </a:pPr>
             <a:r>
@@ -23769,11 +23213,11 @@
           <a:bodyPr wrap="square" lIns="0" tIns="0" rIns="0" bIns="0" rtlCol="0" anchor="ctr"/>
           <a:lstStyle/>
           <a:p>
-            <a:pPr indent="0" marL="0">
-              <a:buNone/>
-            </a:pPr>
-            <a:r>
-              <a:rPr lang="en-US" sz="1100" b="1" spc="200" kern="0" dirty="0">
+            <a:pPr marL="0" indent="0">
+              <a:buNone/>
+            </a:pPr>
+            <a:r>
+              <a:rPr lang="en-US" sz="1100" b="1" kern="0" spc="200" dirty="0">
                 <a:solidFill>
                   <a:srgbClr val="CEB4A9"/>
                 </a:solidFill>
@@ -23825,7 +23269,7 @@
           <a:bodyPr wrap="square" lIns="0" tIns="0" rIns="0" bIns="0" rtlCol="0" anchor="ctr"/>
           <a:lstStyle/>
           <a:p>
-            <a:pPr algn="ctr" indent="0" marL="0">
+            <a:pPr marL="0" indent="0" algn="ctr">
               <a:buNone/>
             </a:pPr>
             <a:r>
@@ -23864,7 +23308,7 @@
           <a:bodyPr wrap="square" lIns="0" tIns="0" rIns="0" bIns="0" rtlCol="0" anchor="ctr"/>
           <a:lstStyle/>
           <a:p>
-            <a:pPr indent="0" marL="0">
+            <a:pPr marL="0" indent="0">
               <a:buNone/>
             </a:pPr>
             <a:r>
@@ -23900,7 +23344,7 @@
           <a:bodyPr wrap="square" lIns="0" tIns="0" rIns="0" bIns="0" rtlCol="0" anchor="ctr"/>
           <a:lstStyle/>
           <a:p>
-            <a:pPr indent="0" marL="0">
+            <a:pPr marL="0" indent="0">
               <a:buNone/>
             </a:pPr>
             <a:r>
@@ -23956,7 +23400,7 @@
           <a:bodyPr wrap="square" lIns="0" tIns="0" rIns="0" bIns="0" rtlCol="0" anchor="ctr"/>
           <a:lstStyle/>
           <a:p>
-            <a:pPr algn="ctr" indent="0" marL="0">
+            <a:pPr marL="0" indent="0" algn="ctr">
               <a:buNone/>
             </a:pPr>
             <a:r>
@@ -23995,7 +23439,7 @@
           <a:bodyPr wrap="square" lIns="0" tIns="0" rIns="0" bIns="0" rtlCol="0" anchor="ctr"/>
           <a:lstStyle/>
           <a:p>
-            <a:pPr indent="0" marL="0">
+            <a:pPr marL="0" indent="0">
               <a:buNone/>
             </a:pPr>
             <a:r>
@@ -24031,7 +23475,7 @@
           <a:bodyPr wrap="square" lIns="0" tIns="0" rIns="0" bIns="0" rtlCol="0" anchor="ctr"/>
           <a:lstStyle/>
           <a:p>
-            <a:pPr indent="0" marL="0">
+            <a:pPr marL="0" indent="0">
               <a:buNone/>
             </a:pPr>
             <a:r>
@@ -24087,7 +23531,7 @@
           <a:bodyPr wrap="square" lIns="0" tIns="0" rIns="0" bIns="0" rtlCol="0" anchor="ctr"/>
           <a:lstStyle/>
           <a:p>
-            <a:pPr algn="ctr" indent="0" marL="0">
+            <a:pPr marL="0" indent="0" algn="ctr">
               <a:buNone/>
             </a:pPr>
             <a:r>
@@ -24126,7 +23570,7 @@
           <a:bodyPr wrap="square" lIns="0" tIns="0" rIns="0" bIns="0" rtlCol="0" anchor="ctr"/>
           <a:lstStyle/>
           <a:p>
-            <a:pPr indent="0" marL="0">
+            <a:pPr marL="0" indent="0">
               <a:buNone/>
             </a:pPr>
             <a:r>
@@ -24162,7 +23606,7 @@
           <a:bodyPr wrap="square" lIns="0" tIns="0" rIns="0" bIns="0" rtlCol="0" anchor="ctr"/>
           <a:lstStyle/>
           <a:p>
-            <a:pPr indent="0" marL="0">
+            <a:pPr marL="0" indent="0">
               <a:buNone/>
             </a:pPr>
             <a:r>
@@ -24218,7 +23662,7 @@
           <a:bodyPr wrap="square" lIns="0" tIns="0" rIns="0" bIns="0" rtlCol="0" anchor="ctr"/>
           <a:lstStyle/>
           <a:p>
-            <a:pPr algn="ctr" indent="0" marL="0">
+            <a:pPr marL="0" indent="0" algn="ctr">
               <a:buNone/>
             </a:pPr>
             <a:r>
@@ -24257,7 +23701,7 @@
           <a:bodyPr wrap="square" lIns="0" tIns="0" rIns="0" bIns="0" rtlCol="0" anchor="ctr"/>
           <a:lstStyle/>
           <a:p>
-            <a:pPr indent="0" marL="0">
+            <a:pPr marL="0" indent="0">
               <a:buNone/>
             </a:pPr>
             <a:r>
@@ -24293,7 +23737,7 @@
           <a:bodyPr wrap="square" lIns="0" tIns="0" rIns="0" bIns="0" rtlCol="0" anchor="ctr"/>
           <a:lstStyle/>
           <a:p>
-            <a:pPr indent="0" marL="0">
+            <a:pPr marL="0" indent="0">
               <a:buNone/>
             </a:pPr>
             <a:r>
@@ -24329,7 +23773,7 @@
           <a:bodyPr wrap="square" lIns="0" tIns="0" rIns="0" bIns="0" rtlCol="0" anchor="ctr"/>
           <a:lstStyle/>
           <a:p>
-            <a:pPr algn="r" indent="0" marL="0">
+            <a:pPr marL="0" indent="0" algn="r">
               <a:buNone/>
             </a:pPr>
             <a:r>
@@ -24368,7 +23812,7 @@
           <a:bodyPr wrap="square" lIns="0" tIns="0" rIns="0" bIns="0" rtlCol="0" anchor="ctr"/>
           <a:lstStyle/>
           <a:p>
-            <a:pPr indent="0" marL="0">
+            <a:pPr marL="0" indent="0">
               <a:buNone/>
             </a:pPr>
             <a:r>
@@ -24399,6 +23843,7 @@
         <a:solidFill>
           <a:srgbClr val="FFFFFF"/>
         </a:solidFill>
+        <a:effectLst/>
       </p:bgPr>
     </p:bg>
     <p:spTree>
@@ -24436,7 +23881,7 @@
           <a:bodyPr wrap="square" lIns="0" tIns="0" rIns="0" bIns="0" rtlCol="0" anchor="ctr"/>
           <a:lstStyle/>
           <a:p>
-            <a:pPr indent="0" marL="0">
+            <a:pPr marL="0" indent="0">
               <a:buNone/>
             </a:pPr>
             <a:r>
@@ -24475,11 +23920,11 @@
           <a:bodyPr wrap="square" lIns="0" tIns="0" rIns="0" bIns="0" rtlCol="0" anchor="ctr"/>
           <a:lstStyle/>
           <a:p>
-            <a:pPr indent="0" marL="0">
-              <a:buNone/>
-            </a:pPr>
-            <a:r>
-              <a:rPr lang="en-US" sz="1300" i="1" spc="200" kern="0" dirty="0">
+            <a:pPr marL="0" indent="0">
+              <a:buNone/>
+            </a:pPr>
+            <a:r>
+              <a:rPr lang="en-US" sz="1300" i="1" kern="0" spc="200" dirty="0">
                 <a:solidFill>
                   <a:srgbClr val="686869"/>
                 </a:solidFill>
@@ -24561,11 +24006,11 @@
           <a:bodyPr wrap="square" lIns="0" tIns="0" rIns="0" bIns="0" rtlCol="0" anchor="ctr"/>
           <a:lstStyle/>
           <a:p>
-            <a:pPr indent="0" marL="0">
-              <a:buNone/>
-            </a:pPr>
-            <a:r>
-              <a:rPr lang="en-US" sz="1100" b="1" spc="200" kern="0" dirty="0">
+            <a:pPr marL="0" indent="0">
+              <a:buNone/>
+            </a:pPr>
+            <a:r>
+              <a:rPr lang="en-US" sz="1100" b="1" kern="0" spc="200" dirty="0">
                 <a:solidFill>
                   <a:srgbClr val="CEB4A9"/>
                 </a:solidFill>
@@ -24597,7 +24042,7 @@
           <a:bodyPr wrap="square" lIns="0" tIns="0" rIns="0" bIns="0" rtlCol="0" anchor="ctr"/>
           <a:lstStyle/>
           <a:p>
-            <a:pPr algn="ctr" indent="0" marL="0">
+            <a:pPr marL="0" indent="0" algn="ctr">
               <a:buNone/>
             </a:pPr>
             <a:r>
@@ -24633,7 +24078,7 @@
           <a:bodyPr wrap="square" lIns="0" tIns="0" rIns="0" bIns="0" rtlCol="0" anchor="ctr"/>
           <a:lstStyle/>
           <a:p>
-            <a:pPr algn="ctr" indent="0" marL="0">
+            <a:pPr marL="0" indent="0" algn="ctr">
               <a:buNone/>
             </a:pPr>
             <a:r>
@@ -24672,7 +24117,7 @@
           <a:bodyPr wrap="square" lIns="0" tIns="0" rIns="0" bIns="0" rtlCol="0" anchor="ctr"/>
           <a:lstStyle/>
           <a:p>
-            <a:pPr algn="ctr" indent="0" marL="0">
+            <a:pPr marL="0" indent="0" algn="ctr">
               <a:buNone/>
             </a:pPr>
             <a:r>
@@ -24714,14 +24159,14 @@
       </p:sp>
       <p:pic>
         <p:nvPicPr>
-          <p:cNvPr id="11" name="Image 0" descr="preencoded.png">    </p:cNvPr>
+          <p:cNvPr id="11" name="Image 0" descr="preencoded.png"/>
           <p:cNvPicPr>
             <a:picLocks noChangeAspect="1"/>
           </p:cNvPicPr>
           <p:nvPr/>
         </p:nvPicPr>
         <p:blipFill>
-          <a:blip r:embed="rId1"/>
+          <a:blip r:embed="rId3"/>
           <a:stretch>
             <a:fillRect/>
           </a:stretch>
@@ -24757,7 +24202,7 @@
           <a:bodyPr wrap="square" lIns="0" tIns="0" rIns="0" bIns="0" rtlCol="0" anchor="ctr"/>
           <a:lstStyle/>
           <a:p>
-            <a:pPr algn="ctr" indent="0" marL="0">
+            <a:pPr marL="0" indent="0" algn="ctr">
               <a:buNone/>
             </a:pPr>
             <a:r>
@@ -24793,7 +24238,7 @@
           <a:bodyPr wrap="square" lIns="0" tIns="0" rIns="0" bIns="0" rtlCol="0" anchor="ctr"/>
           <a:lstStyle/>
           <a:p>
-            <a:pPr algn="ctr" indent="0" marL="0">
+            <a:pPr marL="0" indent="0" algn="ctr">
               <a:buNone/>
             </a:pPr>
             <a:r>
@@ -24854,11 +24299,11 @@
           <a:bodyPr wrap="square" lIns="0" tIns="0" rIns="0" bIns="0" rtlCol="0" anchor="ctr"/>
           <a:lstStyle/>
           <a:p>
-            <a:pPr indent="0" marL="0">
-              <a:buNone/>
-            </a:pPr>
-            <a:r>
-              <a:rPr lang="en-US" sz="1100" b="1" spc="200" kern="0" dirty="0">
+            <a:pPr marL="0" indent="0">
+              <a:buNone/>
+            </a:pPr>
+            <a:r>
+              <a:rPr lang="en-US" sz="1100" b="1" kern="0" spc="200" dirty="0">
                 <a:solidFill>
                   <a:srgbClr val="CEB4A9"/>
                 </a:solidFill>
@@ -24910,7 +24355,7 @@
           <a:bodyPr wrap="square" lIns="0" tIns="0" rIns="0" bIns="0" rtlCol="0" anchor="ctr"/>
           <a:lstStyle/>
           <a:p>
-            <a:pPr algn="ctr" indent="0" marL="0">
+            <a:pPr marL="0" indent="0" algn="ctr">
               <a:buNone/>
             </a:pPr>
             <a:r>
@@ -24949,7 +24394,7 @@
           <a:bodyPr wrap="square" lIns="0" tIns="0" rIns="0" bIns="0" rtlCol="0" anchor="ctr"/>
           <a:lstStyle/>
           <a:p>
-            <a:pPr indent="0" marL="0">
+            <a:pPr marL="0" indent="0">
               <a:buNone/>
             </a:pPr>
             <a:r>
@@ -24985,7 +24430,7 @@
           <a:bodyPr wrap="square" lIns="0" tIns="0" rIns="0" bIns="0" rtlCol="0" anchor="ctr"/>
           <a:lstStyle/>
           <a:p>
-            <a:pPr indent="0" marL="0">
+            <a:pPr marL="0" indent="0">
               <a:buNone/>
             </a:pPr>
             <a:r>
@@ -25021,7 +24466,7 @@
           <a:bodyPr wrap="square" lIns="0" tIns="0" rIns="0" bIns="0" rtlCol="0" anchor="ctr"/>
           <a:lstStyle/>
           <a:p>
-            <a:pPr indent="0" marL="0">
+            <a:pPr marL="0" indent="0">
               <a:buNone/>
             </a:pPr>
             <a:r>
@@ -25057,7 +24502,7 @@
           <a:bodyPr wrap="square" lIns="0" tIns="0" rIns="0" bIns="0" rtlCol="0" anchor="ctr"/>
           <a:lstStyle/>
           <a:p>
-            <a:pPr indent="0" marL="0">
+            <a:pPr marL="0" indent="0">
               <a:buNone/>
             </a:pPr>
             <a:r>
@@ -25113,7 +24558,7 @@
           <a:bodyPr wrap="square" lIns="0" tIns="0" rIns="0" bIns="0" rtlCol="0" anchor="ctr"/>
           <a:lstStyle/>
           <a:p>
-            <a:pPr algn="ctr" indent="0" marL="0">
+            <a:pPr marL="0" indent="0" algn="ctr">
               <a:buNone/>
             </a:pPr>
             <a:r>
@@ -25152,7 +24597,7 @@
           <a:bodyPr wrap="square" lIns="0" tIns="0" rIns="0" bIns="0" rtlCol="0" anchor="ctr"/>
           <a:lstStyle/>
           <a:p>
-            <a:pPr indent="0" marL="0">
+            <a:pPr marL="0" indent="0">
               <a:buNone/>
             </a:pPr>
             <a:r>
@@ -25188,7 +24633,7 @@
           <a:bodyPr wrap="square" lIns="0" tIns="0" rIns="0" bIns="0" rtlCol="0" anchor="ctr"/>
           <a:lstStyle/>
           <a:p>
-            <a:pPr indent="0" marL="0">
+            <a:pPr marL="0" indent="0">
               <a:buNone/>
             </a:pPr>
             <a:r>
@@ -25224,7 +24669,7 @@
           <a:bodyPr wrap="square" lIns="0" tIns="0" rIns="0" bIns="0" rtlCol="0" anchor="ctr"/>
           <a:lstStyle/>
           <a:p>
-            <a:pPr indent="0" marL="0">
+            <a:pPr marL="0" indent="0">
               <a:buNone/>
             </a:pPr>
             <a:r>
@@ -25260,7 +24705,7 @@
           <a:bodyPr wrap="square" lIns="0" tIns="0" rIns="0" bIns="0" rtlCol="0" anchor="ctr"/>
           <a:lstStyle/>
           <a:p>
-            <a:pPr indent="0" marL="0">
+            <a:pPr marL="0" indent="0">
               <a:buNone/>
             </a:pPr>
             <a:r>
@@ -25316,7 +24761,7 @@
           <a:bodyPr wrap="square" lIns="0" tIns="0" rIns="0" bIns="0" rtlCol="0" anchor="ctr"/>
           <a:lstStyle/>
           <a:p>
-            <a:pPr algn="ctr" indent="0" marL="0">
+            <a:pPr marL="0" indent="0" algn="ctr">
               <a:buNone/>
             </a:pPr>
             <a:r>
@@ -25355,7 +24800,7 @@
           <a:bodyPr wrap="square" lIns="0" tIns="0" rIns="0" bIns="0" rtlCol="0" anchor="ctr"/>
           <a:lstStyle/>
           <a:p>
-            <a:pPr indent="0" marL="0">
+            <a:pPr marL="0" indent="0">
               <a:buNone/>
             </a:pPr>
             <a:r>
@@ -25391,7 +24836,7 @@
           <a:bodyPr wrap="square" lIns="0" tIns="0" rIns="0" bIns="0" rtlCol="0" anchor="ctr"/>
           <a:lstStyle/>
           <a:p>
-            <a:pPr indent="0" marL="0">
+            <a:pPr marL="0" indent="0">
               <a:buNone/>
             </a:pPr>
             <a:r>
@@ -25427,7 +24872,7 @@
           <a:bodyPr wrap="square" lIns="0" tIns="0" rIns="0" bIns="0" rtlCol="0" anchor="ctr"/>
           <a:lstStyle/>
           <a:p>
-            <a:pPr indent="0" marL="0">
+            <a:pPr marL="0" indent="0">
               <a:buNone/>
             </a:pPr>
             <a:r>
@@ -25463,7 +24908,7 @@
           <a:bodyPr wrap="square" lIns="0" tIns="0" rIns="0" bIns="0" rtlCol="0" anchor="ctr"/>
           <a:lstStyle/>
           <a:p>
-            <a:pPr indent="0" marL="0">
+            <a:pPr marL="0" indent="0">
               <a:buNone/>
             </a:pPr>
             <a:r>
@@ -25499,7 +24944,7 @@
           <a:bodyPr wrap="square" lIns="0" tIns="0" rIns="0" bIns="0" rtlCol="0" anchor="ctr"/>
           <a:lstStyle/>
           <a:p>
-            <a:pPr algn="r" indent="0" marL="0">
+            <a:pPr marL="0" indent="0" algn="r">
               <a:buNone/>
             </a:pPr>
             <a:r>
@@ -25538,7 +24983,7 @@
           <a:bodyPr wrap="square" lIns="0" tIns="0" rIns="0" bIns="0" rtlCol="0" anchor="ctr"/>
           <a:lstStyle/>
           <a:p>
-            <a:pPr indent="0" marL="0">
+            <a:pPr marL="0" indent="0">
               <a:buNone/>
             </a:pPr>
             <a:r>
@@ -25569,6 +25014,7 @@
         <a:solidFill>
           <a:srgbClr val="FFFFFF"/>
         </a:solidFill>
+        <a:effectLst/>
       </p:bgPr>
     </p:bg>
     <p:spTree>
@@ -25606,7 +25052,7 @@
           <a:bodyPr wrap="square" lIns="0" tIns="0" rIns="0" bIns="0" rtlCol="0" anchor="ctr"/>
           <a:lstStyle/>
           <a:p>
-            <a:pPr indent="0" marL="0">
+            <a:pPr marL="0" indent="0">
               <a:buNone/>
             </a:pPr>
             <a:r>
@@ -25645,11 +25091,11 @@
           <a:bodyPr wrap="square" lIns="0" tIns="0" rIns="0" bIns="0" rtlCol="0" anchor="ctr"/>
           <a:lstStyle/>
           <a:p>
-            <a:pPr indent="0" marL="0">
-              <a:buNone/>
-            </a:pPr>
-            <a:r>
-              <a:rPr lang="en-US" sz="1300" i="1" spc="200" kern="0" dirty="0">
+            <a:pPr marL="0" indent="0">
+              <a:buNone/>
+            </a:pPr>
+            <a:r>
+              <a:rPr lang="en-US" sz="1300" i="1" kern="0" spc="200" dirty="0">
                 <a:solidFill>
                   <a:srgbClr val="686869"/>
                 </a:solidFill>
@@ -25706,7 +25152,7 @@
           <a:bodyPr wrap="square" lIns="0" tIns="0" rIns="0" bIns="0" rtlCol="0" anchor="ctr"/>
           <a:lstStyle/>
           <a:p>
-            <a:pPr indent="0" marL="0">
+            <a:pPr marL="0" indent="0">
               <a:buNone/>
             </a:pPr>
             <a:r>
@@ -25742,7 +25188,7 @@
           <a:bodyPr wrap="square" lIns="0" tIns="0" rIns="0" bIns="0" rtlCol="0" anchor="ctr"/>
           <a:lstStyle/>
           <a:p>
-            <a:pPr indent="0" marL="0">
+            <a:pPr marL="0" indent="0">
               <a:buNone/>
             </a:pPr>
             <a:r>
@@ -25781,7 +25227,7 @@
             <a:prstDash val="solid"/>
           </a:ln>
           <a:effectLst>
-            <a:outerShdw sx="100000" sy="100000" kx="0" ky="0" algn="bl" rotWithShape="0" blurRad="101600" dist="25400" dir="5400000">
+            <a:outerShdw blurRad="101600" dist="25400" dir="5400000" algn="bl" rotWithShape="0">
               <a:srgbClr val="000000">
                 <a:alpha val="6000"/>
               </a:srgbClr>
@@ -25816,14 +25262,14 @@
       </p:sp>
       <p:pic>
         <p:nvPicPr>
-          <p:cNvPr id="9" name="Image 0" descr="preencoded.png">    </p:cNvPr>
+          <p:cNvPr id="9" name="Image 0" descr="preencoded.png"/>
           <p:cNvPicPr>
             <a:picLocks noChangeAspect="1"/>
           </p:cNvPicPr>
           <p:nvPr/>
         </p:nvPicPr>
         <p:blipFill>
-          <a:blip r:embed="rId1"/>
+          <a:blip r:embed="rId3"/>
           <a:stretch>
             <a:fillRect/>
           </a:stretch>
@@ -25859,7 +25305,7 @@
           <a:bodyPr wrap="square" lIns="0" tIns="0" rIns="0" bIns="0" rtlCol="0" anchor="ctr"/>
           <a:lstStyle/>
           <a:p>
-            <a:pPr indent="0" marL="0">
+            <a:pPr marL="0" indent="0">
               <a:buNone/>
             </a:pPr>
             <a:r>
@@ -25895,7 +25341,7 @@
           <a:bodyPr wrap="square" lIns="0" tIns="0" rIns="0" bIns="0" rtlCol="0" anchor="ctr"/>
           <a:lstStyle/>
           <a:p>
-            <a:pPr indent="0" marL="0">
+            <a:pPr marL="0" indent="0">
               <a:buNone/>
             </a:pPr>
             <a:r>
@@ -25956,7 +25402,7 @@
           <a:bodyPr wrap="square" lIns="0" tIns="0" rIns="0" bIns="0" rtlCol="0" anchor="ctr"/>
           <a:lstStyle/>
           <a:p>
-            <a:pPr indent="0" marL="0">
+            <a:pPr marL="0" indent="0">
               <a:buNone/>
             </a:pPr>
             <a:r>
@@ -25995,7 +25441,7 @@
           <a:bodyPr wrap="square" lIns="0" tIns="0" rIns="0" bIns="0" rtlCol="0" anchor="ctr"/>
           <a:lstStyle/>
           <a:p>
-            <a:pPr indent="0" marL="0">
+            <a:pPr marL="0" indent="0">
               <a:buNone/>
             </a:pPr>
             <a:r>
@@ -26056,7 +25502,7 @@
           <a:bodyPr wrap="square" lIns="0" tIns="0" rIns="0" bIns="0" rtlCol="0" anchor="ctr"/>
           <a:lstStyle/>
           <a:p>
-            <a:pPr indent="0" marL="0">
+            <a:pPr marL="0" indent="0">
               <a:buNone/>
             </a:pPr>
             <a:r>
@@ -26117,11 +25563,11 @@
           <a:bodyPr wrap="square" lIns="0" tIns="0" rIns="0" bIns="0" rtlCol="0" anchor="ctr"/>
           <a:lstStyle/>
           <a:p>
-            <a:pPr algn="ctr" indent="0" marL="0">
-              <a:buNone/>
-            </a:pPr>
-            <a:r>
-              <a:rPr lang="en-US" sz="1400" b="1" spc="400" kern="0" dirty="0">
+            <a:pPr marL="0" indent="0" algn="ctr">
+              <a:buNone/>
+            </a:pPr>
+            <a:r>
+              <a:rPr lang="en-US" sz="1400" b="1" kern="0" spc="400" dirty="0">
                 <a:solidFill>
                   <a:srgbClr val="3D3935"/>
                 </a:solidFill>
@@ -26156,7 +25602,7 @@
           <a:bodyPr wrap="square" lIns="0" tIns="0" rIns="0" bIns="0" rtlCol="0" anchor="ctr"/>
           <a:lstStyle/>
           <a:p>
-            <a:pPr indent="0" marL="0">
+            <a:pPr marL="0" indent="0">
               <a:buNone/>
             </a:pPr>
             <a:r>
@@ -26217,7 +25663,7 @@
           <a:bodyPr wrap="square" lIns="0" tIns="0" rIns="0" bIns="0" rtlCol="0" anchor="ctr"/>
           <a:lstStyle/>
           <a:p>
-            <a:pPr algn="ctr" indent="0" marL="0">
+            <a:pPr marL="0" indent="0" algn="ctr">
               <a:buNone/>
             </a:pPr>
             <a:r>
@@ -26257,14 +25703,14 @@
       </p:sp>
       <p:pic>
         <p:nvPicPr>
-          <p:cNvPr id="23" name="Image 1" descr="preencoded.png">    </p:cNvPr>
+          <p:cNvPr id="23" name="Image 1" descr="preencoded.png"/>
           <p:cNvPicPr>
             <a:picLocks noChangeAspect="1"/>
           </p:cNvPicPr>
           <p:nvPr/>
         </p:nvPicPr>
         <p:blipFill>
-          <a:blip r:embed="rId2"/>
+          <a:blip r:embed="rId4"/>
           <a:stretch>
             <a:fillRect/>
           </a:stretch>
@@ -26300,7 +25746,7 @@
           <a:bodyPr wrap="square" lIns="0" tIns="0" rIns="0" bIns="0" rtlCol="0" anchor="ctr"/>
           <a:lstStyle/>
           <a:p>
-            <a:pPr indent="0" marL="0">
+            <a:pPr marL="0" indent="0">
               <a:buNone/>
             </a:pPr>
             <a:r>
@@ -26361,11 +25807,11 @@
           <a:bodyPr wrap="square" lIns="0" tIns="0" rIns="0" bIns="0" rtlCol="0" anchor="ctr"/>
           <a:lstStyle/>
           <a:p>
-            <a:pPr indent="0" marL="0">
-              <a:buNone/>
-            </a:pPr>
-            <a:r>
-              <a:rPr lang="en-US" sz="1100" b="1" spc="200" kern="0" dirty="0">
+            <a:pPr marL="0" indent="0">
+              <a:buNone/>
+            </a:pPr>
+            <a:r>
+              <a:rPr lang="en-US" sz="1100" b="1" kern="0" spc="200" dirty="0">
                 <a:solidFill>
                   <a:srgbClr val="CEB4A9"/>
                 </a:solidFill>
@@ -26417,7 +25863,7 @@
           <a:bodyPr wrap="square" lIns="0" tIns="0" rIns="0" bIns="0" rtlCol="0" anchor="ctr"/>
           <a:lstStyle/>
           <a:p>
-            <a:pPr algn="ctr" indent="0" marL="0">
+            <a:pPr marL="0" indent="0" algn="ctr">
               <a:buNone/>
             </a:pPr>
             <a:r>
@@ -26456,7 +25902,7 @@
           <a:bodyPr wrap="square" lIns="0" tIns="0" rIns="0" bIns="0" rtlCol="0" anchor="ctr"/>
           <a:lstStyle/>
           <a:p>
-            <a:pPr indent="0" marL="0">
+            <a:pPr marL="0" indent="0">
               <a:buNone/>
             </a:pPr>
             <a:r>
@@ -26492,7 +25938,7 @@
           <a:bodyPr wrap="square" lIns="0" tIns="0" rIns="0" bIns="0" rtlCol="0" anchor="ctr"/>
           <a:lstStyle/>
           <a:p>
-            <a:pPr indent="0" marL="0">
+            <a:pPr marL="0" indent="0">
               <a:buNone/>
             </a:pPr>
             <a:r>
@@ -26548,7 +25994,7 @@
           <a:bodyPr wrap="square" lIns="0" tIns="0" rIns="0" bIns="0" rtlCol="0" anchor="ctr"/>
           <a:lstStyle/>
           <a:p>
-            <a:pPr algn="ctr" indent="0" marL="0">
+            <a:pPr marL="0" indent="0" algn="ctr">
               <a:buNone/>
             </a:pPr>
             <a:r>
@@ -26587,7 +26033,7 @@
           <a:bodyPr wrap="square" lIns="0" tIns="0" rIns="0" bIns="0" rtlCol="0" anchor="ctr"/>
           <a:lstStyle/>
           <a:p>
-            <a:pPr indent="0" marL="0">
+            <a:pPr marL="0" indent="0">
               <a:buNone/>
             </a:pPr>
             <a:r>
@@ -26623,7 +26069,7 @@
           <a:bodyPr wrap="square" lIns="0" tIns="0" rIns="0" bIns="0" rtlCol="0" anchor="ctr"/>
           <a:lstStyle/>
           <a:p>
-            <a:pPr indent="0" marL="0">
+            <a:pPr marL="0" indent="0">
               <a:buNone/>
             </a:pPr>
             <a:r>
@@ -26679,7 +26125,7 @@
           <a:bodyPr wrap="square" lIns="0" tIns="0" rIns="0" bIns="0" rtlCol="0" anchor="ctr"/>
           <a:lstStyle/>
           <a:p>
-            <a:pPr algn="ctr" indent="0" marL="0">
+            <a:pPr marL="0" indent="0" algn="ctr">
               <a:buNone/>
             </a:pPr>
             <a:r>
@@ -26718,7 +26164,7 @@
           <a:bodyPr wrap="square" lIns="0" tIns="0" rIns="0" bIns="0" rtlCol="0" anchor="ctr"/>
           <a:lstStyle/>
           <a:p>
-            <a:pPr indent="0" marL="0">
+            <a:pPr marL="0" indent="0">
               <a:buNone/>
             </a:pPr>
             <a:r>
@@ -26754,7 +26200,7 @@
           <a:bodyPr wrap="square" lIns="0" tIns="0" rIns="0" bIns="0" rtlCol="0" anchor="ctr"/>
           <a:lstStyle/>
           <a:p>
-            <a:pPr indent="0" marL="0">
+            <a:pPr marL="0" indent="0">
               <a:buNone/>
             </a:pPr>
             <a:r>
@@ -26790,7 +26236,7 @@
           <a:bodyPr wrap="square" lIns="0" tIns="0" rIns="0" bIns="0" rtlCol="0" anchor="ctr"/>
           <a:lstStyle/>
           <a:p>
-            <a:pPr algn="r" indent="0" marL="0">
+            <a:pPr marL="0" indent="0" algn="r">
               <a:buNone/>
             </a:pPr>
             <a:r>
@@ -26829,7 +26275,7 @@
           <a:bodyPr wrap="square" lIns="0" tIns="0" rIns="0" bIns="0" rtlCol="0" anchor="ctr"/>
           <a:lstStyle/>
           <a:p>
-            <a:pPr indent="0" marL="0">
+            <a:pPr marL="0" indent="0">
               <a:buNone/>
             </a:pPr>
             <a:r>
@@ -26860,6 +26306,7 @@
         <a:solidFill>
           <a:srgbClr val="FFFFFF"/>
         </a:solidFill>
+        <a:effectLst/>
       </p:bgPr>
     </p:bg>
     <p:spTree>
@@ -26897,7 +26344,7 @@
           <a:bodyPr wrap="square" lIns="0" tIns="0" rIns="0" bIns="0" rtlCol="0" anchor="ctr"/>
           <a:lstStyle/>
           <a:p>
-            <a:pPr indent="0" marL="0">
+            <a:pPr marL="0" indent="0">
               <a:buNone/>
             </a:pPr>
             <a:r>
@@ -26936,11 +26383,11 @@
           <a:bodyPr wrap="square" lIns="0" tIns="0" rIns="0" bIns="0" rtlCol="0" anchor="ctr"/>
           <a:lstStyle/>
           <a:p>
-            <a:pPr indent="0" marL="0">
-              <a:buNone/>
-            </a:pPr>
-            <a:r>
-              <a:rPr lang="en-US" sz="1300" i="1" spc="200" kern="0" dirty="0">
+            <a:pPr marL="0" indent="0">
+              <a:buNone/>
+            </a:pPr>
+            <a:r>
+              <a:rPr lang="en-US" sz="1300" i="1" kern="0" spc="200" dirty="0">
                 <a:solidFill>
                   <a:srgbClr val="686869"/>
                 </a:solidFill>
@@ -27000,7 +26447,7 @@
             <a:prstDash val="solid"/>
           </a:ln>
           <a:effectLst>
-            <a:outerShdw sx="100000" sy="100000" kx="0" ky="0" algn="bl" rotWithShape="0" blurRad="101600" dist="25400" dir="5400000">
+            <a:outerShdw blurRad="101600" dist="25400" dir="5400000" algn="bl" rotWithShape="0">
               <a:srgbClr val="000000">
                 <a:alpha val="6000"/>
               </a:srgbClr>
@@ -27029,7 +26476,7 @@
           <a:bodyPr wrap="square" lIns="0" tIns="0" rIns="0" bIns="0" rtlCol="0" anchor="ctr"/>
           <a:lstStyle/>
           <a:p>
-            <a:pPr indent="0" marL="0">
+            <a:pPr marL="0" indent="0">
               <a:buNone/>
             </a:pPr>
             <a:r>
@@ -27065,7 +26512,7 @@
           <a:bodyPr wrap="square" lIns="0" tIns="0" rIns="0" bIns="0" rtlCol="0" anchor="ctr"/>
           <a:lstStyle/>
           <a:p>
-            <a:pPr indent="0" marL="0">
+            <a:pPr marL="0" indent="0">
               <a:buNone/>
             </a:pPr>
             <a:r>
@@ -27101,7 +26548,7 @@
           <a:bodyPr wrap="square" lIns="0" tIns="0" rIns="0" bIns="0" rtlCol="0" anchor="ctr"/>
           <a:lstStyle/>
           <a:p>
-            <a:pPr indent="0" marL="0">
+            <a:pPr marL="0" indent="0">
               <a:buNone/>
             </a:pPr>
             <a:r>
@@ -27162,11 +26609,11 @@
           <a:bodyPr wrap="square" lIns="0" tIns="0" rIns="0" bIns="0" rtlCol="0" anchor="ctr"/>
           <a:lstStyle/>
           <a:p>
-            <a:pPr indent="0" marL="0">
-              <a:buNone/>
-            </a:pPr>
-            <a:r>
-              <a:rPr lang="en-US" sz="1000" spc="200" kern="0" dirty="0">
+            <a:pPr marL="0" indent="0">
+              <a:buNone/>
+            </a:pPr>
+            <a:r>
+              <a:rPr lang="en-US" sz="1000" kern="0" spc="200" dirty="0">
                 <a:solidFill>
                   <a:srgbClr val="065F46"/>
                 </a:solidFill>
@@ -27198,7 +26645,7 @@
           <a:bodyPr wrap="square" lIns="0" tIns="0" rIns="0" bIns="0" rtlCol="0" anchor="t"/>
           <a:lstStyle/>
           <a:p>
-            <a:pPr indent="0" marL="0">
+            <a:pPr marL="0" indent="0">
               <a:buNone/>
             </a:pPr>
             <a:r>
@@ -27234,7 +26681,7 @@
           <a:bodyPr wrap="square" lIns="0" tIns="0" rIns="0" bIns="0" rtlCol="0" anchor="t"/>
           <a:lstStyle/>
           <a:p>
-            <a:pPr indent="0" marL="0">
+            <a:pPr marL="0" indent="0">
               <a:buNone/>
             </a:pPr>
             <a:r>
@@ -27295,11 +26742,11 @@
           <a:bodyPr wrap="square" lIns="0" tIns="0" rIns="0" bIns="0" rtlCol="0" anchor="ctr"/>
           <a:lstStyle/>
           <a:p>
-            <a:pPr indent="0" marL="0">
-              <a:buNone/>
-            </a:pPr>
-            <a:r>
-              <a:rPr lang="en-US" sz="1000" spc="200" kern="0" dirty="0">
+            <a:pPr marL="0" indent="0">
+              <a:buNone/>
+            </a:pPr>
+            <a:r>
+              <a:rPr lang="en-US" sz="1000" kern="0" spc="200" dirty="0">
                 <a:solidFill>
                   <a:srgbClr val="065F46"/>
                 </a:solidFill>
@@ -27331,7 +26778,7 @@
           <a:bodyPr wrap="square" lIns="0" tIns="0" rIns="0" bIns="0" rtlCol="0" anchor="t"/>
           <a:lstStyle/>
           <a:p>
-            <a:pPr indent="0" marL="0">
+            <a:pPr marL="0" indent="0">
               <a:lnSpc>
                 <a:spcPts val="1600"/>
               </a:lnSpc>
@@ -27348,7 +26795,7 @@
             <a:endParaRPr lang="en-US" sz="1200" dirty="0"/>
           </a:p>
           <a:p>
-            <a:pPr indent="0" marL="0">
+            <a:pPr marL="0" indent="0">
               <a:lnSpc>
                 <a:spcPts val="1600"/>
               </a:lnSpc>
@@ -27387,7 +26834,7 @@
           <a:bodyPr wrap="square" lIns="0" tIns="0" rIns="0" bIns="0" rtlCol="0" anchor="t"/>
           <a:lstStyle/>
           <a:p>
-            <a:pPr indent="0" marL="0">
+            <a:pPr marL="0" indent="0">
               <a:lnSpc>
                 <a:spcPts val="1200"/>
               </a:lnSpc>
@@ -27404,7 +26851,7 @@
             <a:endParaRPr lang="en-US" sz="950" dirty="0"/>
           </a:p>
           <a:p>
-            <a:pPr indent="0" marL="0">
+            <a:pPr marL="0" indent="0">
               <a:lnSpc>
                 <a:spcPts val="1200"/>
               </a:lnSpc>
@@ -27446,7 +26893,7 @@
             <a:prstDash val="solid"/>
           </a:ln>
           <a:effectLst>
-            <a:outerShdw sx="100000" sy="100000" kx="0" ky="0" algn="bl" rotWithShape="0" blurRad="101600" dist="25400" dir="5400000">
+            <a:outerShdw blurRad="101600" dist="25400" dir="5400000" algn="bl" rotWithShape="0">
               <a:srgbClr val="000000">
                 <a:alpha val="6000"/>
               </a:srgbClr>
@@ -27475,7 +26922,7 @@
           <a:bodyPr wrap="square" lIns="0" tIns="0" rIns="0" bIns="0" rtlCol="0" anchor="ctr"/>
           <a:lstStyle/>
           <a:p>
-            <a:pPr indent="0" marL="0">
+            <a:pPr marL="0" indent="0">
               <a:buNone/>
             </a:pPr>
             <a:r>
@@ -27511,7 +26958,7 @@
           <a:bodyPr wrap="square" lIns="0" tIns="0" rIns="0" bIns="0" rtlCol="0" anchor="ctr"/>
           <a:lstStyle/>
           <a:p>
-            <a:pPr indent="0" marL="0">
+            <a:pPr marL="0" indent="0">
               <a:buNone/>
             </a:pPr>
             <a:r>
@@ -27547,7 +26994,7 @@
           <a:bodyPr wrap="square" lIns="0" tIns="0" rIns="0" bIns="0" rtlCol="0" anchor="ctr"/>
           <a:lstStyle/>
           <a:p>
-            <a:pPr indent="0" marL="0">
+            <a:pPr marL="0" indent="0">
               <a:buNone/>
             </a:pPr>
             <a:r>
@@ -27608,11 +27055,11 @@
           <a:bodyPr wrap="square" lIns="0" tIns="0" rIns="0" bIns="0" rtlCol="0" anchor="ctr"/>
           <a:lstStyle/>
           <a:p>
-            <a:pPr indent="0" marL="0">
-              <a:buNone/>
-            </a:pPr>
-            <a:r>
-              <a:rPr lang="en-US" sz="1000" spc="200" kern="0" dirty="0">
+            <a:pPr marL="0" indent="0">
+              <a:buNone/>
+            </a:pPr>
+            <a:r>
+              <a:rPr lang="en-US" sz="1000" kern="0" spc="200" dirty="0">
                 <a:solidFill>
                   <a:srgbClr val="991B1B"/>
                 </a:solidFill>
@@ -27644,7 +27091,7 @@
           <a:bodyPr wrap="square" lIns="0" tIns="0" rIns="0" bIns="0" rtlCol="0" anchor="t"/>
           <a:lstStyle/>
           <a:p>
-            <a:pPr indent="0" marL="0">
+            <a:pPr marL="0" indent="0">
               <a:buNone/>
             </a:pPr>
             <a:r>
@@ -27680,7 +27127,7 @@
           <a:bodyPr wrap="square" lIns="0" tIns="0" rIns="0" bIns="0" rtlCol="0" anchor="t"/>
           <a:lstStyle/>
           <a:p>
-            <a:pPr indent="0" marL="0">
+            <a:pPr marL="0" indent="0">
               <a:buNone/>
             </a:pPr>
             <a:r>
@@ -27741,11 +27188,11 @@
           <a:bodyPr wrap="square" lIns="0" tIns="0" rIns="0" bIns="0" rtlCol="0" anchor="ctr"/>
           <a:lstStyle/>
           <a:p>
-            <a:pPr indent="0" marL="0">
-              <a:buNone/>
-            </a:pPr>
-            <a:r>
-              <a:rPr lang="en-US" sz="1000" spc="200" kern="0" dirty="0">
+            <a:pPr marL="0" indent="0">
+              <a:buNone/>
+            </a:pPr>
+            <a:r>
+              <a:rPr lang="en-US" sz="1000" kern="0" spc="200" dirty="0">
                 <a:solidFill>
                   <a:srgbClr val="991B1B"/>
                 </a:solidFill>
@@ -27777,7 +27224,7 @@
           <a:bodyPr wrap="square" lIns="0" tIns="0" rIns="0" bIns="0" rtlCol="0" anchor="t"/>
           <a:lstStyle/>
           <a:p>
-            <a:pPr indent="0" marL="0">
+            <a:pPr marL="0" indent="0">
               <a:lnSpc>
                 <a:spcPts val="1600"/>
               </a:lnSpc>
@@ -27794,7 +27241,7 @@
             <a:endParaRPr lang="en-US" sz="1200" dirty="0"/>
           </a:p>
           <a:p>
-            <a:pPr indent="0" marL="0">
+            <a:pPr marL="0" indent="0">
               <a:lnSpc>
                 <a:spcPts val="1600"/>
               </a:lnSpc>
@@ -27833,7 +27280,7 @@
           <a:bodyPr wrap="square" lIns="0" tIns="0" rIns="0" bIns="0" rtlCol="0" anchor="t"/>
           <a:lstStyle/>
           <a:p>
-            <a:pPr indent="0" marL="0">
+            <a:pPr marL="0" indent="0">
               <a:lnSpc>
                 <a:spcPts val="1200"/>
               </a:lnSpc>
@@ -27850,7 +27297,7 @@
             <a:endParaRPr lang="en-US" sz="950" dirty="0"/>
           </a:p>
           <a:p>
-            <a:pPr indent="0" marL="0">
+            <a:pPr marL="0" indent="0">
               <a:lnSpc>
                 <a:spcPts val="1200"/>
               </a:lnSpc>
@@ -27892,7 +27339,7 @@
             <a:prstDash val="solid"/>
           </a:ln>
           <a:effectLst>
-            <a:outerShdw sx="100000" sy="100000" kx="0" ky="0" algn="bl" rotWithShape="0" blurRad="101600" dist="25400" dir="5400000">
+            <a:outerShdw blurRad="101600" dist="25400" dir="5400000" algn="bl" rotWithShape="0">
               <a:srgbClr val="000000">
                 <a:alpha val="6000"/>
               </a:srgbClr>
@@ -27921,7 +27368,7 @@
           <a:bodyPr wrap="square" lIns="0" tIns="0" rIns="0" bIns="0" rtlCol="0" anchor="ctr"/>
           <a:lstStyle/>
           <a:p>
-            <a:pPr indent="0" marL="0">
+            <a:pPr marL="0" indent="0">
               <a:buNone/>
             </a:pPr>
             <a:r>
@@ -27957,7 +27404,7 @@
           <a:bodyPr wrap="square" lIns="0" tIns="0" rIns="0" bIns="0" rtlCol="0" anchor="ctr"/>
           <a:lstStyle/>
           <a:p>
-            <a:pPr indent="0" marL="0">
+            <a:pPr marL="0" indent="0">
               <a:buNone/>
             </a:pPr>
             <a:r>
@@ -27993,7 +27440,7 @@
           <a:bodyPr wrap="square" lIns="0" tIns="0" rIns="0" bIns="0" rtlCol="0" anchor="ctr"/>
           <a:lstStyle/>
           <a:p>
-            <a:pPr indent="0" marL="0">
+            <a:pPr marL="0" indent="0">
               <a:buNone/>
             </a:pPr>
             <a:r>
@@ -28054,11 +27501,11 @@
           <a:bodyPr wrap="square" lIns="0" tIns="0" rIns="0" bIns="0" rtlCol="0" anchor="ctr"/>
           <a:lstStyle/>
           <a:p>
-            <a:pPr indent="0" marL="0">
-              <a:buNone/>
-            </a:pPr>
-            <a:r>
-              <a:rPr lang="en-US" sz="1000" spc="200" kern="0" dirty="0">
+            <a:pPr marL="0" indent="0">
+              <a:buNone/>
+            </a:pPr>
+            <a:r>
+              <a:rPr lang="en-US" sz="1000" kern="0" spc="200" dirty="0">
                 <a:solidFill>
                   <a:srgbClr val="B45309"/>
                 </a:solidFill>
@@ -28090,7 +27537,7 @@
           <a:bodyPr wrap="square" lIns="0" tIns="0" rIns="0" bIns="0" rtlCol="0" anchor="t"/>
           <a:lstStyle/>
           <a:p>
-            <a:pPr indent="0" marL="0">
+            <a:pPr marL="0" indent="0">
               <a:buNone/>
             </a:pPr>
             <a:r>
@@ -28126,7 +27573,7 @@
           <a:bodyPr wrap="square" lIns="0" tIns="0" rIns="0" bIns="0" rtlCol="0" anchor="t"/>
           <a:lstStyle/>
           <a:p>
-            <a:pPr indent="0" marL="0">
+            <a:pPr marL="0" indent="0">
               <a:buNone/>
             </a:pPr>
             <a:r>
@@ -28187,11 +27634,11 @@
           <a:bodyPr wrap="square" lIns="0" tIns="0" rIns="0" bIns="0" rtlCol="0" anchor="ctr"/>
           <a:lstStyle/>
           <a:p>
-            <a:pPr indent="0" marL="0">
-              <a:buNone/>
-            </a:pPr>
-            <a:r>
-              <a:rPr lang="en-US" sz="1000" spc="200" kern="0" dirty="0">
+            <a:pPr marL="0" indent="0">
+              <a:buNone/>
+            </a:pPr>
+            <a:r>
+              <a:rPr lang="en-US" sz="1000" kern="0" spc="200" dirty="0">
                 <a:solidFill>
                   <a:srgbClr val="B45309"/>
                 </a:solidFill>
@@ -28223,7 +27670,7 @@
           <a:bodyPr wrap="square" lIns="0" tIns="0" rIns="0" bIns="0" rtlCol="0" anchor="t"/>
           <a:lstStyle/>
           <a:p>
-            <a:pPr indent="0" marL="0">
+            <a:pPr marL="0" indent="0">
               <a:lnSpc>
                 <a:spcPts val="1600"/>
               </a:lnSpc>
@@ -28240,7 +27687,7 @@
             <a:endParaRPr lang="en-US" sz="1200" dirty="0"/>
           </a:p>
           <a:p>
-            <a:pPr indent="0" marL="0">
+            <a:pPr marL="0" indent="0">
               <a:lnSpc>
                 <a:spcPts val="1600"/>
               </a:lnSpc>
@@ -28279,7 +27726,7 @@
           <a:bodyPr wrap="square" lIns="0" tIns="0" rIns="0" bIns="0" rtlCol="0" anchor="t"/>
           <a:lstStyle/>
           <a:p>
-            <a:pPr indent="0" marL="0">
+            <a:pPr marL="0" indent="0">
               <a:lnSpc>
                 <a:spcPts val="1200"/>
               </a:lnSpc>
@@ -28296,7 +27743,7 @@
             <a:endParaRPr lang="en-US" sz="950" dirty="0"/>
           </a:p>
           <a:p>
-            <a:pPr indent="0" marL="0">
+            <a:pPr marL="0" indent="0">
               <a:lnSpc>
                 <a:spcPts val="1200"/>
               </a:lnSpc>
@@ -28335,7 +27782,7 @@
           <a:bodyPr wrap="square" lIns="0" tIns="0" rIns="0" bIns="0" rtlCol="0" anchor="ctr"/>
           <a:lstStyle/>
           <a:p>
-            <a:pPr algn="r" indent="0" marL="0">
+            <a:pPr marL="0" indent="0" algn="r">
               <a:buNone/>
             </a:pPr>
             <a:r>
@@ -28374,7 +27821,7 @@
           <a:bodyPr wrap="square" lIns="0" tIns="0" rIns="0" bIns="0" rtlCol="0" anchor="ctr"/>
           <a:lstStyle/>
           <a:p>
-            <a:pPr indent="0" marL="0">
+            <a:pPr marL="0" indent="0">
               <a:buNone/>
             </a:pPr>
             <a:r>
@@ -28690,4 +28137,299 @@
     </a:ext>
   </a:extLst>
 </a:theme>
+</file>
+
+<file path=ppt/theme/theme2.xml><?xml version="1.0" encoding="utf-8"?>
+<a:theme xmlns:a="http://schemas.openxmlformats.org/drawingml/2006/main" name="Office 佈景主題">
+  <a:themeElements>
+    <a:clrScheme name="Office">
+      <a:dk1>
+        <a:sysClr val="windowText" lastClr="000000"/>
+      </a:dk1>
+      <a:lt1>
+        <a:sysClr val="window" lastClr="FFFFFF"/>
+      </a:lt1>
+      <a:dk2>
+        <a:srgbClr val="44546A"/>
+      </a:dk2>
+      <a:lt2>
+        <a:srgbClr val="E7E6E6"/>
+      </a:lt2>
+      <a:accent1>
+        <a:srgbClr val="4472C4"/>
+      </a:accent1>
+      <a:accent2>
+        <a:srgbClr val="ED7D31"/>
+      </a:accent2>
+      <a:accent3>
+        <a:srgbClr val="A5A5A5"/>
+      </a:accent3>
+      <a:accent4>
+        <a:srgbClr val="FFC000"/>
+      </a:accent4>
+      <a:accent5>
+        <a:srgbClr val="5B9BD5"/>
+      </a:accent5>
+      <a:accent6>
+        <a:srgbClr val="70AD47"/>
+      </a:accent6>
+      <a:hlink>
+        <a:srgbClr val="0563C1"/>
+      </a:hlink>
+      <a:folHlink>
+        <a:srgbClr val="954F72"/>
+      </a:folHlink>
+    </a:clrScheme>
+    <a:fontScheme name="Office">
+      <a:majorFont>
+        <a:latin typeface="Calibri Light" panose="020F0302020204030204"/>
+        <a:ea typeface=""/>
+        <a:cs typeface=""/>
+        <a:font script="Jpan" typeface="游ゴシック Light"/>
+        <a:font script="Hang" typeface="맑은 고딕"/>
+        <a:font script="Hans" typeface="等线 Light"/>
+        <a:font script="Hant" typeface="新細明體"/>
+        <a:font script="Arab" typeface="Times New Roman"/>
+        <a:font script="Hebr" typeface="Times New Roman"/>
+        <a:font script="Thai" typeface="Angsana New"/>
+        <a:font script="Ethi" typeface="Nyala"/>
+        <a:font script="Beng" typeface="Vrinda"/>
+        <a:font script="Gujr" typeface="Shruti"/>
+        <a:font script="Khmr" typeface="MoolBoran"/>
+        <a:font script="Knda" typeface="Tunga"/>
+        <a:font script="Guru" typeface="Raavi"/>
+        <a:font script="Cans" typeface="Euphemia"/>
+        <a:font script="Cher" typeface="Plantagenet Cherokee"/>
+        <a:font script="Yiii" typeface="Microsoft Yi Baiti"/>
+        <a:font script="Tibt" typeface="Microsoft Himalaya"/>
+        <a:font script="Thaa" typeface="MV Boli"/>
+        <a:font script="Deva" typeface="Mangal"/>
+        <a:font script="Telu" typeface="Gautami"/>
+        <a:font script="Taml" typeface="Latha"/>
+        <a:font script="Syrc" typeface="Estrangelo Edessa"/>
+        <a:font script="Orya" typeface="Kalinga"/>
+        <a:font script="Mlym" typeface="Kartika"/>
+        <a:font script="Laoo" typeface="DokChampa"/>
+        <a:font script="Sinh" typeface="Iskoola Pota"/>
+        <a:font script="Mong" typeface="Mongolian Baiti"/>
+        <a:font script="Viet" typeface="Times New Roman"/>
+        <a:font script="Uigh" typeface="Microsoft Uighur"/>
+        <a:font script="Geor" typeface="Sylfaen"/>
+        <a:font script="Armn" typeface="Arial"/>
+        <a:font script="Bugi" typeface="Leelawadee UI"/>
+        <a:font script="Bopo" typeface="Microsoft JhengHei"/>
+        <a:font script="Java" typeface="Javanese Text"/>
+        <a:font script="Lisu" typeface="Segoe UI"/>
+        <a:font script="Mymr" typeface="Myanmar Text"/>
+        <a:font script="Nkoo" typeface="Ebrima"/>
+        <a:font script="Olck" typeface="Nirmala UI"/>
+        <a:font script="Osma" typeface="Ebrima"/>
+        <a:font script="Phag" typeface="Phagspa"/>
+        <a:font script="Syrn" typeface="Estrangelo Edessa"/>
+        <a:font script="Syrj" typeface="Estrangelo Edessa"/>
+        <a:font script="Syre" typeface="Estrangelo Edessa"/>
+        <a:font script="Sora" typeface="Nirmala UI"/>
+        <a:font script="Tale" typeface="Microsoft Tai Le"/>
+        <a:font script="Talu" typeface="Microsoft New Tai Lue"/>
+        <a:font script="Tfng" typeface="Ebrima"/>
+      </a:majorFont>
+      <a:minorFont>
+        <a:latin typeface="Calibri" panose="020F0502020204030204"/>
+        <a:ea typeface=""/>
+        <a:cs typeface=""/>
+        <a:font script="Jpan" typeface="游ゴシック"/>
+        <a:font script="Hang" typeface="맑은 고딕"/>
+        <a:font script="Hans" typeface="等线"/>
+        <a:font script="Hant" typeface="新細明體"/>
+        <a:font script="Arab" typeface="Arial"/>
+        <a:font script="Hebr" typeface="Arial"/>
+        <a:font script="Thai" typeface="Cordia New"/>
+        <a:font script="Ethi" typeface="Nyala"/>
+        <a:font script="Beng" typeface="Vrinda"/>
+        <a:font script="Gujr" typeface="Shruti"/>
+        <a:font script="Khmr" typeface="DaunPenh"/>
+        <a:font script="Knda" typeface="Tunga"/>
+        <a:font script="Guru" typeface="Raavi"/>
+        <a:font script="Cans" typeface="Euphemia"/>
+        <a:font script="Cher" typeface="Plantagenet Cherokee"/>
+        <a:font script="Yiii" typeface="Microsoft Yi Baiti"/>
+        <a:font script="Tibt" typeface="Microsoft Himalaya"/>
+        <a:font script="Thaa" typeface="MV Boli"/>
+        <a:font script="Deva" typeface="Mangal"/>
+        <a:font script="Telu" typeface="Gautami"/>
+        <a:font script="Taml" typeface="Latha"/>
+        <a:font script="Syrc" typeface="Estrangelo Edessa"/>
+        <a:font script="Orya" typeface="Kalinga"/>
+        <a:font script="Mlym" typeface="Kartika"/>
+        <a:font script="Laoo" typeface="DokChampa"/>
+        <a:font script="Sinh" typeface="Iskoola Pota"/>
+        <a:font script="Mong" typeface="Mongolian Baiti"/>
+        <a:font script="Viet" typeface="Arial"/>
+        <a:font script="Uigh" typeface="Microsoft Uighur"/>
+        <a:font script="Geor" typeface="Sylfaen"/>
+        <a:font script="Armn" typeface="Arial"/>
+        <a:font script="Bugi" typeface="Leelawadee UI"/>
+        <a:font script="Bopo" typeface="Microsoft JhengHei"/>
+        <a:font script="Java" typeface="Javanese Text"/>
+        <a:font script="Lisu" typeface="Segoe UI"/>
+        <a:font script="Mymr" typeface="Myanmar Text"/>
+        <a:font script="Nkoo" typeface="Ebrima"/>
+        <a:font script="Olck" typeface="Nirmala UI"/>
+        <a:font script="Osma" typeface="Ebrima"/>
+        <a:font script="Phag" typeface="Phagspa"/>
+        <a:font script="Syrn" typeface="Estrangelo Edessa"/>
+        <a:font script="Syrj" typeface="Estrangelo Edessa"/>
+        <a:font script="Syre" typeface="Estrangelo Edessa"/>
+        <a:font script="Sora" typeface="Nirmala UI"/>
+        <a:font script="Tale" typeface="Microsoft Tai Le"/>
+        <a:font script="Talu" typeface="Microsoft New Tai Lue"/>
+        <a:font script="Tfng" typeface="Ebrima"/>
+      </a:minorFont>
+    </a:fontScheme>
+    <a:fmtScheme name="Office">
+      <a:fillStyleLst>
+        <a:solidFill>
+          <a:schemeClr val="phClr"/>
+        </a:solidFill>
+        <a:gradFill rotWithShape="1">
+          <a:gsLst>
+            <a:gs pos="0">
+              <a:schemeClr val="phClr">
+                <a:lumMod val="110000"/>
+                <a:satMod val="105000"/>
+                <a:tint val="67000"/>
+              </a:schemeClr>
+            </a:gs>
+            <a:gs pos="50000">
+              <a:schemeClr val="phClr">
+                <a:lumMod val="105000"/>
+                <a:satMod val="103000"/>
+                <a:tint val="73000"/>
+              </a:schemeClr>
+            </a:gs>
+            <a:gs pos="100000">
+              <a:schemeClr val="phClr">
+                <a:lumMod val="105000"/>
+                <a:satMod val="109000"/>
+                <a:tint val="81000"/>
+              </a:schemeClr>
+            </a:gs>
+          </a:gsLst>
+          <a:lin ang="5400000" scaled="0"/>
+        </a:gradFill>
+        <a:gradFill rotWithShape="1">
+          <a:gsLst>
+            <a:gs pos="0">
+              <a:schemeClr val="phClr">
+                <a:satMod val="103000"/>
+                <a:lumMod val="102000"/>
+                <a:tint val="94000"/>
+              </a:schemeClr>
+            </a:gs>
+            <a:gs pos="50000">
+              <a:schemeClr val="phClr">
+                <a:satMod val="110000"/>
+                <a:lumMod val="100000"/>
+                <a:shade val="100000"/>
+              </a:schemeClr>
+            </a:gs>
+            <a:gs pos="100000">
+              <a:schemeClr val="phClr">
+                <a:lumMod val="99000"/>
+                <a:satMod val="120000"/>
+                <a:shade val="78000"/>
+              </a:schemeClr>
+            </a:gs>
+          </a:gsLst>
+          <a:lin ang="5400000" scaled="0"/>
+        </a:gradFill>
+      </a:fillStyleLst>
+      <a:lnStyleLst>
+        <a:ln w="6350" cap="flat" cmpd="sng" algn="ctr">
+          <a:solidFill>
+            <a:schemeClr val="phClr"/>
+          </a:solidFill>
+          <a:prstDash val="solid"/>
+          <a:miter lim="800000"/>
+        </a:ln>
+        <a:ln w="12700" cap="flat" cmpd="sng" algn="ctr">
+          <a:solidFill>
+            <a:schemeClr val="phClr"/>
+          </a:solidFill>
+          <a:prstDash val="solid"/>
+          <a:miter lim="800000"/>
+        </a:ln>
+        <a:ln w="19050" cap="flat" cmpd="sng" algn="ctr">
+          <a:solidFill>
+            <a:schemeClr val="phClr"/>
+          </a:solidFill>
+          <a:prstDash val="solid"/>
+          <a:miter lim="800000"/>
+        </a:ln>
+      </a:lnStyleLst>
+      <a:effectStyleLst>
+        <a:effectStyle>
+          <a:effectLst/>
+        </a:effectStyle>
+        <a:effectStyle>
+          <a:effectLst/>
+        </a:effectStyle>
+        <a:effectStyle>
+          <a:effectLst>
+            <a:outerShdw blurRad="57150" dist="19050" dir="5400000" algn="ctr" rotWithShape="0">
+              <a:srgbClr val="000000">
+                <a:alpha val="63000"/>
+              </a:srgbClr>
+            </a:outerShdw>
+          </a:effectLst>
+        </a:effectStyle>
+      </a:effectStyleLst>
+      <a:bgFillStyleLst>
+        <a:solidFill>
+          <a:schemeClr val="phClr"/>
+        </a:solidFill>
+        <a:solidFill>
+          <a:schemeClr val="phClr">
+            <a:tint val="95000"/>
+            <a:satMod val="170000"/>
+          </a:schemeClr>
+        </a:solidFill>
+        <a:gradFill rotWithShape="1">
+          <a:gsLst>
+            <a:gs pos="0">
+              <a:schemeClr val="phClr">
+                <a:tint val="93000"/>
+                <a:satMod val="150000"/>
+                <a:shade val="98000"/>
+                <a:lumMod val="102000"/>
+              </a:schemeClr>
+            </a:gs>
+            <a:gs pos="50000">
+              <a:schemeClr val="phClr">
+                <a:tint val="98000"/>
+                <a:satMod val="130000"/>
+                <a:shade val="90000"/>
+                <a:lumMod val="103000"/>
+              </a:schemeClr>
+            </a:gs>
+            <a:gs pos="100000">
+              <a:schemeClr val="phClr">
+                <a:shade val="63000"/>
+                <a:satMod val="120000"/>
+              </a:schemeClr>
+            </a:gs>
+          </a:gsLst>
+          <a:lin ang="5400000" scaled="0"/>
+        </a:gradFill>
+      </a:bgFillStyleLst>
+    </a:fmtScheme>
+  </a:themeElements>
+  <a:objectDefaults/>
+  <a:extraClrSchemeLst/>
+  <a:extLst>
+    <a:ext uri="{05A4C25C-085E-4340-85A3-A5531E510DB2}">
+      <thm15:themeFamily xmlns:thm15="http://schemas.microsoft.com/office/thememl/2012/main" name="Office Theme" id="{62F939B6-93AF-4DB8-9C6B-D6C7DFDC589F}" vid="{4A3C46E8-61CC-4603-A589-7422A47A8E4A}"/>
+    </a:ext>
+  </a:extLst>
+</a:theme>
 </file>